--- a/presentation/HSDES_NEXUS_Presentation.pptx
+++ b/presentation/HSDES_NEXUS_Presentation.pptx
@@ -5,14 +5,14 @@
     <p:sldMasterId id="2147483648" r:id="rId1"/>
   </p:sldMasterIdLst>
   <p:sldIdLst>
-    <p:sldId id="256" r:id="rId7"/>
-    <p:sldId id="257" r:id="rId8"/>
-    <p:sldId id="258" r:id="rId9"/>
-    <p:sldId id="259" r:id="rId10"/>
-    <p:sldId id="260" r:id="rId11"/>
-    <p:sldId id="261" r:id="rId12"/>
+    <p:sldId id="256" r:id="rId2"/>
+    <p:sldId id="257" r:id="rId3"/>
+    <p:sldId id="258" r:id="rId4"/>
+    <p:sldId id="259" r:id="rId5"/>
+    <p:sldId id="260" r:id="rId6"/>
+    <p:sldId id="261" r:id="rId7"/>
   </p:sldIdLst>
-  <p:sldSz cx="12191695" cy="6858000" type="screen4x3"/>
+  <p:sldSz cx="12192000" cy="6858000"/>
   <p:notesSz cx="6858000" cy="9144000"/>
   <p:defaultTextStyle>
     <a:defPPr>
@@ -109,7 +109,52 @@
       </a:defRPr>
     </a:lvl9pPr>
   </p:defaultTextStyle>
+  <p:extLst>
+    <p:ext uri="{EFAFB233-063F-42B5-8137-9DF3F51BA10A}">
+      <p15:sldGuideLst xmlns:p15="http://schemas.microsoft.com/office/powerpoint/2012/main">
+        <p15:guide id="1" orient="horz" pos="2160">
+          <p15:clr>
+            <a:srgbClr val="A4A3A4"/>
+          </p15:clr>
+        </p15:guide>
+        <p15:guide id="2" pos="2880">
+          <p15:clr>
+            <a:srgbClr val="A4A3A4"/>
+          </p15:clr>
+        </p15:guide>
+      </p15:sldGuideLst>
+    </p:ext>
+  </p:extLst>
 </p:presentation>
+</file>
+
+<file path=ppt/changesInfos/changesInfo1.xml><?xml version="1.0" encoding="utf-8"?>
+<pc:chgInfo xmlns:a="http://schemas.openxmlformats.org/drawingml/2006/main" xmlns:r="http://schemas.openxmlformats.org/officeDocument/2006/relationships" xmlns:ac="http://schemas.microsoft.com/office/drawing/2013/main/command" xmlns:pc="http://schemas.microsoft.com/office/powerpoint/2013/main/command">
+  <pc:docChgLst>
+    <pc:chgData name="Rajaram, Balaji" userId="ef3de614-10a3-4ba9-80dc-e89bcc86f5f4" providerId="ADAL" clId="{7C535360-BD65-42DA-BD95-1E44F351206F}"/>
+    <pc:docChg chg="undo custSel modSld">
+      <pc:chgData name="Rajaram, Balaji" userId="ef3de614-10a3-4ba9-80dc-e89bcc86f5f4" providerId="ADAL" clId="{7C535360-BD65-42DA-BD95-1E44F351206F}" dt="2026-09-02T06:31:51" v="1" actId="1076"/>
+      <pc:docMkLst>
+        <pc:docMk/>
+      </pc:docMkLst>
+      <pc:sldChg chg="modSp mod">
+        <pc:chgData name="Rajaram, Balaji" userId="ef3de614-10a3-4ba9-80dc-e89bcc86f5f4" providerId="ADAL" clId="{7C535360-BD65-42DA-BD95-1E44F351206F}" dt="2026-09-02T06:31:51" v="1" actId="1076"/>
+        <pc:sldMkLst>
+          <pc:docMk/>
+          <pc:sldMk cId="0" sldId="261"/>
+        </pc:sldMkLst>
+        <pc:spChg chg="mod">
+          <ac:chgData name="Rajaram, Balaji" userId="ef3de614-10a3-4ba9-80dc-e89bcc86f5f4" providerId="ADAL" clId="{7C535360-BD65-42DA-BD95-1E44F351206F}" dt="2026-09-02T06:31:51" v="1" actId="1076"/>
+          <ac:spMkLst>
+            <pc:docMk/>
+            <pc:sldMk cId="0" sldId="261"/>
+            <ac:spMk id="3" creationId="{00000000-0000-0000-0000-000000000000}"/>
+          </ac:spMkLst>
+        </pc:spChg>
+      </pc:sldChg>
+    </pc:docChg>
+  </pc:docChgLst>
+</pc:chgInfo>
 </file>
 
 <file path=ppt/slideLayouts/slideLayout1.xml><?xml version="1.0" encoding="utf-8"?>
@@ -150,10 +195,9 @@
           <a:lstStyle/>
           <a:p>
             <a:r>
-              <a:rPr lang="en-US" smtClean="0"/>
+              <a:rPr lang="en-US"/>
               <a:t>Click to edit Master title style</a:t>
             </a:r>
-            <a:endParaRPr lang="en-US"/>
           </a:p>
         </p:txBody>
       </p:sp>
@@ -269,10 +313,9 @@
           </a:lstStyle>
           <a:p>
             <a:r>
-              <a:rPr lang="en-US" smtClean="0"/>
+              <a:rPr lang="en-US"/>
               <a:t>Click to edit Master subtitle style</a:t>
             </a:r>
-            <a:endParaRPr lang="en-US"/>
           </a:p>
         </p:txBody>
       </p:sp>
@@ -293,7 +336,7 @@
           <a:p>
             <a:fld id="{5BCAD085-E8A6-8845-BD4E-CB4CCA059FC4}" type="datetimeFigureOut">
               <a:rPr lang="en-US" smtClean="0"/>
-              <a:t>1/27/13</a:t>
+              <a:t>9/2/2026</a:t>
             </a:fld>
             <a:endParaRPr lang="en-US"/>
           </a:p>
@@ -387,10 +430,9 @@
           <a:lstStyle/>
           <a:p>
             <a:r>
-              <a:rPr lang="en-US" smtClean="0"/>
+              <a:rPr lang="en-US"/>
               <a:t>Click to edit Master title style</a:t>
             </a:r>
-            <a:endParaRPr lang="en-US"/>
           </a:p>
         </p:txBody>
       </p:sp>
@@ -411,38 +453,37 @@
           <a:p>
             <a:pPr lvl="0"/>
             <a:r>
-              <a:rPr lang="en-US" smtClean="0"/>
+              <a:rPr lang="en-US"/>
               <a:t>Click to edit Master text styles</a:t>
             </a:r>
           </a:p>
           <a:p>
             <a:pPr lvl="1"/>
             <a:r>
-              <a:rPr lang="en-US" smtClean="0"/>
+              <a:rPr lang="en-US"/>
               <a:t>Second level</a:t>
             </a:r>
           </a:p>
           <a:p>
             <a:pPr lvl="2"/>
             <a:r>
-              <a:rPr lang="en-US" smtClean="0"/>
+              <a:rPr lang="en-US"/>
               <a:t>Third level</a:t>
             </a:r>
           </a:p>
           <a:p>
             <a:pPr lvl="3"/>
             <a:r>
-              <a:rPr lang="en-US" smtClean="0"/>
+              <a:rPr lang="en-US"/>
               <a:t>Fourth level</a:t>
             </a:r>
           </a:p>
           <a:p>
             <a:pPr lvl="4"/>
             <a:r>
-              <a:rPr lang="en-US" smtClean="0"/>
+              <a:rPr lang="en-US"/>
               <a:t>Fifth level</a:t>
             </a:r>
-            <a:endParaRPr lang="en-US"/>
           </a:p>
         </p:txBody>
       </p:sp>
@@ -463,7 +504,7 @@
           <a:p>
             <a:fld id="{5BCAD085-E8A6-8845-BD4E-CB4CCA059FC4}" type="datetimeFigureOut">
               <a:rPr lang="en-US" smtClean="0"/>
-              <a:t>1/27/13</a:t>
+              <a:t>9/2/2026</a:t>
             </a:fld>
             <a:endParaRPr lang="en-US"/>
           </a:p>
@@ -562,10 +603,9 @@
           <a:lstStyle/>
           <a:p>
             <a:r>
-              <a:rPr lang="en-US" smtClean="0"/>
+              <a:rPr lang="en-US"/>
               <a:t>Click to edit Master title style</a:t>
             </a:r>
-            <a:endParaRPr lang="en-US"/>
           </a:p>
         </p:txBody>
       </p:sp>
@@ -591,38 +631,37 @@
           <a:p>
             <a:pPr lvl="0"/>
             <a:r>
-              <a:rPr lang="en-US" smtClean="0"/>
+              <a:rPr lang="en-US"/>
               <a:t>Click to edit Master text styles</a:t>
             </a:r>
           </a:p>
           <a:p>
             <a:pPr lvl="1"/>
             <a:r>
-              <a:rPr lang="en-US" smtClean="0"/>
+              <a:rPr lang="en-US"/>
               <a:t>Second level</a:t>
             </a:r>
           </a:p>
           <a:p>
             <a:pPr lvl="2"/>
             <a:r>
-              <a:rPr lang="en-US" smtClean="0"/>
+              <a:rPr lang="en-US"/>
               <a:t>Third level</a:t>
             </a:r>
           </a:p>
           <a:p>
             <a:pPr lvl="3"/>
             <a:r>
-              <a:rPr lang="en-US" smtClean="0"/>
+              <a:rPr lang="en-US"/>
               <a:t>Fourth level</a:t>
             </a:r>
           </a:p>
           <a:p>
             <a:pPr lvl="4"/>
             <a:r>
-              <a:rPr lang="en-US" smtClean="0"/>
+              <a:rPr lang="en-US"/>
               <a:t>Fifth level</a:t>
             </a:r>
-            <a:endParaRPr lang="en-US"/>
           </a:p>
         </p:txBody>
       </p:sp>
@@ -643,7 +682,7 @@
           <a:p>
             <a:fld id="{5BCAD085-E8A6-8845-BD4E-CB4CCA059FC4}" type="datetimeFigureOut">
               <a:rPr lang="en-US" smtClean="0"/>
-              <a:t>1/27/13</a:t>
+              <a:t>9/2/2026</a:t>
             </a:fld>
             <a:endParaRPr lang="en-US"/>
           </a:p>
@@ -737,10 +776,9 @@
           <a:lstStyle/>
           <a:p>
             <a:r>
-              <a:rPr lang="en-US" smtClean="0"/>
+              <a:rPr lang="en-US"/>
               <a:t>Click to edit Master title style</a:t>
             </a:r>
-            <a:endParaRPr lang="en-US"/>
           </a:p>
         </p:txBody>
       </p:sp>
@@ -761,38 +799,37 @@
           <a:p>
             <a:pPr lvl="0"/>
             <a:r>
-              <a:rPr lang="en-US" smtClean="0"/>
+              <a:rPr lang="en-US"/>
               <a:t>Click to edit Master text styles</a:t>
             </a:r>
           </a:p>
           <a:p>
             <a:pPr lvl="1"/>
             <a:r>
-              <a:rPr lang="en-US" smtClean="0"/>
+              <a:rPr lang="en-US"/>
               <a:t>Second level</a:t>
             </a:r>
           </a:p>
           <a:p>
             <a:pPr lvl="2"/>
             <a:r>
-              <a:rPr lang="en-US" smtClean="0"/>
+              <a:rPr lang="en-US"/>
               <a:t>Third level</a:t>
             </a:r>
           </a:p>
           <a:p>
             <a:pPr lvl="3"/>
             <a:r>
-              <a:rPr lang="en-US" smtClean="0"/>
+              <a:rPr lang="en-US"/>
               <a:t>Fourth level</a:t>
             </a:r>
           </a:p>
           <a:p>
             <a:pPr lvl="4"/>
             <a:r>
-              <a:rPr lang="en-US" smtClean="0"/>
+              <a:rPr lang="en-US"/>
               <a:t>Fifth level</a:t>
             </a:r>
-            <a:endParaRPr lang="en-US"/>
           </a:p>
         </p:txBody>
       </p:sp>
@@ -813,7 +850,7 @@
           <a:p>
             <a:fld id="{5BCAD085-E8A6-8845-BD4E-CB4CCA059FC4}" type="datetimeFigureOut">
               <a:rPr lang="en-US" smtClean="0"/>
-              <a:t>1/27/13</a:t>
+              <a:t>9/2/2026</a:t>
             </a:fld>
             <a:endParaRPr lang="en-US"/>
           </a:p>
@@ -916,10 +953,9 @@
           </a:lstStyle>
           <a:p>
             <a:r>
-              <a:rPr lang="en-US" smtClean="0"/>
+              <a:rPr lang="en-US"/>
               <a:t>Click to edit Master title style</a:t>
             </a:r>
-            <a:endParaRPr lang="en-US"/>
           </a:p>
         </p:txBody>
       </p:sp>
@@ -1036,7 +1072,7 @@
           <a:p>
             <a:pPr lvl="0"/>
             <a:r>
-              <a:rPr lang="en-US" smtClean="0"/>
+              <a:rPr lang="en-US"/>
               <a:t>Click to edit Master text styles</a:t>
             </a:r>
           </a:p>
@@ -1059,7 +1095,7 @@
           <a:p>
             <a:fld id="{5BCAD085-E8A6-8845-BD4E-CB4CCA059FC4}" type="datetimeFigureOut">
               <a:rPr lang="en-US" smtClean="0"/>
-              <a:t>1/27/13</a:t>
+              <a:t>9/2/2026</a:t>
             </a:fld>
             <a:endParaRPr lang="en-US"/>
           </a:p>
@@ -1153,10 +1189,9 @@
           <a:lstStyle/>
           <a:p>
             <a:r>
-              <a:rPr lang="en-US" smtClean="0"/>
+              <a:rPr lang="en-US"/>
               <a:t>Click to edit Master title style</a:t>
             </a:r>
-            <a:endParaRPr lang="en-US"/>
           </a:p>
         </p:txBody>
       </p:sp>
@@ -1210,38 +1245,37 @@
           <a:p>
             <a:pPr lvl="0"/>
             <a:r>
-              <a:rPr lang="en-US" smtClean="0"/>
+              <a:rPr lang="en-US"/>
               <a:t>Click to edit Master text styles</a:t>
             </a:r>
           </a:p>
           <a:p>
             <a:pPr lvl="1"/>
             <a:r>
-              <a:rPr lang="en-US" smtClean="0"/>
+              <a:rPr lang="en-US"/>
               <a:t>Second level</a:t>
             </a:r>
           </a:p>
           <a:p>
             <a:pPr lvl="2"/>
             <a:r>
-              <a:rPr lang="en-US" smtClean="0"/>
+              <a:rPr lang="en-US"/>
               <a:t>Third level</a:t>
             </a:r>
           </a:p>
           <a:p>
             <a:pPr lvl="3"/>
             <a:r>
-              <a:rPr lang="en-US" smtClean="0"/>
+              <a:rPr lang="en-US"/>
               <a:t>Fourth level</a:t>
             </a:r>
           </a:p>
           <a:p>
             <a:pPr lvl="4"/>
             <a:r>
-              <a:rPr lang="en-US" smtClean="0"/>
+              <a:rPr lang="en-US"/>
               <a:t>Fifth level</a:t>
             </a:r>
-            <a:endParaRPr lang="en-US"/>
           </a:p>
         </p:txBody>
       </p:sp>
@@ -1295,38 +1329,37 @@
           <a:p>
             <a:pPr lvl="0"/>
             <a:r>
-              <a:rPr lang="en-US" smtClean="0"/>
+              <a:rPr lang="en-US"/>
               <a:t>Click to edit Master text styles</a:t>
             </a:r>
           </a:p>
           <a:p>
             <a:pPr lvl="1"/>
             <a:r>
-              <a:rPr lang="en-US" smtClean="0"/>
+              <a:rPr lang="en-US"/>
               <a:t>Second level</a:t>
             </a:r>
           </a:p>
           <a:p>
             <a:pPr lvl="2"/>
             <a:r>
-              <a:rPr lang="en-US" smtClean="0"/>
+              <a:rPr lang="en-US"/>
               <a:t>Third level</a:t>
             </a:r>
           </a:p>
           <a:p>
             <a:pPr lvl="3"/>
             <a:r>
-              <a:rPr lang="en-US" smtClean="0"/>
+              <a:rPr lang="en-US"/>
               <a:t>Fourth level</a:t>
             </a:r>
           </a:p>
           <a:p>
             <a:pPr lvl="4"/>
             <a:r>
-              <a:rPr lang="en-US" smtClean="0"/>
+              <a:rPr lang="en-US"/>
               <a:t>Fifth level</a:t>
             </a:r>
-            <a:endParaRPr lang="en-US"/>
           </a:p>
         </p:txBody>
       </p:sp>
@@ -1347,7 +1380,7 @@
           <a:p>
             <a:fld id="{5BCAD085-E8A6-8845-BD4E-CB4CCA059FC4}" type="datetimeFigureOut">
               <a:rPr lang="en-US" smtClean="0"/>
-              <a:t>1/27/13</a:t>
+              <a:t>9/2/2026</a:t>
             </a:fld>
             <a:endParaRPr lang="en-US"/>
           </a:p>
@@ -1445,10 +1478,9 @@
           </a:lstStyle>
           <a:p>
             <a:r>
-              <a:rPr lang="en-US" smtClean="0"/>
+              <a:rPr lang="en-US"/>
               <a:t>Click to edit Master title style</a:t>
             </a:r>
-            <a:endParaRPr lang="en-US"/>
           </a:p>
         </p:txBody>
       </p:sp>
@@ -1511,7 +1543,7 @@
           <a:p>
             <a:pPr lvl="0"/>
             <a:r>
-              <a:rPr lang="en-US" smtClean="0"/>
+              <a:rPr lang="en-US"/>
               <a:t>Click to edit Master text styles</a:t>
             </a:r>
           </a:p>
@@ -1567,38 +1599,37 @@
           <a:p>
             <a:pPr lvl="0"/>
             <a:r>
-              <a:rPr lang="en-US" smtClean="0"/>
+              <a:rPr lang="en-US"/>
               <a:t>Click to edit Master text styles</a:t>
             </a:r>
           </a:p>
           <a:p>
             <a:pPr lvl="1"/>
             <a:r>
-              <a:rPr lang="en-US" smtClean="0"/>
+              <a:rPr lang="en-US"/>
               <a:t>Second level</a:t>
             </a:r>
           </a:p>
           <a:p>
             <a:pPr lvl="2"/>
             <a:r>
-              <a:rPr lang="en-US" smtClean="0"/>
+              <a:rPr lang="en-US"/>
               <a:t>Third level</a:t>
             </a:r>
           </a:p>
           <a:p>
             <a:pPr lvl="3"/>
             <a:r>
-              <a:rPr lang="en-US" smtClean="0"/>
+              <a:rPr lang="en-US"/>
               <a:t>Fourth level</a:t>
             </a:r>
           </a:p>
           <a:p>
             <a:pPr lvl="4"/>
             <a:r>
-              <a:rPr lang="en-US" smtClean="0"/>
+              <a:rPr lang="en-US"/>
               <a:t>Fifth level</a:t>
             </a:r>
-            <a:endParaRPr lang="en-US"/>
           </a:p>
         </p:txBody>
       </p:sp>
@@ -1661,7 +1692,7 @@
           <a:p>
             <a:pPr lvl="0"/>
             <a:r>
-              <a:rPr lang="en-US" smtClean="0"/>
+              <a:rPr lang="en-US"/>
               <a:t>Click to edit Master text styles</a:t>
             </a:r>
           </a:p>
@@ -1717,38 +1748,37 @@
           <a:p>
             <a:pPr lvl="0"/>
             <a:r>
-              <a:rPr lang="en-US" smtClean="0"/>
+              <a:rPr lang="en-US"/>
               <a:t>Click to edit Master text styles</a:t>
             </a:r>
           </a:p>
           <a:p>
             <a:pPr lvl="1"/>
             <a:r>
-              <a:rPr lang="en-US" smtClean="0"/>
+              <a:rPr lang="en-US"/>
               <a:t>Second level</a:t>
             </a:r>
           </a:p>
           <a:p>
             <a:pPr lvl="2"/>
             <a:r>
-              <a:rPr lang="en-US" smtClean="0"/>
+              <a:rPr lang="en-US"/>
               <a:t>Third level</a:t>
             </a:r>
           </a:p>
           <a:p>
             <a:pPr lvl="3"/>
             <a:r>
-              <a:rPr lang="en-US" smtClean="0"/>
+              <a:rPr lang="en-US"/>
               <a:t>Fourth level</a:t>
             </a:r>
           </a:p>
           <a:p>
             <a:pPr lvl="4"/>
             <a:r>
-              <a:rPr lang="en-US" smtClean="0"/>
+              <a:rPr lang="en-US"/>
               <a:t>Fifth level</a:t>
             </a:r>
-            <a:endParaRPr lang="en-US"/>
           </a:p>
         </p:txBody>
       </p:sp>
@@ -1769,7 +1799,7 @@
           <a:p>
             <a:fld id="{5BCAD085-E8A6-8845-BD4E-CB4CCA059FC4}" type="datetimeFigureOut">
               <a:rPr lang="en-US" smtClean="0"/>
-              <a:t>1/27/13</a:t>
+              <a:t>9/2/2026</a:t>
             </a:fld>
             <a:endParaRPr lang="en-US"/>
           </a:p>
@@ -1863,10 +1893,9 @@
           <a:lstStyle/>
           <a:p>
             <a:r>
-              <a:rPr lang="en-US" smtClean="0"/>
+              <a:rPr lang="en-US"/>
               <a:t>Click to edit Master title style</a:t>
             </a:r>
-            <a:endParaRPr lang="en-US"/>
           </a:p>
         </p:txBody>
       </p:sp>
@@ -1887,7 +1916,7 @@
           <a:p>
             <a:fld id="{5BCAD085-E8A6-8845-BD4E-CB4CCA059FC4}" type="datetimeFigureOut">
               <a:rPr lang="en-US" smtClean="0"/>
-              <a:t>1/27/13</a:t>
+              <a:t>9/2/2026</a:t>
             </a:fld>
             <a:endParaRPr lang="en-US"/>
           </a:p>
@@ -1982,7 +2011,7 @@
           <a:p>
             <a:fld id="{5BCAD085-E8A6-8845-BD4E-CB4CCA059FC4}" type="datetimeFigureOut">
               <a:rPr lang="en-US" smtClean="0"/>
-              <a:t>1/27/13</a:t>
+              <a:t>9/2/2026</a:t>
             </a:fld>
             <a:endParaRPr lang="en-US"/>
           </a:p>
@@ -2085,10 +2114,9 @@
           </a:lstStyle>
           <a:p>
             <a:r>
-              <a:rPr lang="en-US" smtClean="0"/>
+              <a:rPr lang="en-US"/>
               <a:t>Click to edit Master title style</a:t>
             </a:r>
-            <a:endParaRPr lang="en-US"/>
           </a:p>
         </p:txBody>
       </p:sp>
@@ -2142,38 +2170,37 @@
           <a:p>
             <a:pPr lvl="0"/>
             <a:r>
-              <a:rPr lang="en-US" smtClean="0"/>
+              <a:rPr lang="en-US"/>
               <a:t>Click to edit Master text styles</a:t>
             </a:r>
           </a:p>
           <a:p>
             <a:pPr lvl="1"/>
             <a:r>
-              <a:rPr lang="en-US" smtClean="0"/>
+              <a:rPr lang="en-US"/>
               <a:t>Second level</a:t>
             </a:r>
           </a:p>
           <a:p>
             <a:pPr lvl="2"/>
             <a:r>
-              <a:rPr lang="en-US" smtClean="0"/>
+              <a:rPr lang="en-US"/>
               <a:t>Third level</a:t>
             </a:r>
           </a:p>
           <a:p>
             <a:pPr lvl="3"/>
             <a:r>
-              <a:rPr lang="en-US" smtClean="0"/>
+              <a:rPr lang="en-US"/>
               <a:t>Fourth level</a:t>
             </a:r>
           </a:p>
           <a:p>
             <a:pPr lvl="4"/>
             <a:r>
-              <a:rPr lang="en-US" smtClean="0"/>
+              <a:rPr lang="en-US"/>
               <a:t>Fifth level</a:t>
             </a:r>
-            <a:endParaRPr lang="en-US"/>
           </a:p>
         </p:txBody>
       </p:sp>
@@ -2236,7 +2263,7 @@
           <a:p>
             <a:pPr lvl="0"/>
             <a:r>
-              <a:rPr lang="en-US" smtClean="0"/>
+              <a:rPr lang="en-US"/>
               <a:t>Click to edit Master text styles</a:t>
             </a:r>
           </a:p>
@@ -2259,7 +2286,7 @@
           <a:p>
             <a:fld id="{5BCAD085-E8A6-8845-BD4E-CB4CCA059FC4}" type="datetimeFigureOut">
               <a:rPr lang="en-US" smtClean="0"/>
-              <a:t>1/27/13</a:t>
+              <a:t>9/2/2026</a:t>
             </a:fld>
             <a:endParaRPr lang="en-US"/>
           </a:p>
@@ -2362,10 +2389,9 @@
           </a:lstStyle>
           <a:p>
             <a:r>
-              <a:rPr lang="en-US" smtClean="0"/>
+              <a:rPr lang="en-US"/>
               <a:t>Click to edit Master title style</a:t>
             </a:r>
-            <a:endParaRPr lang="en-US"/>
           </a:p>
         </p:txBody>
       </p:sp>
@@ -2489,7 +2515,7 @@
           <a:p>
             <a:pPr lvl="0"/>
             <a:r>
-              <a:rPr lang="en-US" smtClean="0"/>
+              <a:rPr lang="en-US"/>
               <a:t>Click to edit Master text styles</a:t>
             </a:r>
           </a:p>
@@ -2512,7 +2538,7 @@
           <a:p>
             <a:fld id="{5BCAD085-E8A6-8845-BD4E-CB4CCA059FC4}" type="datetimeFigureOut">
               <a:rPr lang="en-US" smtClean="0"/>
-              <a:t>1/27/13</a:t>
+              <a:t>9/2/2026</a:t>
             </a:fld>
             <a:endParaRPr lang="en-US"/>
           </a:p>
@@ -2621,10 +2647,9 @@
           <a:lstStyle/>
           <a:p>
             <a:r>
-              <a:rPr lang="en-US" smtClean="0"/>
+              <a:rPr lang="en-US"/>
               <a:t>Click to edit Master title style</a:t>
             </a:r>
-            <a:endParaRPr lang="en-US"/>
           </a:p>
         </p:txBody>
       </p:sp>
@@ -2655,38 +2680,37 @@
           <a:p>
             <a:pPr lvl="0"/>
             <a:r>
-              <a:rPr lang="en-US" smtClean="0"/>
+              <a:rPr lang="en-US"/>
               <a:t>Click to edit Master text styles</a:t>
             </a:r>
           </a:p>
           <a:p>
             <a:pPr lvl="1"/>
             <a:r>
-              <a:rPr lang="en-US" smtClean="0"/>
+              <a:rPr lang="en-US"/>
               <a:t>Second level</a:t>
             </a:r>
           </a:p>
           <a:p>
             <a:pPr lvl="2"/>
             <a:r>
-              <a:rPr lang="en-US" smtClean="0"/>
+              <a:rPr lang="en-US"/>
               <a:t>Third level</a:t>
             </a:r>
           </a:p>
           <a:p>
             <a:pPr lvl="3"/>
             <a:r>
-              <a:rPr lang="en-US" smtClean="0"/>
+              <a:rPr lang="en-US"/>
               <a:t>Fourth level</a:t>
             </a:r>
           </a:p>
           <a:p>
             <a:pPr lvl="4"/>
             <a:r>
-              <a:rPr lang="en-US" smtClean="0"/>
+              <a:rPr lang="en-US"/>
               <a:t>Fifth level</a:t>
             </a:r>
-            <a:endParaRPr lang="en-US"/>
           </a:p>
         </p:txBody>
       </p:sp>
@@ -2725,7 +2749,7 @@
           <a:p>
             <a:fld id="{5BCAD085-E8A6-8845-BD4E-CB4CCA059FC4}" type="datetimeFigureOut">
               <a:rPr lang="en-US" smtClean="0"/>
-              <a:t>1/27/13</a:t>
+              <a:t>9/2/2026</a:t>
             </a:fld>
             <a:endParaRPr lang="en-US"/>
           </a:p>
@@ -3084,7 +3108,7 @@
 </file>
 
 <file path=ppt/slides/slide1.xml><?xml version="1.0" encoding="utf-8"?>
-<p:sld xmlns:a="http://schemas.openxmlformats.org/drawingml/2006/main" xmlns:p="http://schemas.openxmlformats.org/presentationml/2006/main" xmlns:r="http://schemas.openxmlformats.org/officeDocument/2006/relationships">
+<p:sld xmlns:a="http://schemas.openxmlformats.org/drawingml/2006/main" xmlns:r="http://schemas.openxmlformats.org/officeDocument/2006/relationships" xmlns:p="http://schemas.openxmlformats.org/presentationml/2006/main">
   <p:cSld>
     <p:spTree>
       <p:nvGrpSpPr>
@@ -3092,7 +3116,14 @@
         <p:cNvGrpSpPr/>
         <p:nvPr/>
       </p:nvGrpSpPr>
-      <p:grpSpPr/>
+      <p:grpSpPr>
+        <a:xfrm>
+          <a:off x="0" y="0"/>
+          <a:ext cx="0" cy="0"/>
+          <a:chOff x="0" y="0"/>
+          <a:chExt cx="0" cy="0"/>
+        </a:xfrm>
+      </p:grpSpPr>
       <p:sp>
         <p:nvSpPr>
           <p:cNvPr id="2" name="Rectangle 1"/>
@@ -3133,6 +3164,7 @@
           <a:lstStyle/>
           <a:p>
             <a:pPr algn="ctr"/>
+            <a:endParaRPr/>
           </a:p>
         </p:txBody>
       </p:sp>
@@ -3166,6 +3198,7 @@
               </a:defRPr>
             </a:pPr>
             <a:r>
+              <a:rPr dirty="0"/>
               <a:t>HSDES NEXUS</a:t>
             </a:r>
           </a:p>
@@ -3178,7 +3211,16 @@
               </a:defRPr>
             </a:pPr>
             <a:r>
-              <a:t>Agentic HSD Triage  +  PythonSV Live Debug over the Lab NUC</a:t>
+              <a:rPr dirty="0"/>
+              <a:t>Agentic HSD Triage  +  </a:t>
+            </a:r>
+            <a:r>
+              <a:rPr dirty="0" err="1"/>
+              <a:t>PythonSV</a:t>
+            </a:r>
+            <a:r>
+              <a:rPr dirty="0"/>
+              <a:t> Live Debug over the Lab NUC</a:t>
             </a:r>
           </a:p>
           <a:p>
@@ -3190,7 +3232,24 @@
               </a:defRPr>
             </a:pPr>
             <a:r>
-              <a:t>Evolution of BugScout — one FastAPI tool for server-platform debug</a:t>
+              <a:rPr dirty="0"/>
+              <a:t>Evolution of </a:t>
+            </a:r>
+            <a:r>
+              <a:rPr dirty="0" err="1"/>
+              <a:t>BugScout</a:t>
+            </a:r>
+            <a:r>
+              <a:rPr dirty="0"/>
+              <a:t> — one </a:t>
+            </a:r>
+            <a:r>
+              <a:rPr dirty="0" err="1"/>
+              <a:t>FastAPI</a:t>
+            </a:r>
+            <a:r>
+              <a:rPr dirty="0"/>
+              <a:t> tool for server-platform debug</a:t>
             </a:r>
           </a:p>
         </p:txBody>
@@ -3235,6 +3294,7 @@
           <a:lstStyle/>
           <a:p>
             <a:pPr algn="ctr"/>
+            <a:endParaRPr/>
           </a:p>
         </p:txBody>
       </p:sp>
@@ -3247,7 +3307,7 @@
 </file>
 
 <file path=ppt/slides/slide2.xml><?xml version="1.0" encoding="utf-8"?>
-<p:sld xmlns:a="http://schemas.openxmlformats.org/drawingml/2006/main" xmlns:p="http://schemas.openxmlformats.org/presentationml/2006/main" xmlns:r="http://schemas.openxmlformats.org/officeDocument/2006/relationships">
+<p:sld xmlns:a="http://schemas.openxmlformats.org/drawingml/2006/main" xmlns:r="http://schemas.openxmlformats.org/officeDocument/2006/relationships" xmlns:p="http://schemas.openxmlformats.org/presentationml/2006/main">
   <p:cSld>
     <p:spTree>
       <p:nvGrpSpPr>
@@ -3255,7 +3315,14 @@
         <p:cNvGrpSpPr/>
         <p:nvPr/>
       </p:nvGrpSpPr>
-      <p:grpSpPr/>
+      <p:grpSpPr>
+        <a:xfrm>
+          <a:off x="0" y="0"/>
+          <a:ext cx="0" cy="0"/>
+          <a:chOff x="0" y="0"/>
+          <a:chExt cx="0" cy="0"/>
+        </a:xfrm>
+      </p:grpSpPr>
       <p:sp>
         <p:nvSpPr>
           <p:cNvPr id="2" name="Rectangle 1"/>
@@ -3292,7 +3359,7 @@
           </a:fontRef>
         </p:style>
         <p:txBody>
-          <a:bodyPr rtlCol="0" anchor="ctr" lIns="365760" wrap="square"/>
+          <a:bodyPr wrap="square" lIns="365760" rtlCol="0" anchor="ctr"/>
           <a:lstStyle/>
           <a:p>
             <a:pPr algn="ctr">
@@ -3442,7 +3509,7 @@
 </file>
 
 <file path=ppt/slides/slide3.xml><?xml version="1.0" encoding="utf-8"?>
-<p:sld xmlns:a="http://schemas.openxmlformats.org/drawingml/2006/main" xmlns:p="http://schemas.openxmlformats.org/presentationml/2006/main" xmlns:r="http://schemas.openxmlformats.org/officeDocument/2006/relationships">
+<p:sld xmlns:a="http://schemas.openxmlformats.org/drawingml/2006/main" xmlns:r="http://schemas.openxmlformats.org/officeDocument/2006/relationships" xmlns:p="http://schemas.openxmlformats.org/presentationml/2006/main">
   <p:cSld>
     <p:spTree>
       <p:nvGrpSpPr>
@@ -3450,7 +3517,14 @@
         <p:cNvGrpSpPr/>
         <p:nvPr/>
       </p:nvGrpSpPr>
-      <p:grpSpPr/>
+      <p:grpSpPr>
+        <a:xfrm>
+          <a:off x="0" y="0"/>
+          <a:ext cx="0" cy="0"/>
+          <a:chOff x="0" y="0"/>
+          <a:chExt cx="0" cy="0"/>
+        </a:xfrm>
+      </p:grpSpPr>
       <p:sp>
         <p:nvSpPr>
           <p:cNvPr id="2" name="Rectangle 1"/>
@@ -3487,7 +3561,7 @@
           </a:fontRef>
         </p:style>
         <p:txBody>
-          <a:bodyPr rtlCol="0" anchor="ctr" lIns="365760" wrap="square"/>
+          <a:bodyPr wrap="square" lIns="365760" rtlCol="0" anchor="ctr"/>
           <a:lstStyle/>
           <a:p>
             <a:pPr algn="ctr">
@@ -3541,7 +3615,7 @@
           </a:fontRef>
         </p:style>
         <p:txBody>
-          <a:bodyPr rtlCol="0" anchor="ctr" wrap="square"/>
+          <a:bodyPr wrap="square" rtlCol="0" anchor="ctr"/>
           <a:lstStyle/>
           <a:p>
             <a:pPr algn="ctr">
@@ -3595,7 +3669,7 @@
           </a:fontRef>
         </p:style>
         <p:txBody>
-          <a:bodyPr rtlCol="0" anchor="ctr" wrap="square"/>
+          <a:bodyPr wrap="square" rtlCol="0" anchor="ctr"/>
           <a:lstStyle/>
           <a:p>
             <a:pPr algn="ctr">
@@ -3685,7 +3759,7 @@
           </a:fontRef>
         </p:style>
         <p:txBody>
-          <a:bodyPr rtlCol="0" anchor="ctr" wrap="square"/>
+          <a:bodyPr wrap="square" rtlCol="0" anchor="ctr"/>
           <a:lstStyle/>
           <a:p>
             <a:pPr algn="ctr">
@@ -3775,7 +3849,7 @@
           </a:fontRef>
         </p:style>
         <p:txBody>
-          <a:bodyPr rtlCol="0" anchor="ctr" wrap="square"/>
+          <a:bodyPr wrap="square" rtlCol="0" anchor="ctr"/>
           <a:lstStyle/>
           <a:p>
             <a:pPr algn="ctr">
@@ -3865,7 +3939,7 @@
           </a:fontRef>
         </p:style>
         <p:txBody>
-          <a:bodyPr rtlCol="0" anchor="ctr" wrap="square"/>
+          <a:bodyPr wrap="square" rtlCol="0" anchor="ctr"/>
           <a:lstStyle/>
           <a:p>
             <a:pPr algn="ctr">
@@ -3955,7 +4029,7 @@
           </a:fontRef>
         </p:style>
         <p:txBody>
-          <a:bodyPr rtlCol="0" anchor="ctr" wrap="square"/>
+          <a:bodyPr wrap="square" rtlCol="0" anchor="ctr"/>
           <a:lstStyle/>
           <a:p>
             <a:pPr algn="ctr">
@@ -4009,7 +4083,7 @@
           </a:fontRef>
         </p:style>
         <p:txBody>
-          <a:bodyPr rtlCol="0" anchor="ctr" wrap="square"/>
+          <a:bodyPr wrap="square" rtlCol="0" anchor="ctr"/>
           <a:lstStyle/>
           <a:p>
             <a:pPr algn="ctr">
@@ -4063,7 +4137,7 @@
           </a:fontRef>
         </p:style>
         <p:txBody>
-          <a:bodyPr rtlCol="0" anchor="ctr" wrap="square"/>
+          <a:bodyPr wrap="square" rtlCol="0" anchor="ctr"/>
           <a:lstStyle/>
           <a:p>
             <a:pPr algn="ctr">
@@ -4117,7 +4191,7 @@
           </a:fontRef>
         </p:style>
         <p:txBody>
-          <a:bodyPr rtlCol="0" anchor="ctr" wrap="square"/>
+          <a:bodyPr wrap="square" rtlCol="0" anchor="ctr"/>
           <a:lstStyle/>
           <a:p>
             <a:pPr algn="ctr">
@@ -4206,7 +4280,7 @@
           </a:fontRef>
         </p:style>
         <p:txBody>
-          <a:bodyPr rtlCol="0" anchor="ctr" wrap="square"/>
+          <a:bodyPr wrap="square" rtlCol="0" anchor="ctr"/>
           <a:lstStyle/>
           <a:p>
             <a:pPr algn="ctr">
@@ -4260,7 +4334,7 @@
           </a:fontRef>
         </p:style>
         <p:txBody>
-          <a:bodyPr rtlCol="0" anchor="ctr" wrap="square"/>
+          <a:bodyPr wrap="square" rtlCol="0" anchor="ctr"/>
           <a:lstStyle/>
           <a:p>
             <a:pPr algn="ctr">
@@ -4350,7 +4424,7 @@
           </a:fontRef>
         </p:style>
         <p:txBody>
-          <a:bodyPr rtlCol="0" anchor="ctr" wrap="square"/>
+          <a:bodyPr wrap="square" rtlCol="0" anchor="ctr"/>
           <a:lstStyle/>
           <a:p>
             <a:pPr algn="ctr">
@@ -4440,7 +4514,7 @@
           </a:fontRef>
         </p:style>
         <p:txBody>
-          <a:bodyPr rtlCol="0" anchor="ctr" wrap="square"/>
+          <a:bodyPr wrap="square" rtlCol="0" anchor="ctr"/>
           <a:lstStyle/>
           <a:p>
             <a:pPr algn="ctr">
@@ -4569,7 +4643,7 @@
 </file>
 
 <file path=ppt/slides/slide4.xml><?xml version="1.0" encoding="utf-8"?>
-<p:sld xmlns:a="http://schemas.openxmlformats.org/drawingml/2006/main" xmlns:p="http://schemas.openxmlformats.org/presentationml/2006/main" xmlns:r="http://schemas.openxmlformats.org/officeDocument/2006/relationships">
+<p:sld xmlns:a="http://schemas.openxmlformats.org/drawingml/2006/main" xmlns:r="http://schemas.openxmlformats.org/officeDocument/2006/relationships" xmlns:p="http://schemas.openxmlformats.org/presentationml/2006/main">
   <p:cSld>
     <p:spTree>
       <p:nvGrpSpPr>
@@ -4577,7 +4651,14 @@
         <p:cNvGrpSpPr/>
         <p:nvPr/>
       </p:nvGrpSpPr>
-      <p:grpSpPr/>
+      <p:grpSpPr>
+        <a:xfrm>
+          <a:off x="0" y="0"/>
+          <a:ext cx="0" cy="0"/>
+          <a:chOff x="0" y="0"/>
+          <a:chExt cx="0" cy="0"/>
+        </a:xfrm>
+      </p:grpSpPr>
       <p:sp>
         <p:nvSpPr>
           <p:cNvPr id="2" name="Rectangle 1"/>
@@ -4614,7 +4695,7 @@
           </a:fontRef>
         </p:style>
         <p:txBody>
-          <a:bodyPr rtlCol="0" anchor="ctr" lIns="365760" wrap="square"/>
+          <a:bodyPr wrap="square" lIns="365760" rtlCol="0" anchor="ctr"/>
           <a:lstStyle/>
           <a:p>
             <a:pPr algn="ctr">
@@ -4649,9 +4730,27 @@
                 <a:tableStyleId>{5C22544A-7EE6-4342-B048-85BDC9FD1C3A}</a:tableStyleId>
               </a:tblPr>
               <a:tblGrid>
-                <a:gridCol w="1920240"/>
-                <a:gridCol w="3383280"/>
-                <a:gridCol w="6126480"/>
+                <a:gridCol w="1920240">
+                  <a:extLst>
+                    <a:ext uri="{9D8B030D-6E8A-4147-A177-3AD203B41FA5}">
+                      <a16:colId xmlns:a16="http://schemas.microsoft.com/office/drawing/2014/main" val="20000"/>
+                    </a:ext>
+                  </a:extLst>
+                </a:gridCol>
+                <a:gridCol w="3383280">
+                  <a:extLst>
+                    <a:ext uri="{9D8B030D-6E8A-4147-A177-3AD203B41FA5}">
+                      <a16:colId xmlns:a16="http://schemas.microsoft.com/office/drawing/2014/main" val="20001"/>
+                    </a:ext>
+                  </a:extLst>
+                </a:gridCol>
+                <a:gridCol w="6126480">
+                  <a:extLst>
+                    <a:ext uri="{9D8B030D-6E8A-4147-A177-3AD203B41FA5}">
+                      <a16:colId xmlns:a16="http://schemas.microsoft.com/office/drawing/2014/main" val="20002"/>
+                    </a:ext>
+                  </a:extLst>
+                </a:gridCol>
               </a:tblGrid>
               <a:tr h="449580">
                 <a:tc>
@@ -4723,6 +4822,11 @@
                     </a:solidFill>
                   </a:tcPr>
                 </a:tc>
+                <a:extLst>
+                  <a:ext uri="{0D108BD9-81ED-4DB2-BD59-A6C34878D82A}">
+                    <a16:rowId xmlns:a16="http://schemas.microsoft.com/office/drawing/2014/main" val="10000"/>
+                  </a:ext>
+                </a:extLst>
               </a:tr>
               <a:tr h="449580">
                 <a:tc>
@@ -4794,6 +4898,11 @@
                     </a:solidFill>
                   </a:tcPr>
                 </a:tc>
+                <a:extLst>
+                  <a:ext uri="{0D108BD9-81ED-4DB2-BD59-A6C34878D82A}">
+                    <a16:rowId xmlns:a16="http://schemas.microsoft.com/office/drawing/2014/main" val="10001"/>
+                  </a:ext>
+                </a:extLst>
               </a:tr>
               <a:tr h="449580">
                 <a:tc>
@@ -4855,6 +4964,7 @@
                         </a:defRPr>
                       </a:pPr>
                       <a:r>
+                        <a:rPr dirty="0"/>
                         <a:t>MCA / EWL / RC-Fatal / MCHECK / POST decoder DBs</a:t>
                       </a:r>
                     </a:p>
@@ -4865,6 +4975,11 @@
                     </a:solidFill>
                   </a:tcPr>
                 </a:tc>
+                <a:extLst>
+                  <a:ext uri="{0D108BD9-81ED-4DB2-BD59-A6C34878D82A}">
+                    <a16:rowId xmlns:a16="http://schemas.microsoft.com/office/drawing/2014/main" val="10002"/>
+                  </a:ext>
+                </a:extLst>
               </a:tr>
               <a:tr h="449580">
                 <a:tc>
@@ -4936,6 +5051,11 @@
                     </a:solidFill>
                   </a:tcPr>
                 </a:tc>
+                <a:extLst>
+                  <a:ext uri="{0D108BD9-81ED-4DB2-BD59-A6C34878D82A}">
+                    <a16:rowId xmlns:a16="http://schemas.microsoft.com/office/drawing/2014/main" val="10003"/>
+                  </a:ext>
+                </a:extLst>
               </a:tr>
               <a:tr h="449580">
                 <a:tc>
@@ -4997,6 +5117,7 @@
                         </a:defRPr>
                       </a:pPr>
                       <a:r>
+                        <a:rPr dirty="0"/>
                         <a:t>Wiki KB (always) + BIOS/S3M, Kernel-crash, Redfish (need-based)</a:t>
                       </a:r>
                     </a:p>
@@ -5007,6 +5128,11 @@
                     </a:solidFill>
                   </a:tcPr>
                 </a:tc>
+                <a:extLst>
+                  <a:ext uri="{0D108BD9-81ED-4DB2-BD59-A6C34878D82A}">
+                    <a16:rowId xmlns:a16="http://schemas.microsoft.com/office/drawing/2014/main" val="10004"/>
+                  </a:ext>
+                </a:extLst>
               </a:tr>
               <a:tr h="449580">
                 <a:tc>
@@ -5068,7 +5194,16 @@
                         </a:defRPr>
                       </a:pPr>
                       <a:r>
-                        <a:t>NUC PythonSV bridge — out-of-band when SUT is hung</a:t>
+                        <a:rPr dirty="0"/>
+                        <a:t>NUC </a:t>
+                      </a:r>
+                      <a:r>
+                        <a:rPr dirty="0" err="1"/>
+                        <a:t>PythonSV</a:t>
+                      </a:r>
+                      <a:r>
+                        <a:rPr dirty="0"/>
+                        <a:t> bridge — out-of-band when SUT is hung</a:t>
                       </a:r>
                     </a:p>
                   </a:txBody>
@@ -5078,6 +5213,11 @@
                     </a:solidFill>
                   </a:tcPr>
                 </a:tc>
+                <a:extLst>
+                  <a:ext uri="{0D108BD9-81ED-4DB2-BD59-A6C34878D82A}">
+                    <a16:rowId xmlns:a16="http://schemas.microsoft.com/office/drawing/2014/main" val="10005"/>
+                  </a:ext>
+                </a:extLst>
               </a:tr>
               <a:tr h="449580">
                 <a:tc>
@@ -5139,7 +5279,16 @@
                         </a:defRPr>
                       </a:pPr>
                       <a:r>
-                        <a:t>SSH-first + WinRM fallback + setup popup</a:t>
+                        <a:rPr dirty="0"/>
+                        <a:t>SSH-first + </a:t>
+                      </a:r>
+                      <a:r>
+                        <a:rPr dirty="0" err="1"/>
+                        <a:t>WinRM</a:t>
+                      </a:r>
+                      <a:r>
+                        <a:rPr dirty="0"/>
+                        <a:t> fallback + setup popup</a:t>
                       </a:r>
                     </a:p>
                   </a:txBody>
@@ -5149,6 +5298,11 @@
                     </a:solidFill>
                   </a:tcPr>
                 </a:tc>
+                <a:extLst>
+                  <a:ext uri="{0D108BD9-81ED-4DB2-BD59-A6C34878D82A}">
+                    <a16:rowId xmlns:a16="http://schemas.microsoft.com/office/drawing/2014/main" val="10006"/>
+                  </a:ext>
+                </a:extLst>
               </a:tr>
               <a:tr h="449580">
                 <a:tc>
@@ -5187,6 +5341,7 @@
                         </a:defRPr>
                       </a:pPr>
                       <a:r>
+                        <a:rPr dirty="0"/>
                         <a:t>SSH keys</a:t>
                       </a:r>
                     </a:p>
@@ -5210,6 +5365,7 @@
                         </a:defRPr>
                       </a:pPr>
                       <a:r>
+                        <a:rPr dirty="0"/>
                         <a:t>UI password, masked, never stored; user auto-normalized</a:t>
                       </a:r>
                     </a:p>
@@ -5220,6 +5376,11 @@
                     </a:solidFill>
                   </a:tcPr>
                 </a:tc>
+                <a:extLst>
+                  <a:ext uri="{0D108BD9-81ED-4DB2-BD59-A6C34878D82A}">
+                    <a16:rowId xmlns:a16="http://schemas.microsoft.com/office/drawing/2014/main" val="10007"/>
+                  </a:ext>
+                </a:extLst>
               </a:tr>
               <a:tr h="449580">
                 <a:tc>
@@ -5258,6 +5419,7 @@
                         </a:defRPr>
                       </a:pPr>
                       <a:r>
+                        <a:rPr dirty="0"/>
                         <a:t>one command</a:t>
                       </a:r>
                     </a:p>
@@ -5281,7 +5443,16 @@
                         </a:defRPr>
                       </a:pPr>
                       <a:r>
-                        <a:t>Persistent PythonSV session (imports/IPC persist)</a:t>
+                        <a:rPr dirty="0"/>
+                        <a:t>Persistent </a:t>
+                      </a:r>
+                      <a:r>
+                        <a:rPr dirty="0" err="1"/>
+                        <a:t>PythonSV</a:t>
+                      </a:r>
+                      <a:r>
+                        <a:rPr dirty="0"/>
+                        <a:t> session (imports/IPC persist)</a:t>
                       </a:r>
                     </a:p>
                   </a:txBody>
@@ -5291,6 +5462,11 @@
                     </a:solidFill>
                   </a:tcPr>
                 </a:tc>
+                <a:extLst>
+                  <a:ext uri="{0D108BD9-81ED-4DB2-BD59-A6C34878D82A}">
+                    <a16:rowId xmlns:a16="http://schemas.microsoft.com/office/drawing/2014/main" val="10008"/>
+                  </a:ext>
+                </a:extLst>
               </a:tr>
               <a:tr h="449580">
                 <a:tc>
@@ -5352,7 +5528,16 @@
                         </a:defRPr>
                       </a:pPr>
                       <a:r>
-                        <a:t>Auto-init unlock + refresh; skippable</a:t>
+                        <a:rPr dirty="0"/>
+                        <a:t>Auto-</a:t>
+                      </a:r>
+                      <a:r>
+                        <a:rPr dirty="0" err="1"/>
+                        <a:t>init</a:t>
+                      </a:r>
+                      <a:r>
+                        <a:rPr dirty="0"/>
+                        <a:t> unlock + refresh; skippable</a:t>
                       </a:r>
                     </a:p>
                   </a:txBody>
@@ -5362,6 +5547,11 @@
                     </a:solidFill>
                   </a:tcPr>
                 </a:tc>
+                <a:extLst>
+                  <a:ext uri="{0D108BD9-81ED-4DB2-BD59-A6C34878D82A}">
+                    <a16:rowId xmlns:a16="http://schemas.microsoft.com/office/drawing/2014/main" val="10009"/>
+                  </a:ext>
+                </a:extLst>
               </a:tr>
               <a:tr h="449580">
                 <a:tc>
@@ -5400,6 +5590,7 @@
                         </a:defRPr>
                       </a:pPr>
                       <a:r>
+                        <a:rPr dirty="0"/>
                         <a:t>raw dump</a:t>
                       </a:r>
                     </a:p>
@@ -5423,6 +5614,7 @@
                         </a:defRPr>
                       </a:pPr>
                       <a:r>
+                        <a:rPr dirty="0"/>
                         <a:t>Output cleaner + state interpreter notes</a:t>
                       </a:r>
                     </a:p>
@@ -5433,6 +5625,11 @@
                     </a:solidFill>
                   </a:tcPr>
                 </a:tc>
+                <a:extLst>
+                  <a:ext uri="{0D108BD9-81ED-4DB2-BD59-A6C34878D82A}">
+                    <a16:rowId xmlns:a16="http://schemas.microsoft.com/office/drawing/2014/main" val="10010"/>
+                  </a:ext>
+                </a:extLst>
               </a:tr>
               <a:tr h="449580">
                 <a:tc>
@@ -5494,6 +5691,7 @@
                         </a:defRPr>
                       </a:pPr>
                       <a:r>
+                        <a:rPr dirty="0"/>
                         <a:t>Unified smoke test (15 checks)</a:t>
                       </a:r>
                     </a:p>
@@ -5504,6 +5702,11 @@
                     </a:solidFill>
                   </a:tcPr>
                 </a:tc>
+                <a:extLst>
+                  <a:ext uri="{0D108BD9-81ED-4DB2-BD59-A6C34878D82A}">
+                    <a16:rowId xmlns:a16="http://schemas.microsoft.com/office/drawing/2014/main" val="10011"/>
+                  </a:ext>
+                </a:extLst>
               </a:tr>
             </a:tbl>
           </a:graphicData>
@@ -5518,7 +5721,7 @@
 </file>
 
 <file path=ppt/slides/slide5.xml><?xml version="1.0" encoding="utf-8"?>
-<p:sld xmlns:a="http://schemas.openxmlformats.org/drawingml/2006/main" xmlns:p="http://schemas.openxmlformats.org/presentationml/2006/main" xmlns:r="http://schemas.openxmlformats.org/officeDocument/2006/relationships">
+<p:sld xmlns:a="http://schemas.openxmlformats.org/drawingml/2006/main" xmlns:r="http://schemas.openxmlformats.org/officeDocument/2006/relationships" xmlns:p="http://schemas.openxmlformats.org/presentationml/2006/main">
   <p:cSld>
     <p:spTree>
       <p:nvGrpSpPr>
@@ -5526,7 +5729,14 @@
         <p:cNvGrpSpPr/>
         <p:nvPr/>
       </p:nvGrpSpPr>
-      <p:grpSpPr/>
+      <p:grpSpPr>
+        <a:xfrm>
+          <a:off x="0" y="0"/>
+          <a:ext cx="0" cy="0"/>
+          <a:chOff x="0" y="0"/>
+          <a:chExt cx="0" cy="0"/>
+        </a:xfrm>
+      </p:grpSpPr>
       <p:sp>
         <p:nvSpPr>
           <p:cNvPr id="2" name="Rectangle 1"/>
@@ -5563,7 +5773,7 @@
           </a:fontRef>
         </p:style>
         <p:txBody>
-          <a:bodyPr rtlCol="0" anchor="ctr" lIns="365760" wrap="square"/>
+          <a:bodyPr wrap="square" lIns="365760" rtlCol="0" anchor="ctr"/>
           <a:lstStyle/>
           <a:p>
             <a:pPr algn="ctr">
@@ -5743,7 +5953,7 @@
 </file>
 
 <file path=ppt/slides/slide6.xml><?xml version="1.0" encoding="utf-8"?>
-<p:sld xmlns:a="http://schemas.openxmlformats.org/drawingml/2006/main" xmlns:p="http://schemas.openxmlformats.org/presentationml/2006/main" xmlns:r="http://schemas.openxmlformats.org/officeDocument/2006/relationships">
+<p:sld xmlns:a="http://schemas.openxmlformats.org/drawingml/2006/main" xmlns:r="http://schemas.openxmlformats.org/officeDocument/2006/relationships" xmlns:p="http://schemas.openxmlformats.org/presentationml/2006/main">
   <p:cSld>
     <p:spTree>
       <p:nvGrpSpPr>
@@ -5751,7 +5961,14 @@
         <p:cNvGrpSpPr/>
         <p:nvPr/>
       </p:nvGrpSpPr>
-      <p:grpSpPr/>
+      <p:grpSpPr>
+        <a:xfrm>
+          <a:off x="0" y="0"/>
+          <a:ext cx="0" cy="0"/>
+          <a:chOff x="0" y="0"/>
+          <a:chExt cx="0" cy="0"/>
+        </a:xfrm>
+      </p:grpSpPr>
       <p:sp>
         <p:nvSpPr>
           <p:cNvPr id="2" name="Rectangle 1"/>
@@ -5788,7 +6005,7 @@
           </a:fontRef>
         </p:style>
         <p:txBody>
-          <a:bodyPr rtlCol="0" anchor="ctr" lIns="365760" wrap="square"/>
+          <a:bodyPr wrap="square" lIns="365760" rtlCol="0" anchor="ctr"/>
           <a:lstStyle/>
           <a:p>
             <a:pPr algn="ctr">
@@ -5837,6 +6054,7 @@
               </a:defRPr>
             </a:pPr>
             <a:r>
+              <a:rPr dirty="0"/>
               <a:t>Secrets: NUC password used only for the connection — masked in all output, never written to disk or logs.</a:t>
             </a:r>
           </a:p>
@@ -5852,6 +6070,7 @@
               </a:defRPr>
             </a:pPr>
             <a:r>
+              <a:rPr dirty="0"/>
               <a:t>Enrichment sources are OFF unless configured; failures are skipped and never block core analysis.</a:t>
             </a:r>
           </a:p>
@@ -5867,6 +6086,7 @@
               </a:defRPr>
             </a:pPr>
             <a:r>
+              <a:rPr dirty="0"/>
               <a:t>Kerberos SSO to HSDES (no token/password) for on-domain users.</a:t>
             </a:r>
           </a:p>
@@ -5882,6 +6102,7 @@
               </a:defRPr>
             </a:pPr>
             <a:r>
+              <a:rPr dirty="0"/>
               <a:t>Validated live: SSH connect + persistent session confirmed against a real 2S GNR NUC; part unlocked, 37 IPs enumerated.</a:t>
             </a:r>
           </a:p>
@@ -5897,6 +6118,7 @@
               </a:defRPr>
             </a:pPr>
             <a:r>
+              <a:rPr dirty="0"/>
               <a:t>Unified smoke test: 15 / 15 passing.</a:t>
             </a:r>
           </a:p>
@@ -5912,7 +6134,16 @@
               </a:defRPr>
             </a:pPr>
             <a:r>
-              <a:t>Published to intel-sandbox/BugScout (PR) and mirrored to the personal repo.</a:t>
+              <a:rPr dirty="0"/>
+              <a:t>Published to intel-sandbox/</a:t>
+            </a:r>
+            <a:r>
+              <a:rPr dirty="0" err="1"/>
+              <a:t>BugScout</a:t>
+            </a:r>
+            <a:r>
+              <a:rPr dirty="0"/>
+              <a:t> (PR) and mirrored to the personal repo.</a:t>
             </a:r>
           </a:p>
         </p:txBody>

--- a/presentation/HSDES_NEXUS_Presentation.pptx
+++ b/presentation/HSDES_NEXUS_Presentation.pptx
@@ -5,14 +5,24 @@
     <p:sldMasterId id="2147483648" r:id="rId1"/>
   </p:sldMasterIdLst>
   <p:sldIdLst>
-    <p:sldId id="256" r:id="rId2"/>
-    <p:sldId id="257" r:id="rId3"/>
-    <p:sldId id="258" r:id="rId4"/>
-    <p:sldId id="259" r:id="rId5"/>
-    <p:sldId id="260" r:id="rId6"/>
-    <p:sldId id="261" r:id="rId7"/>
+    <p:sldId id="256" r:id="rId7"/>
+    <p:sldId id="257" r:id="rId8"/>
+    <p:sldId id="258" r:id="rId9"/>
+    <p:sldId id="259" r:id="rId10"/>
+    <p:sldId id="260" r:id="rId11"/>
+    <p:sldId id="261" r:id="rId12"/>
+    <p:sldId id="262" r:id="rId13"/>
+    <p:sldId id="263" r:id="rId14"/>
+    <p:sldId id="264" r:id="rId15"/>
+    <p:sldId id="265" r:id="rId16"/>
+    <p:sldId id="266" r:id="rId17"/>
+    <p:sldId id="267" r:id="rId18"/>
+    <p:sldId id="268" r:id="rId19"/>
+    <p:sldId id="269" r:id="rId20"/>
+    <p:sldId id="270" r:id="rId21"/>
+    <p:sldId id="271" r:id="rId22"/>
   </p:sldIdLst>
-  <p:sldSz cx="12192000" cy="6858000"/>
+  <p:sldSz cx="12191695" cy="6858000" type="screen4x3"/>
   <p:notesSz cx="6858000" cy="9144000"/>
   <p:defaultTextStyle>
     <a:defPPr>
@@ -109,52 +119,7 @@
       </a:defRPr>
     </a:lvl9pPr>
   </p:defaultTextStyle>
-  <p:extLst>
-    <p:ext uri="{EFAFB233-063F-42B5-8137-9DF3F51BA10A}">
-      <p15:sldGuideLst xmlns:p15="http://schemas.microsoft.com/office/powerpoint/2012/main">
-        <p15:guide id="1" orient="horz" pos="2160">
-          <p15:clr>
-            <a:srgbClr val="A4A3A4"/>
-          </p15:clr>
-        </p15:guide>
-        <p15:guide id="2" pos="2880">
-          <p15:clr>
-            <a:srgbClr val="A4A3A4"/>
-          </p15:clr>
-        </p15:guide>
-      </p15:sldGuideLst>
-    </p:ext>
-  </p:extLst>
 </p:presentation>
-</file>
-
-<file path=ppt/changesInfos/changesInfo1.xml><?xml version="1.0" encoding="utf-8"?>
-<pc:chgInfo xmlns:a="http://schemas.openxmlformats.org/drawingml/2006/main" xmlns:r="http://schemas.openxmlformats.org/officeDocument/2006/relationships" xmlns:ac="http://schemas.microsoft.com/office/drawing/2013/main/command" xmlns:pc="http://schemas.microsoft.com/office/powerpoint/2013/main/command">
-  <pc:docChgLst>
-    <pc:chgData name="Rajaram, Balaji" userId="ef3de614-10a3-4ba9-80dc-e89bcc86f5f4" providerId="ADAL" clId="{7C535360-BD65-42DA-BD95-1E44F351206F}"/>
-    <pc:docChg chg="undo custSel modSld">
-      <pc:chgData name="Rajaram, Balaji" userId="ef3de614-10a3-4ba9-80dc-e89bcc86f5f4" providerId="ADAL" clId="{7C535360-BD65-42DA-BD95-1E44F351206F}" dt="2026-09-02T06:31:51" v="1" actId="1076"/>
-      <pc:docMkLst>
-        <pc:docMk/>
-      </pc:docMkLst>
-      <pc:sldChg chg="modSp mod">
-        <pc:chgData name="Rajaram, Balaji" userId="ef3de614-10a3-4ba9-80dc-e89bcc86f5f4" providerId="ADAL" clId="{7C535360-BD65-42DA-BD95-1E44F351206F}" dt="2026-09-02T06:31:51" v="1" actId="1076"/>
-        <pc:sldMkLst>
-          <pc:docMk/>
-          <pc:sldMk cId="0" sldId="261"/>
-        </pc:sldMkLst>
-        <pc:spChg chg="mod">
-          <ac:chgData name="Rajaram, Balaji" userId="ef3de614-10a3-4ba9-80dc-e89bcc86f5f4" providerId="ADAL" clId="{7C535360-BD65-42DA-BD95-1E44F351206F}" dt="2026-09-02T06:31:51" v="1" actId="1076"/>
-          <ac:spMkLst>
-            <pc:docMk/>
-            <pc:sldMk cId="0" sldId="261"/>
-            <ac:spMk id="3" creationId="{00000000-0000-0000-0000-000000000000}"/>
-          </ac:spMkLst>
-        </pc:spChg>
-      </pc:sldChg>
-    </pc:docChg>
-  </pc:docChgLst>
-</pc:chgInfo>
 </file>
 
 <file path=ppt/slideLayouts/slideLayout1.xml><?xml version="1.0" encoding="utf-8"?>
@@ -195,9 +160,10 @@
           <a:lstStyle/>
           <a:p>
             <a:r>
-              <a:rPr lang="en-US"/>
+              <a:rPr lang="en-US" smtClean="0"/>
               <a:t>Click to edit Master title style</a:t>
             </a:r>
+            <a:endParaRPr lang="en-US"/>
           </a:p>
         </p:txBody>
       </p:sp>
@@ -313,9 +279,10 @@
           </a:lstStyle>
           <a:p>
             <a:r>
-              <a:rPr lang="en-US"/>
+              <a:rPr lang="en-US" smtClean="0"/>
               <a:t>Click to edit Master subtitle style</a:t>
             </a:r>
+            <a:endParaRPr lang="en-US"/>
           </a:p>
         </p:txBody>
       </p:sp>
@@ -336,7 +303,7 @@
           <a:p>
             <a:fld id="{5BCAD085-E8A6-8845-BD4E-CB4CCA059FC4}" type="datetimeFigureOut">
               <a:rPr lang="en-US" smtClean="0"/>
-              <a:t>9/2/2026</a:t>
+              <a:t>1/27/13</a:t>
             </a:fld>
             <a:endParaRPr lang="en-US"/>
           </a:p>
@@ -430,9 +397,10 @@
           <a:lstStyle/>
           <a:p>
             <a:r>
-              <a:rPr lang="en-US"/>
+              <a:rPr lang="en-US" smtClean="0"/>
               <a:t>Click to edit Master title style</a:t>
             </a:r>
+            <a:endParaRPr lang="en-US"/>
           </a:p>
         </p:txBody>
       </p:sp>
@@ -453,37 +421,38 @@
           <a:p>
             <a:pPr lvl="0"/>
             <a:r>
-              <a:rPr lang="en-US"/>
+              <a:rPr lang="en-US" smtClean="0"/>
               <a:t>Click to edit Master text styles</a:t>
             </a:r>
           </a:p>
           <a:p>
             <a:pPr lvl="1"/>
             <a:r>
-              <a:rPr lang="en-US"/>
+              <a:rPr lang="en-US" smtClean="0"/>
               <a:t>Second level</a:t>
             </a:r>
           </a:p>
           <a:p>
             <a:pPr lvl="2"/>
             <a:r>
-              <a:rPr lang="en-US"/>
+              <a:rPr lang="en-US" smtClean="0"/>
               <a:t>Third level</a:t>
             </a:r>
           </a:p>
           <a:p>
             <a:pPr lvl="3"/>
             <a:r>
-              <a:rPr lang="en-US"/>
+              <a:rPr lang="en-US" smtClean="0"/>
               <a:t>Fourth level</a:t>
             </a:r>
           </a:p>
           <a:p>
             <a:pPr lvl="4"/>
             <a:r>
-              <a:rPr lang="en-US"/>
+              <a:rPr lang="en-US" smtClean="0"/>
               <a:t>Fifth level</a:t>
             </a:r>
+            <a:endParaRPr lang="en-US"/>
           </a:p>
         </p:txBody>
       </p:sp>
@@ -504,7 +473,7 @@
           <a:p>
             <a:fld id="{5BCAD085-E8A6-8845-BD4E-CB4CCA059FC4}" type="datetimeFigureOut">
               <a:rPr lang="en-US" smtClean="0"/>
-              <a:t>9/2/2026</a:t>
+              <a:t>1/27/13</a:t>
             </a:fld>
             <a:endParaRPr lang="en-US"/>
           </a:p>
@@ -603,9 +572,10 @@
           <a:lstStyle/>
           <a:p>
             <a:r>
-              <a:rPr lang="en-US"/>
+              <a:rPr lang="en-US" smtClean="0"/>
               <a:t>Click to edit Master title style</a:t>
             </a:r>
+            <a:endParaRPr lang="en-US"/>
           </a:p>
         </p:txBody>
       </p:sp>
@@ -631,37 +601,38 @@
           <a:p>
             <a:pPr lvl="0"/>
             <a:r>
-              <a:rPr lang="en-US"/>
+              <a:rPr lang="en-US" smtClean="0"/>
               <a:t>Click to edit Master text styles</a:t>
             </a:r>
           </a:p>
           <a:p>
             <a:pPr lvl="1"/>
             <a:r>
-              <a:rPr lang="en-US"/>
+              <a:rPr lang="en-US" smtClean="0"/>
               <a:t>Second level</a:t>
             </a:r>
           </a:p>
           <a:p>
             <a:pPr lvl="2"/>
             <a:r>
-              <a:rPr lang="en-US"/>
+              <a:rPr lang="en-US" smtClean="0"/>
               <a:t>Third level</a:t>
             </a:r>
           </a:p>
           <a:p>
             <a:pPr lvl="3"/>
             <a:r>
-              <a:rPr lang="en-US"/>
+              <a:rPr lang="en-US" smtClean="0"/>
               <a:t>Fourth level</a:t>
             </a:r>
           </a:p>
           <a:p>
             <a:pPr lvl="4"/>
             <a:r>
-              <a:rPr lang="en-US"/>
+              <a:rPr lang="en-US" smtClean="0"/>
               <a:t>Fifth level</a:t>
             </a:r>
+            <a:endParaRPr lang="en-US"/>
           </a:p>
         </p:txBody>
       </p:sp>
@@ -682,7 +653,7 @@
           <a:p>
             <a:fld id="{5BCAD085-E8A6-8845-BD4E-CB4CCA059FC4}" type="datetimeFigureOut">
               <a:rPr lang="en-US" smtClean="0"/>
-              <a:t>9/2/2026</a:t>
+              <a:t>1/27/13</a:t>
             </a:fld>
             <a:endParaRPr lang="en-US"/>
           </a:p>
@@ -776,9 +747,10 @@
           <a:lstStyle/>
           <a:p>
             <a:r>
-              <a:rPr lang="en-US"/>
+              <a:rPr lang="en-US" smtClean="0"/>
               <a:t>Click to edit Master title style</a:t>
             </a:r>
+            <a:endParaRPr lang="en-US"/>
           </a:p>
         </p:txBody>
       </p:sp>
@@ -799,37 +771,38 @@
           <a:p>
             <a:pPr lvl="0"/>
             <a:r>
-              <a:rPr lang="en-US"/>
+              <a:rPr lang="en-US" smtClean="0"/>
               <a:t>Click to edit Master text styles</a:t>
             </a:r>
           </a:p>
           <a:p>
             <a:pPr lvl="1"/>
             <a:r>
-              <a:rPr lang="en-US"/>
+              <a:rPr lang="en-US" smtClean="0"/>
               <a:t>Second level</a:t>
             </a:r>
           </a:p>
           <a:p>
             <a:pPr lvl="2"/>
             <a:r>
-              <a:rPr lang="en-US"/>
+              <a:rPr lang="en-US" smtClean="0"/>
               <a:t>Third level</a:t>
             </a:r>
           </a:p>
           <a:p>
             <a:pPr lvl="3"/>
             <a:r>
-              <a:rPr lang="en-US"/>
+              <a:rPr lang="en-US" smtClean="0"/>
               <a:t>Fourth level</a:t>
             </a:r>
           </a:p>
           <a:p>
             <a:pPr lvl="4"/>
             <a:r>
-              <a:rPr lang="en-US"/>
+              <a:rPr lang="en-US" smtClean="0"/>
               <a:t>Fifth level</a:t>
             </a:r>
+            <a:endParaRPr lang="en-US"/>
           </a:p>
         </p:txBody>
       </p:sp>
@@ -850,7 +823,7 @@
           <a:p>
             <a:fld id="{5BCAD085-E8A6-8845-BD4E-CB4CCA059FC4}" type="datetimeFigureOut">
               <a:rPr lang="en-US" smtClean="0"/>
-              <a:t>9/2/2026</a:t>
+              <a:t>1/27/13</a:t>
             </a:fld>
             <a:endParaRPr lang="en-US"/>
           </a:p>
@@ -953,9 +926,10 @@
           </a:lstStyle>
           <a:p>
             <a:r>
-              <a:rPr lang="en-US"/>
+              <a:rPr lang="en-US" smtClean="0"/>
               <a:t>Click to edit Master title style</a:t>
             </a:r>
+            <a:endParaRPr lang="en-US"/>
           </a:p>
         </p:txBody>
       </p:sp>
@@ -1072,7 +1046,7 @@
           <a:p>
             <a:pPr lvl="0"/>
             <a:r>
-              <a:rPr lang="en-US"/>
+              <a:rPr lang="en-US" smtClean="0"/>
               <a:t>Click to edit Master text styles</a:t>
             </a:r>
           </a:p>
@@ -1095,7 +1069,7 @@
           <a:p>
             <a:fld id="{5BCAD085-E8A6-8845-BD4E-CB4CCA059FC4}" type="datetimeFigureOut">
               <a:rPr lang="en-US" smtClean="0"/>
-              <a:t>9/2/2026</a:t>
+              <a:t>1/27/13</a:t>
             </a:fld>
             <a:endParaRPr lang="en-US"/>
           </a:p>
@@ -1189,9 +1163,10 @@
           <a:lstStyle/>
           <a:p>
             <a:r>
-              <a:rPr lang="en-US"/>
+              <a:rPr lang="en-US" smtClean="0"/>
               <a:t>Click to edit Master title style</a:t>
             </a:r>
+            <a:endParaRPr lang="en-US"/>
           </a:p>
         </p:txBody>
       </p:sp>
@@ -1245,37 +1220,38 @@
           <a:p>
             <a:pPr lvl="0"/>
             <a:r>
-              <a:rPr lang="en-US"/>
+              <a:rPr lang="en-US" smtClean="0"/>
               <a:t>Click to edit Master text styles</a:t>
             </a:r>
           </a:p>
           <a:p>
             <a:pPr lvl="1"/>
             <a:r>
-              <a:rPr lang="en-US"/>
+              <a:rPr lang="en-US" smtClean="0"/>
               <a:t>Second level</a:t>
             </a:r>
           </a:p>
           <a:p>
             <a:pPr lvl="2"/>
             <a:r>
-              <a:rPr lang="en-US"/>
+              <a:rPr lang="en-US" smtClean="0"/>
               <a:t>Third level</a:t>
             </a:r>
           </a:p>
           <a:p>
             <a:pPr lvl="3"/>
             <a:r>
-              <a:rPr lang="en-US"/>
+              <a:rPr lang="en-US" smtClean="0"/>
               <a:t>Fourth level</a:t>
             </a:r>
           </a:p>
           <a:p>
             <a:pPr lvl="4"/>
             <a:r>
-              <a:rPr lang="en-US"/>
+              <a:rPr lang="en-US" smtClean="0"/>
               <a:t>Fifth level</a:t>
             </a:r>
+            <a:endParaRPr lang="en-US"/>
           </a:p>
         </p:txBody>
       </p:sp>
@@ -1329,37 +1305,38 @@
           <a:p>
             <a:pPr lvl="0"/>
             <a:r>
-              <a:rPr lang="en-US"/>
+              <a:rPr lang="en-US" smtClean="0"/>
               <a:t>Click to edit Master text styles</a:t>
             </a:r>
           </a:p>
           <a:p>
             <a:pPr lvl="1"/>
             <a:r>
-              <a:rPr lang="en-US"/>
+              <a:rPr lang="en-US" smtClean="0"/>
               <a:t>Second level</a:t>
             </a:r>
           </a:p>
           <a:p>
             <a:pPr lvl="2"/>
             <a:r>
-              <a:rPr lang="en-US"/>
+              <a:rPr lang="en-US" smtClean="0"/>
               <a:t>Third level</a:t>
             </a:r>
           </a:p>
           <a:p>
             <a:pPr lvl="3"/>
             <a:r>
-              <a:rPr lang="en-US"/>
+              <a:rPr lang="en-US" smtClean="0"/>
               <a:t>Fourth level</a:t>
             </a:r>
           </a:p>
           <a:p>
             <a:pPr lvl="4"/>
             <a:r>
-              <a:rPr lang="en-US"/>
+              <a:rPr lang="en-US" smtClean="0"/>
               <a:t>Fifth level</a:t>
             </a:r>
+            <a:endParaRPr lang="en-US"/>
           </a:p>
         </p:txBody>
       </p:sp>
@@ -1380,7 +1357,7 @@
           <a:p>
             <a:fld id="{5BCAD085-E8A6-8845-BD4E-CB4CCA059FC4}" type="datetimeFigureOut">
               <a:rPr lang="en-US" smtClean="0"/>
-              <a:t>9/2/2026</a:t>
+              <a:t>1/27/13</a:t>
             </a:fld>
             <a:endParaRPr lang="en-US"/>
           </a:p>
@@ -1478,9 +1455,10 @@
           </a:lstStyle>
           <a:p>
             <a:r>
-              <a:rPr lang="en-US"/>
+              <a:rPr lang="en-US" smtClean="0"/>
               <a:t>Click to edit Master title style</a:t>
             </a:r>
+            <a:endParaRPr lang="en-US"/>
           </a:p>
         </p:txBody>
       </p:sp>
@@ -1543,7 +1521,7 @@
           <a:p>
             <a:pPr lvl="0"/>
             <a:r>
-              <a:rPr lang="en-US"/>
+              <a:rPr lang="en-US" smtClean="0"/>
               <a:t>Click to edit Master text styles</a:t>
             </a:r>
           </a:p>
@@ -1599,37 +1577,38 @@
           <a:p>
             <a:pPr lvl="0"/>
             <a:r>
-              <a:rPr lang="en-US"/>
+              <a:rPr lang="en-US" smtClean="0"/>
               <a:t>Click to edit Master text styles</a:t>
             </a:r>
           </a:p>
           <a:p>
             <a:pPr lvl="1"/>
             <a:r>
-              <a:rPr lang="en-US"/>
+              <a:rPr lang="en-US" smtClean="0"/>
               <a:t>Second level</a:t>
             </a:r>
           </a:p>
           <a:p>
             <a:pPr lvl="2"/>
             <a:r>
-              <a:rPr lang="en-US"/>
+              <a:rPr lang="en-US" smtClean="0"/>
               <a:t>Third level</a:t>
             </a:r>
           </a:p>
           <a:p>
             <a:pPr lvl="3"/>
             <a:r>
-              <a:rPr lang="en-US"/>
+              <a:rPr lang="en-US" smtClean="0"/>
               <a:t>Fourth level</a:t>
             </a:r>
           </a:p>
           <a:p>
             <a:pPr lvl="4"/>
             <a:r>
-              <a:rPr lang="en-US"/>
+              <a:rPr lang="en-US" smtClean="0"/>
               <a:t>Fifth level</a:t>
             </a:r>
+            <a:endParaRPr lang="en-US"/>
           </a:p>
         </p:txBody>
       </p:sp>
@@ -1692,7 +1671,7 @@
           <a:p>
             <a:pPr lvl="0"/>
             <a:r>
-              <a:rPr lang="en-US"/>
+              <a:rPr lang="en-US" smtClean="0"/>
               <a:t>Click to edit Master text styles</a:t>
             </a:r>
           </a:p>
@@ -1748,37 +1727,38 @@
           <a:p>
             <a:pPr lvl="0"/>
             <a:r>
-              <a:rPr lang="en-US"/>
+              <a:rPr lang="en-US" smtClean="0"/>
               <a:t>Click to edit Master text styles</a:t>
             </a:r>
           </a:p>
           <a:p>
             <a:pPr lvl="1"/>
             <a:r>
-              <a:rPr lang="en-US"/>
+              <a:rPr lang="en-US" smtClean="0"/>
               <a:t>Second level</a:t>
             </a:r>
           </a:p>
           <a:p>
             <a:pPr lvl="2"/>
             <a:r>
-              <a:rPr lang="en-US"/>
+              <a:rPr lang="en-US" smtClean="0"/>
               <a:t>Third level</a:t>
             </a:r>
           </a:p>
           <a:p>
             <a:pPr lvl="3"/>
             <a:r>
-              <a:rPr lang="en-US"/>
+              <a:rPr lang="en-US" smtClean="0"/>
               <a:t>Fourth level</a:t>
             </a:r>
           </a:p>
           <a:p>
             <a:pPr lvl="4"/>
             <a:r>
-              <a:rPr lang="en-US"/>
+              <a:rPr lang="en-US" smtClean="0"/>
               <a:t>Fifth level</a:t>
             </a:r>
+            <a:endParaRPr lang="en-US"/>
           </a:p>
         </p:txBody>
       </p:sp>
@@ -1799,7 +1779,7 @@
           <a:p>
             <a:fld id="{5BCAD085-E8A6-8845-BD4E-CB4CCA059FC4}" type="datetimeFigureOut">
               <a:rPr lang="en-US" smtClean="0"/>
-              <a:t>9/2/2026</a:t>
+              <a:t>1/27/13</a:t>
             </a:fld>
             <a:endParaRPr lang="en-US"/>
           </a:p>
@@ -1893,9 +1873,10 @@
           <a:lstStyle/>
           <a:p>
             <a:r>
-              <a:rPr lang="en-US"/>
+              <a:rPr lang="en-US" smtClean="0"/>
               <a:t>Click to edit Master title style</a:t>
             </a:r>
+            <a:endParaRPr lang="en-US"/>
           </a:p>
         </p:txBody>
       </p:sp>
@@ -1916,7 +1897,7 @@
           <a:p>
             <a:fld id="{5BCAD085-E8A6-8845-BD4E-CB4CCA059FC4}" type="datetimeFigureOut">
               <a:rPr lang="en-US" smtClean="0"/>
-              <a:t>9/2/2026</a:t>
+              <a:t>1/27/13</a:t>
             </a:fld>
             <a:endParaRPr lang="en-US"/>
           </a:p>
@@ -2011,7 +1992,7 @@
           <a:p>
             <a:fld id="{5BCAD085-E8A6-8845-BD4E-CB4CCA059FC4}" type="datetimeFigureOut">
               <a:rPr lang="en-US" smtClean="0"/>
-              <a:t>9/2/2026</a:t>
+              <a:t>1/27/13</a:t>
             </a:fld>
             <a:endParaRPr lang="en-US"/>
           </a:p>
@@ -2114,9 +2095,10 @@
           </a:lstStyle>
           <a:p>
             <a:r>
-              <a:rPr lang="en-US"/>
+              <a:rPr lang="en-US" smtClean="0"/>
               <a:t>Click to edit Master title style</a:t>
             </a:r>
+            <a:endParaRPr lang="en-US"/>
           </a:p>
         </p:txBody>
       </p:sp>
@@ -2170,37 +2152,38 @@
           <a:p>
             <a:pPr lvl="0"/>
             <a:r>
-              <a:rPr lang="en-US"/>
+              <a:rPr lang="en-US" smtClean="0"/>
               <a:t>Click to edit Master text styles</a:t>
             </a:r>
           </a:p>
           <a:p>
             <a:pPr lvl="1"/>
             <a:r>
-              <a:rPr lang="en-US"/>
+              <a:rPr lang="en-US" smtClean="0"/>
               <a:t>Second level</a:t>
             </a:r>
           </a:p>
           <a:p>
             <a:pPr lvl="2"/>
             <a:r>
-              <a:rPr lang="en-US"/>
+              <a:rPr lang="en-US" smtClean="0"/>
               <a:t>Third level</a:t>
             </a:r>
           </a:p>
           <a:p>
             <a:pPr lvl="3"/>
             <a:r>
-              <a:rPr lang="en-US"/>
+              <a:rPr lang="en-US" smtClean="0"/>
               <a:t>Fourth level</a:t>
             </a:r>
           </a:p>
           <a:p>
             <a:pPr lvl="4"/>
             <a:r>
-              <a:rPr lang="en-US"/>
+              <a:rPr lang="en-US" smtClean="0"/>
               <a:t>Fifth level</a:t>
             </a:r>
+            <a:endParaRPr lang="en-US"/>
           </a:p>
         </p:txBody>
       </p:sp>
@@ -2263,7 +2246,7 @@
           <a:p>
             <a:pPr lvl="0"/>
             <a:r>
-              <a:rPr lang="en-US"/>
+              <a:rPr lang="en-US" smtClean="0"/>
               <a:t>Click to edit Master text styles</a:t>
             </a:r>
           </a:p>
@@ -2286,7 +2269,7 @@
           <a:p>
             <a:fld id="{5BCAD085-E8A6-8845-BD4E-CB4CCA059FC4}" type="datetimeFigureOut">
               <a:rPr lang="en-US" smtClean="0"/>
-              <a:t>9/2/2026</a:t>
+              <a:t>1/27/13</a:t>
             </a:fld>
             <a:endParaRPr lang="en-US"/>
           </a:p>
@@ -2389,9 +2372,10 @@
           </a:lstStyle>
           <a:p>
             <a:r>
-              <a:rPr lang="en-US"/>
+              <a:rPr lang="en-US" smtClean="0"/>
               <a:t>Click to edit Master title style</a:t>
             </a:r>
+            <a:endParaRPr lang="en-US"/>
           </a:p>
         </p:txBody>
       </p:sp>
@@ -2515,7 +2499,7 @@
           <a:p>
             <a:pPr lvl="0"/>
             <a:r>
-              <a:rPr lang="en-US"/>
+              <a:rPr lang="en-US" smtClean="0"/>
               <a:t>Click to edit Master text styles</a:t>
             </a:r>
           </a:p>
@@ -2538,7 +2522,7 @@
           <a:p>
             <a:fld id="{5BCAD085-E8A6-8845-BD4E-CB4CCA059FC4}" type="datetimeFigureOut">
               <a:rPr lang="en-US" smtClean="0"/>
-              <a:t>9/2/2026</a:t>
+              <a:t>1/27/13</a:t>
             </a:fld>
             <a:endParaRPr lang="en-US"/>
           </a:p>
@@ -2647,9 +2631,10 @@
           <a:lstStyle/>
           <a:p>
             <a:r>
-              <a:rPr lang="en-US"/>
+              <a:rPr lang="en-US" smtClean="0"/>
               <a:t>Click to edit Master title style</a:t>
             </a:r>
+            <a:endParaRPr lang="en-US"/>
           </a:p>
         </p:txBody>
       </p:sp>
@@ -2680,37 +2665,38 @@
           <a:p>
             <a:pPr lvl="0"/>
             <a:r>
-              <a:rPr lang="en-US"/>
+              <a:rPr lang="en-US" smtClean="0"/>
               <a:t>Click to edit Master text styles</a:t>
             </a:r>
           </a:p>
           <a:p>
             <a:pPr lvl="1"/>
             <a:r>
-              <a:rPr lang="en-US"/>
+              <a:rPr lang="en-US" smtClean="0"/>
               <a:t>Second level</a:t>
             </a:r>
           </a:p>
           <a:p>
             <a:pPr lvl="2"/>
             <a:r>
-              <a:rPr lang="en-US"/>
+              <a:rPr lang="en-US" smtClean="0"/>
               <a:t>Third level</a:t>
             </a:r>
           </a:p>
           <a:p>
             <a:pPr lvl="3"/>
             <a:r>
-              <a:rPr lang="en-US"/>
+              <a:rPr lang="en-US" smtClean="0"/>
               <a:t>Fourth level</a:t>
             </a:r>
           </a:p>
           <a:p>
             <a:pPr lvl="4"/>
             <a:r>
-              <a:rPr lang="en-US"/>
+              <a:rPr lang="en-US" smtClean="0"/>
               <a:t>Fifth level</a:t>
             </a:r>
+            <a:endParaRPr lang="en-US"/>
           </a:p>
         </p:txBody>
       </p:sp>
@@ -2749,7 +2735,7 @@
           <a:p>
             <a:fld id="{5BCAD085-E8A6-8845-BD4E-CB4CCA059FC4}" type="datetimeFigureOut">
               <a:rPr lang="en-US" smtClean="0"/>
-              <a:t>9/2/2026</a:t>
+              <a:t>1/27/13</a:t>
             </a:fld>
             <a:endParaRPr lang="en-US"/>
           </a:p>
@@ -3108,7 +3094,7 @@
 </file>
 
 <file path=ppt/slides/slide1.xml><?xml version="1.0" encoding="utf-8"?>
-<p:sld xmlns:a="http://schemas.openxmlformats.org/drawingml/2006/main" xmlns:r="http://schemas.openxmlformats.org/officeDocument/2006/relationships" xmlns:p="http://schemas.openxmlformats.org/presentationml/2006/main">
+<p:sld xmlns:a="http://schemas.openxmlformats.org/drawingml/2006/main" xmlns:p="http://schemas.openxmlformats.org/presentationml/2006/main" xmlns:r="http://schemas.openxmlformats.org/officeDocument/2006/relationships">
   <p:cSld>
     <p:spTree>
       <p:nvGrpSpPr>
@@ -3116,14 +3102,7 @@
         <p:cNvGrpSpPr/>
         <p:nvPr/>
       </p:nvGrpSpPr>
-      <p:grpSpPr>
-        <a:xfrm>
-          <a:off x="0" y="0"/>
-          <a:ext cx="0" cy="0"/>
-          <a:chOff x="0" y="0"/>
-          <a:chExt cx="0" cy="0"/>
-        </a:xfrm>
-      </p:grpSpPr>
+      <p:grpSpPr/>
       <p:sp>
         <p:nvSpPr>
           <p:cNvPr id="2" name="Rectangle 1"/>
@@ -3139,7 +3118,7 @@
             <a:avLst/>
           </a:prstGeom>
           <a:solidFill>
-            <a:srgbClr val="1B1B2F"/>
+            <a:srgbClr val="1B2A4A"/>
           </a:solidFill>
           <a:ln>
             <a:noFill/>
@@ -3164,7 +3143,6 @@
           <a:lstStyle/>
           <a:p>
             <a:pPr algn="ctr"/>
-            <a:endParaRPr/>
           </a:p>
         </p:txBody>
       </p:sp>
@@ -3176,7 +3154,7 @@
         </p:nvSpPr>
         <p:spPr>
           <a:xfrm>
-            <a:off x="731520" y="2011680"/>
+            <a:off x="731520" y="2194560"/>
             <a:ext cx="10698480" cy="2377440"/>
           </a:xfrm>
           <a:prstGeom prst="rect">
@@ -3191,85 +3169,89 @@
           <a:lstStyle/>
           <a:p>
             <a:pPr>
-              <a:defRPr sz="5400" b="1">
+              <a:defRPr sz="5200" b="1">
                 <a:solidFill>
                   <a:srgbClr val="FFFFFF"/>
                 </a:solidFill>
               </a:defRPr>
             </a:pPr>
             <a:r>
-              <a:rPr dirty="0"/>
-              <a:t>HSDES NEXUS</a:t>
-            </a:r>
-          </a:p>
-          <a:p>
-            <a:pPr>
-              <a:defRPr sz="2400">
-                <a:solidFill>
-                  <a:srgbClr val="8EC5F0"/>
-                </a:solidFill>
-              </a:defRPr>
-            </a:pPr>
-            <a:r>
-              <a:rPr dirty="0"/>
-              <a:t>Agentic HSD Triage  +  </a:t>
-            </a:r>
-            <a:r>
-              <a:rPr dirty="0" err="1"/>
-              <a:t>PythonSV</a:t>
-            </a:r>
-            <a:r>
-              <a:rPr dirty="0"/>
-              <a:t> Live Debug over the Lab NUC</a:t>
+              <a:t>Auto HSD Analyser</a:t>
+            </a:r>
+          </a:p>
+          <a:p>
+            <a:pPr>
+              <a:defRPr sz="2200">
+                <a:solidFill>
+                  <a:srgbClr val="9FC3E8"/>
+                </a:solidFill>
+              </a:defRPr>
+            </a:pPr>
+            <a:r>
+              <a:t>Automated, engineer-grade HSD triage for Intel server platforms</a:t>
             </a:r>
           </a:p>
           <a:p>
             <a:pPr>
               <a:defRPr sz="1600">
                 <a:solidFill>
-                  <a:srgbClr val="B8C0CE"/>
-                </a:solidFill>
-              </a:defRPr>
-            </a:pPr>
-            <a:r>
-              <a:rPr dirty="0"/>
-              <a:t>Evolution of </a:t>
-            </a:r>
-            <a:r>
-              <a:rPr dirty="0" err="1"/>
-              <a:t>BugScout</a:t>
-            </a:r>
-            <a:r>
-              <a:rPr dirty="0"/>
-              <a:t> — one </a:t>
-            </a:r>
-            <a:r>
-              <a:rPr dirty="0" err="1"/>
-              <a:t>FastAPI</a:t>
-            </a:r>
-            <a:r>
-              <a:rPr dirty="0"/>
-              <a:t> tool for server-platform debug</a:t>
-            </a:r>
-          </a:p>
-        </p:txBody>
-      </p:sp>
-      <p:sp>
-        <p:nvSpPr>
-          <p:cNvPr id="4" name="Rectangle 3"/>
+                  <a:srgbClr val="C9D6EA"/>
+                </a:solidFill>
+              </a:defRPr>
+            </a:pPr>
+            <a:r>
+              <a:t>Read · Decode · Correlate · Report · Learn</a:t>
+            </a:r>
+          </a:p>
+          <a:p>
+            <a:br/>
+            <a:pPr>
+              <a:defRPr sz="1400">
+                <a:solidFill>
+                  <a:srgbClr val="C9D6EA"/>
+                </a:solidFill>
+              </a:defRPr>
+            </a:pPr>
+            <a:r>
+              <a:t>Presented by: ______________          Date: ____________</a:t>
+            </a:r>
+          </a:p>
+        </p:txBody>
+      </p:sp>
+    </p:spTree>
+  </p:cSld>
+  <p:clrMapOvr>
+    <a:masterClrMapping/>
+  </p:clrMapOvr>
+</p:sld>
+</file>
+
+<file path=ppt/slides/slide10.xml><?xml version="1.0" encoding="utf-8"?>
+<p:sld xmlns:a="http://schemas.openxmlformats.org/drawingml/2006/main" xmlns:p="http://schemas.openxmlformats.org/presentationml/2006/main" xmlns:r="http://schemas.openxmlformats.org/officeDocument/2006/relationships">
+  <p:cSld>
+    <p:spTree>
+      <p:nvGrpSpPr>
+        <p:cNvPr id="1" name=""/>
+        <p:cNvGrpSpPr/>
+        <p:nvPr/>
+      </p:nvGrpSpPr>
+      <p:grpSpPr/>
+      <p:sp>
+        <p:nvSpPr>
+          <p:cNvPr id="2" name="Rectangle 1"/>
           <p:cNvSpPr/>
           <p:nvPr/>
         </p:nvSpPr>
         <p:spPr>
           <a:xfrm>
-            <a:off x="0" y="6309360"/>
-            <a:ext cx="12191695" cy="548640"/>
+            <a:off x="0" y="0"/>
+            <a:ext cx="12191695" cy="1051560"/>
           </a:xfrm>
           <a:prstGeom prst="rect">
             <a:avLst/>
           </a:prstGeom>
           <a:solidFill>
-            <a:srgbClr val="0071C5"/>
+            <a:srgbClr val="1B2A4A"/>
           </a:solidFill>
           <a:ln>
             <a:noFill/>
@@ -3290,11 +3272,144 @@
           </a:fontRef>
         </p:style>
         <p:txBody>
-          <a:bodyPr rtlCol="0" anchor="ctr"/>
-          <a:lstStyle/>
-          <a:p>
-            <a:pPr algn="ctr"/>
-            <a:endParaRPr/>
+          <a:bodyPr rtlCol="0" anchor="ctr" lIns="457200" wrap="square"/>
+          <a:lstStyle/>
+          <a:p>
+            <a:pPr algn="ctr">
+              <a:defRPr sz="3000" b="1">
+                <a:solidFill>
+                  <a:srgbClr val="FFFFFF"/>
+                </a:solidFill>
+              </a:defRPr>
+            </a:pPr>
+            <a:r>
+              <a:t>Data Sources &amp; Provenance</a:t>
+            </a:r>
+          </a:p>
+          <a:p>
+            <a:pPr>
+              <a:defRPr sz="1300">
+                <a:solidFill>
+                  <a:srgbClr val="C9D6EA"/>
+                </a:solidFill>
+              </a:defRPr>
+            </a:pPr>
+            <a:r>
+              <a:t>Every fact in the report is traceable — nothing leaves the Intel network</a:t>
+            </a:r>
+          </a:p>
+        </p:txBody>
+      </p:sp>
+      <p:sp>
+        <p:nvSpPr>
+          <p:cNvPr id="3" name="TextBox 2"/>
+          <p:cNvSpPr txBox="1"/>
+          <p:nvPr/>
+        </p:nvSpPr>
+        <p:spPr>
+          <a:xfrm>
+            <a:off x="640080" y="1371600"/>
+            <a:ext cx="10972800" cy="4937760"/>
+          </a:xfrm>
+          <a:prstGeom prst="rect">
+            <a:avLst/>
+          </a:prstGeom>
+          <a:noFill/>
+        </p:spPr>
+        <p:txBody>
+          <a:bodyPr wrap="square">
+            <a:spAutoFit/>
+          </a:bodyPr>
+          <a:lstStyle/>
+          <a:p>
+            <a:pPr>
+              <a:spcAft>
+                <a:spcPts val="700"/>
+              </a:spcAft>
+              <a:defRPr sz="1600">
+                <a:solidFill>
+                  <a:srgbClr val="1B2A4A"/>
+                </a:solidFill>
+              </a:defRPr>
+            </a:pPr>
+            <a:r>
+              <a:t>Root cause &amp; investigation — the HSDES ticket itself: description + full comment thread, read live over Kerberos SSO and cited per author.</a:t>
+            </a:r>
+          </a:p>
+          <a:p>
+            <a:pPr>
+              <a:spcAft>
+                <a:spcPts val="700"/>
+              </a:spcAft>
+              <a:defRPr sz="1600">
+                <a:solidFill>
+                  <a:srgbClr val="1B2A4A"/>
+                </a:solidFill>
+              </a:defRPr>
+            </a:pPr>
+            <a:r>
+              <a:t>Attached logs — SOL / PythonSV / POST logs from the HSDES attachments API, plus linked Axon recordings (SVTools failure signatures).</a:t>
+            </a:r>
+          </a:p>
+          <a:p>
+            <a:pPr>
+              <a:spcAft>
+                <a:spcPts val="700"/>
+              </a:spcAft>
+              <a:defRPr sz="1600">
+                <a:solidFill>
+                  <a:srgbClr val="1B2A4A"/>
+                </a:solidFill>
+              </a:defRPr>
+            </a:pPr>
+            <a:r>
+              <a:t>Silicon MCE / MCA decode — bundled Intel decoder databases in app/decoders/, derived from Intel MCA / RAS customer documentation:</a:t>
+            </a:r>
+          </a:p>
+          <a:p>
+            <a:pPr lvl="1">
+              <a:spcAft>
+                <a:spcPts val="700"/>
+              </a:spcAft>
+              <a:defRPr sz="1300">
+                <a:solidFill>
+                  <a:srgbClr val="445566"/>
+                </a:solidFill>
+              </a:defRPr>
+            </a:pPr>
+            <a:r>
+              <a:t>MCA 712 codes · MCHECK 496 · EWL 124 · RC-Fatal 50 · IPSD 28 · POST checkpoints (MCACOD / MSCOD → bank, IP, error class, action).</a:t>
+            </a:r>
+          </a:p>
+          <a:p>
+            <a:pPr>
+              <a:spcAft>
+                <a:spcPts val="700"/>
+              </a:spcAft>
+              <a:defRPr sz="1600">
+                <a:solidFill>
+                  <a:srgbClr val="1B2A4A"/>
+                </a:solidFill>
+              </a:defRPr>
+            </a:pPr>
+            <a:r>
+              <a:t>Similar past issues &amp; fixes — HSDES search + a local self-learning Knowledge Base (kb/).</a:t>
+            </a:r>
+          </a:p>
+          <a:p>
+            <a:pPr>
+              <a:spcAft>
+                <a:spcPts val="700"/>
+              </a:spcAft>
+              <a:defRPr sz="1600">
+                <a:solidFill>
+                  <a:srgbClr val="1B2A4A"/>
+                </a:solidFill>
+              </a:defRPr>
+            </a:pPr>
+            <a:r>
+              <a:t>All processing is local; the report labels each cause with its source and how proven it is.</a:t>
+            </a:r>
           </a:p>
         </p:txBody>
       </p:sp>
@@ -3306,8 +3421,8 @@
 </p:sld>
 </file>
 
-<file path=ppt/slides/slide2.xml><?xml version="1.0" encoding="utf-8"?>
-<p:sld xmlns:a="http://schemas.openxmlformats.org/drawingml/2006/main" xmlns:r="http://schemas.openxmlformats.org/officeDocument/2006/relationships" xmlns:p="http://schemas.openxmlformats.org/presentationml/2006/main">
+<file path=ppt/slides/slide11.xml><?xml version="1.0" encoding="utf-8"?>
+<p:sld xmlns:a="http://schemas.openxmlformats.org/drawingml/2006/main" xmlns:p="http://schemas.openxmlformats.org/presentationml/2006/main" xmlns:r="http://schemas.openxmlformats.org/officeDocument/2006/relationships">
   <p:cSld>
     <p:spTree>
       <p:nvGrpSpPr>
@@ -3315,14 +3430,7 @@
         <p:cNvGrpSpPr/>
         <p:nvPr/>
       </p:nvGrpSpPr>
-      <p:grpSpPr>
-        <a:xfrm>
-          <a:off x="0" y="0"/>
-          <a:ext cx="0" cy="0"/>
-          <a:chOff x="0" y="0"/>
-          <a:chExt cx="0" cy="0"/>
-        </a:xfrm>
-      </p:grpSpPr>
+      <p:grpSpPr/>
       <p:sp>
         <p:nvSpPr>
           <p:cNvPr id="2" name="Rectangle 1"/>
@@ -3332,13 +3440,13 @@
         <p:spPr>
           <a:xfrm>
             <a:off x="0" y="0"/>
-            <a:ext cx="12191695" cy="960120"/>
+            <a:ext cx="12191695" cy="1051560"/>
           </a:xfrm>
           <a:prstGeom prst="rect">
             <a:avLst/>
           </a:prstGeom>
           <a:solidFill>
-            <a:srgbClr val="0071C5"/>
+            <a:srgbClr val="1B2A4A"/>
           </a:solidFill>
           <a:ln>
             <a:noFill/>
@@ -3359,7 +3467,7 @@
           </a:fontRef>
         </p:style>
         <p:txBody>
-          <a:bodyPr wrap="square" lIns="365760" rtlCol="0" anchor="ctr"/>
+          <a:bodyPr rtlCol="0" anchor="ctr" lIns="457200" wrap="square"/>
           <a:lstStyle/>
           <a:p>
             <a:pPr algn="ctr">
@@ -3370,136 +3478,47 @@
               </a:defRPr>
             </a:pPr>
             <a:r>
-              <a:t>What is HSDES NEXUS?</a:t>
-            </a:r>
-          </a:p>
-          <a:p>
-            <a:pPr>
-              <a:defRPr sz="1400">
-                <a:solidFill>
-                  <a:srgbClr val="DCEBFA"/>
-                </a:solidFill>
-              </a:defRPr>
-            </a:pPr>
-            <a:r>
-              <a:t>Agentic, evidence-grounded triage for any Intel server-platform HSD</a:t>
-            </a:r>
-          </a:p>
-        </p:txBody>
-      </p:sp>
-      <p:sp>
-        <p:nvSpPr>
-          <p:cNvPr id="3" name="TextBox 2"/>
-          <p:cNvSpPr txBox="1"/>
+              <a:t>Product Roadmap</a:t>
+            </a:r>
+          </a:p>
+          <a:p>
+            <a:pPr>
+              <a:defRPr sz="1300">
+                <a:solidFill>
+                  <a:srgbClr val="C9D6EA"/>
+                </a:solidFill>
+              </a:defRPr>
+            </a:pPr>
+            <a:r>
+              <a:t>Phase 0 → Phase 5 · where we are and where we're going</a:t>
+            </a:r>
+          </a:p>
+        </p:txBody>
+      </p:sp>
+      <p:pic>
+        <p:nvPicPr>
+          <p:cNvPr id="3" name="Picture 2" descr="nexus_roadmap.png"/>
+          <p:cNvPicPr>
+            <a:picLocks noChangeAspect="1"/>
+          </p:cNvPicPr>
           <p:nvPr/>
-        </p:nvSpPr>
+        </p:nvPicPr>
+        <p:blipFill>
+          <a:blip r:embed="rId2"/>
+          <a:stretch>
+            <a:fillRect/>
+          </a:stretch>
+        </p:blipFill>
         <p:spPr>
           <a:xfrm>
-            <a:off x="548640" y="1280160"/>
-            <a:ext cx="11064240" cy="5120640"/>
+            <a:off x="274320" y="1188720"/>
+            <a:ext cx="11612880" cy="6568343"/>
           </a:xfrm>
           <a:prstGeom prst="rect">
             <a:avLst/>
           </a:prstGeom>
-          <a:noFill/>
         </p:spPr>
-        <p:txBody>
-          <a:bodyPr wrap="square">
-            <a:spAutoFit/>
-          </a:bodyPr>
-          <a:lstStyle/>
-          <a:p>
-            <a:pPr>
-              <a:spcAft>
-                <a:spcPts val="600"/>
-              </a:spcAft>
-              <a:defRPr sz="1900">
-                <a:solidFill>
-                  <a:srgbClr val="1B1B2F"/>
-                </a:solidFill>
-              </a:defRPr>
-            </a:pPr>
-            <a:r>
-              <a:t>Give it an HSD ID — it reads the ticket + comments, decodes attached logs, recalls similar past cases, and writes a structured Root-Cause-Analysis report.</a:t>
-            </a:r>
-          </a:p>
-          <a:p>
-            <a:pPr>
-              <a:spcAft>
-                <a:spcPts val="600"/>
-              </a:spcAft>
-              <a:defRPr sz="1900">
-                <a:solidFill>
-                  <a:srgbClr val="1B1B2F"/>
-                </a:solidFill>
-              </a:defRPr>
-            </a:pPr>
-            <a:r>
-              <a:t>Self-learning Knowledge Base: every ticket seen is written back, so matching improves over time.</a:t>
-            </a:r>
-          </a:p>
-          <a:p>
-            <a:pPr>
-              <a:spcAft>
-                <a:spcPts val="600"/>
-              </a:spcAft>
-              <a:defRPr sz="1900">
-                <a:solidFill>
-                  <a:srgbClr val="1B1B2F"/>
-                </a:solidFill>
-              </a:defRPr>
-            </a:pPr>
-            <a:r>
-              <a:t>Deterministic OFFLINE mode (no LLM required) using bundled Intel decoder databases.</a:t>
-            </a:r>
-          </a:p>
-          <a:p>
-            <a:pPr>
-              <a:spcAft>
-                <a:spcPts val="600"/>
-              </a:spcAft>
-              <a:defRPr sz="1900">
-                <a:solidFill>
-                  <a:srgbClr val="1B1B2F"/>
-                </a:solidFill>
-              </a:defRPr>
-            </a:pPr>
-            <a:r>
-              <a:t>Grounded in many sources at once: HSDES REST + Geni + Co-Design + Wiki KB + decoders + Axon.</a:t>
-            </a:r>
-          </a:p>
-          <a:p>
-            <a:pPr>
-              <a:spcAft>
-                <a:spcPts val="600"/>
-              </a:spcAft>
-              <a:defRPr sz="1900">
-                <a:solidFill>
-                  <a:srgbClr val="1B1B2F"/>
-                </a:solidFill>
-              </a:defRPr>
-            </a:pPr>
-            <a:r>
-              <a:t>NEW headline capability: PythonSV Live Debug through the bench NUC — reach a hung / unreachable SUT out-of-band.</a:t>
-            </a:r>
-          </a:p>
-          <a:p>
-            <a:pPr>
-              <a:spcAft>
-                <a:spcPts val="600"/>
-              </a:spcAft>
-              <a:defRPr sz="1900">
-                <a:solidFill>
-                  <a:srgbClr val="1B1B2F"/>
-                </a:solidFill>
-              </a:defRPr>
-            </a:pPr>
-            <a:r>
-              <a:t>Web UI (tabs) + unified CLI; reports saved as Markdown + HTML with a Reference Sources citation table.</a:t>
-            </a:r>
-          </a:p>
-        </p:txBody>
-      </p:sp>
+      </p:pic>
     </p:spTree>
   </p:cSld>
   <p:clrMapOvr>
@@ -3508,8 +3527,8 @@
 </p:sld>
 </file>
 
-<file path=ppt/slides/slide3.xml><?xml version="1.0" encoding="utf-8"?>
-<p:sld xmlns:a="http://schemas.openxmlformats.org/drawingml/2006/main" xmlns:r="http://schemas.openxmlformats.org/officeDocument/2006/relationships" xmlns:p="http://schemas.openxmlformats.org/presentationml/2006/main">
+<file path=ppt/slides/slide12.xml><?xml version="1.0" encoding="utf-8"?>
+<p:sld xmlns:a="http://schemas.openxmlformats.org/drawingml/2006/main" xmlns:p="http://schemas.openxmlformats.org/presentationml/2006/main" xmlns:r="http://schemas.openxmlformats.org/officeDocument/2006/relationships">
   <p:cSld>
     <p:spTree>
       <p:nvGrpSpPr>
@@ -3517,14 +3536,7 @@
         <p:cNvGrpSpPr/>
         <p:nvPr/>
       </p:nvGrpSpPr>
-      <p:grpSpPr>
-        <a:xfrm>
-          <a:off x="0" y="0"/>
-          <a:ext cx="0" cy="0"/>
-          <a:chOff x="0" y="0"/>
-          <a:chExt cx="0" cy="0"/>
-        </a:xfrm>
-      </p:grpSpPr>
+      <p:grpSpPr/>
       <p:sp>
         <p:nvSpPr>
           <p:cNvPr id="2" name="Rectangle 1"/>
@@ -3534,13 +3546,13 @@
         <p:spPr>
           <a:xfrm>
             <a:off x="0" y="0"/>
-            <a:ext cx="12191695" cy="960120"/>
+            <a:ext cx="12191695" cy="1051560"/>
           </a:xfrm>
           <a:prstGeom prst="rect">
             <a:avLst/>
           </a:prstGeom>
           <a:solidFill>
-            <a:srgbClr val="0071C5"/>
+            <a:srgbClr val="1B2A4A"/>
           </a:solidFill>
           <a:ln>
             <a:noFill/>
@@ -3561,7 +3573,7 @@
           </a:fontRef>
         </p:style>
         <p:txBody>
-          <a:bodyPr wrap="square" lIns="365760" rtlCol="0" anchor="ctr"/>
+          <a:bodyPr rtlCol="0" anchor="ctr" lIns="457200" wrap="square"/>
           <a:lstStyle/>
           <a:p>
             <a:pPr algn="ctr">
@@ -3572,651 +3584,33 @@
               </a:defRPr>
             </a:pPr>
             <a:r>
-              <a:t>How it works — end-to-end flow</a:t>
-            </a:r>
-          </a:p>
-        </p:txBody>
-      </p:sp>
-      <p:sp>
-        <p:nvSpPr>
-          <p:cNvPr id="3" name="Rounded Rectangle 2"/>
-          <p:cNvSpPr/>
+              <a:t>What's New — Automation, Validation &amp; Phase 2</a:t>
+            </a:r>
+          </a:p>
+          <a:p>
+            <a:pPr>
+              <a:defRPr sz="1300">
+                <a:solidFill>
+                  <a:srgbClr val="C9D6EA"/>
+                </a:solidFill>
+              </a:defRPr>
+            </a:pPr>
+            <a:r>
+              <a:t>Shipped since the engineer-grade RCA engine</a:t>
+            </a:r>
+          </a:p>
+        </p:txBody>
+      </p:sp>
+      <p:sp>
+        <p:nvSpPr>
+          <p:cNvPr id="3" name="TextBox 2"/>
+          <p:cNvSpPr txBox="1"/>
           <p:nvPr/>
         </p:nvSpPr>
         <p:spPr>
           <a:xfrm>
-            <a:off x="457200" y="1234440"/>
-            <a:ext cx="2057400" cy="566928"/>
-          </a:xfrm>
-          <a:prstGeom prst="roundRect">
-            <a:avLst/>
-          </a:prstGeom>
-          <a:solidFill>
-            <a:srgbClr val="0071C5"/>
-          </a:solidFill>
-          <a:ln>
-            <a:solidFill>
-              <a:srgbClr val="FFFFFF"/>
-            </a:solidFill>
-          </a:ln>
-        </p:spPr>
-        <p:style>
-          <a:lnRef idx="1">
-            <a:schemeClr val="accent1"/>
-          </a:lnRef>
-          <a:fillRef idx="3">
-            <a:schemeClr val="accent1"/>
-          </a:fillRef>
-          <a:effectRef idx="2">
-            <a:schemeClr val="accent1"/>
-          </a:effectRef>
-          <a:fontRef idx="minor">
-            <a:schemeClr val="lt1"/>
-          </a:fontRef>
-        </p:style>
-        <p:txBody>
-          <a:bodyPr wrap="square" rtlCol="0" anchor="ctr"/>
-          <a:lstStyle/>
-          <a:p>
-            <a:pPr algn="ctr">
-              <a:defRPr sz="1200" b="1">
-                <a:solidFill>
-                  <a:srgbClr val="FFFFFF"/>
-                </a:solidFill>
-              </a:defRPr>
-            </a:pPr>
-            <a:r>
-              <a:t>User · Web UI / CLI</a:t>
-            </a:r>
-          </a:p>
-        </p:txBody>
-      </p:sp>
-      <p:sp>
-        <p:nvSpPr>
-          <p:cNvPr id="4" name="Rounded Rectangle 3"/>
-          <p:cNvSpPr/>
-          <p:nvPr/>
-        </p:nvSpPr>
-        <p:spPr>
-          <a:xfrm>
-            <a:off x="2651760" y="1234440"/>
-            <a:ext cx="2057400" cy="566928"/>
-          </a:xfrm>
-          <a:prstGeom prst="roundRect">
-            <a:avLst/>
-          </a:prstGeom>
-          <a:solidFill>
-            <a:srgbClr val="2E7D32"/>
-          </a:solidFill>
-          <a:ln>
-            <a:solidFill>
-              <a:srgbClr val="FFFFFF"/>
-            </a:solidFill>
-          </a:ln>
-        </p:spPr>
-        <p:style>
-          <a:lnRef idx="1">
-            <a:schemeClr val="accent1"/>
-          </a:lnRef>
-          <a:fillRef idx="3">
-            <a:schemeClr val="accent1"/>
-          </a:fillRef>
-          <a:effectRef idx="2">
-            <a:schemeClr val="accent1"/>
-          </a:effectRef>
-          <a:fontRef idx="minor">
-            <a:schemeClr val="lt1"/>
-          </a:fontRef>
-        </p:style>
-        <p:txBody>
-          <a:bodyPr wrap="square" rtlCol="0" anchor="ctr"/>
-          <a:lstStyle/>
-          <a:p>
-            <a:pPr algn="ctr">
-              <a:defRPr sz="1200" b="1">
-                <a:solidFill>
-                  <a:srgbClr val="FFFFFF"/>
-                </a:solidFill>
-              </a:defRPr>
-            </a:pPr>
-            <a:r>
-              <a:t>RECALL · KB search</a:t>
-            </a:r>
-          </a:p>
-        </p:txBody>
-      </p:sp>
-      <p:cxnSp>
-        <p:nvCxnSpPr>
-          <p:cNvPr id="5" name="Connector 4"/>
-          <p:cNvCxnSpPr/>
-          <p:nvPr/>
-        </p:nvCxnSpPr>
-        <p:spPr>
-          <a:xfrm>
-            <a:off x="2514600" y="1517904"/>
-            <a:ext cx="137160" cy="0"/>
-          </a:xfrm>
-          <a:prstGeom prst="bentConnector3">
-            <a:avLst/>
-          </a:prstGeom>
-          <a:ln w="25400">
-            <a:solidFill>
-              <a:srgbClr val="5A6372"/>
-            </a:solidFill>
-            <a:tailEnd type="triangle"/>
-          </a:ln>
-        </p:spPr>
-        <p:style>
-          <a:lnRef idx="2">
-            <a:schemeClr val="accent1"/>
-          </a:lnRef>
-          <a:fillRef idx="0">
-            <a:schemeClr val="accent1"/>
-          </a:fillRef>
-          <a:effectRef idx="1">
-            <a:schemeClr val="accent1"/>
-          </a:effectRef>
-          <a:fontRef idx="minor">
-            <a:schemeClr val="tx1"/>
-          </a:fontRef>
-        </p:style>
-      </p:cxnSp>
-      <p:sp>
-        <p:nvSpPr>
-          <p:cNvPr id="6" name="Rounded Rectangle 5"/>
-          <p:cNvSpPr/>
-          <p:nvPr/>
-        </p:nvSpPr>
-        <p:spPr>
-          <a:xfrm>
-            <a:off x="4846320" y="1234440"/>
-            <a:ext cx="2057400" cy="566928"/>
-          </a:xfrm>
-          <a:prstGeom prst="roundRect">
-            <a:avLst/>
-          </a:prstGeom>
-          <a:solidFill>
-            <a:srgbClr val="2E7D32"/>
-          </a:solidFill>
-          <a:ln>
-            <a:solidFill>
-              <a:srgbClr val="FFFFFF"/>
-            </a:solidFill>
-          </a:ln>
-        </p:spPr>
-        <p:style>
-          <a:lnRef idx="1">
-            <a:schemeClr val="accent1"/>
-          </a:lnRef>
-          <a:fillRef idx="3">
-            <a:schemeClr val="accent1"/>
-          </a:fillRef>
-          <a:effectRef idx="2">
-            <a:schemeClr val="accent1"/>
-          </a:effectRef>
-          <a:fontRef idx="minor">
-            <a:schemeClr val="lt1"/>
-          </a:fontRef>
-        </p:style>
-        <p:txBody>
-          <a:bodyPr wrap="square" rtlCol="0" anchor="ctr"/>
-          <a:lstStyle/>
-          <a:p>
-            <a:pPr algn="ctr">
-              <a:defRPr sz="1200" b="1">
-                <a:solidFill>
-                  <a:srgbClr val="FFFFFF"/>
-                </a:solidFill>
-              </a:defRPr>
-            </a:pPr>
-            <a:r>
-              <a:t>INVESTIGATE · HSD + comments + logs</a:t>
-            </a:r>
-          </a:p>
-        </p:txBody>
-      </p:sp>
-      <p:cxnSp>
-        <p:nvCxnSpPr>
-          <p:cNvPr id="7" name="Connector 6"/>
-          <p:cNvCxnSpPr/>
-          <p:nvPr/>
-        </p:nvCxnSpPr>
-        <p:spPr>
-          <a:xfrm>
-            <a:off x="4709160" y="1517904"/>
-            <a:ext cx="137160" cy="0"/>
-          </a:xfrm>
-          <a:prstGeom prst="bentConnector3">
-            <a:avLst/>
-          </a:prstGeom>
-          <a:ln w="25400">
-            <a:solidFill>
-              <a:srgbClr val="5A6372"/>
-            </a:solidFill>
-            <a:tailEnd type="triangle"/>
-          </a:ln>
-        </p:spPr>
-        <p:style>
-          <a:lnRef idx="2">
-            <a:schemeClr val="accent1"/>
-          </a:lnRef>
-          <a:fillRef idx="0">
-            <a:schemeClr val="accent1"/>
-          </a:fillRef>
-          <a:effectRef idx="1">
-            <a:schemeClr val="accent1"/>
-          </a:effectRef>
-          <a:fontRef idx="minor">
-            <a:schemeClr val="tx1"/>
-          </a:fontRef>
-        </p:style>
-      </p:cxnSp>
-      <p:sp>
-        <p:nvSpPr>
-          <p:cNvPr id="8" name="Rounded Rectangle 7"/>
-          <p:cNvSpPr/>
-          <p:nvPr/>
-        </p:nvSpPr>
-        <p:spPr>
-          <a:xfrm>
-            <a:off x="7040880" y="1234440"/>
-            <a:ext cx="2057400" cy="566928"/>
-          </a:xfrm>
-          <a:prstGeom prst="roundRect">
-            <a:avLst/>
-          </a:prstGeom>
-          <a:solidFill>
-            <a:srgbClr val="B07400"/>
-          </a:solidFill>
-          <a:ln>
-            <a:solidFill>
-              <a:srgbClr val="FFFFFF"/>
-            </a:solidFill>
-          </a:ln>
-        </p:spPr>
-        <p:style>
-          <a:lnRef idx="1">
-            <a:schemeClr val="accent1"/>
-          </a:lnRef>
-          <a:fillRef idx="3">
-            <a:schemeClr val="accent1"/>
-          </a:fillRef>
-          <a:effectRef idx="2">
-            <a:schemeClr val="accent1"/>
-          </a:effectRef>
-          <a:fontRef idx="minor">
-            <a:schemeClr val="lt1"/>
-          </a:fontRef>
-        </p:style>
-        <p:txBody>
-          <a:bodyPr wrap="square" rtlCol="0" anchor="ctr"/>
-          <a:lstStyle/>
-          <a:p>
-            <a:pPr algn="ctr">
-              <a:defRPr sz="1200" b="1">
-                <a:solidFill>
-                  <a:srgbClr val="FFFFFF"/>
-                </a:solidFill>
-              </a:defRPr>
-            </a:pPr>
-            <a:r>
-              <a:t>DECODE · MCA/EWL/POST + Enrichment</a:t>
-            </a:r>
-          </a:p>
-        </p:txBody>
-      </p:sp>
-      <p:cxnSp>
-        <p:nvCxnSpPr>
-          <p:cNvPr id="9" name="Connector 8"/>
-          <p:cNvCxnSpPr/>
-          <p:nvPr/>
-        </p:nvCxnSpPr>
-        <p:spPr>
-          <a:xfrm>
-            <a:off x="6903720" y="1517904"/>
-            <a:ext cx="137160" cy="0"/>
-          </a:xfrm>
-          <a:prstGeom prst="bentConnector3">
-            <a:avLst/>
-          </a:prstGeom>
-          <a:ln w="25400">
-            <a:solidFill>
-              <a:srgbClr val="5A6372"/>
-            </a:solidFill>
-            <a:tailEnd type="triangle"/>
-          </a:ln>
-        </p:spPr>
-        <p:style>
-          <a:lnRef idx="2">
-            <a:schemeClr val="accent1"/>
-          </a:lnRef>
-          <a:fillRef idx="0">
-            <a:schemeClr val="accent1"/>
-          </a:fillRef>
-          <a:effectRef idx="1">
-            <a:schemeClr val="accent1"/>
-          </a:effectRef>
-          <a:fontRef idx="minor">
-            <a:schemeClr val="tx1"/>
-          </a:fontRef>
-        </p:style>
-      </p:cxnSp>
-      <p:sp>
-        <p:nvSpPr>
-          <p:cNvPr id="10" name="Rounded Rectangle 9"/>
-          <p:cNvSpPr/>
-          <p:nvPr/>
-        </p:nvSpPr>
-        <p:spPr>
-          <a:xfrm>
-            <a:off x="9235440" y="1234440"/>
-            <a:ext cx="2057400" cy="566928"/>
-          </a:xfrm>
-          <a:prstGeom prst="roundRect">
-            <a:avLst/>
-          </a:prstGeom>
-          <a:solidFill>
-            <a:srgbClr val="0071C5"/>
-          </a:solidFill>
-          <a:ln>
-            <a:solidFill>
-              <a:srgbClr val="FFFFFF"/>
-            </a:solidFill>
-          </a:ln>
-        </p:spPr>
-        <p:style>
-          <a:lnRef idx="1">
-            <a:schemeClr val="accent1"/>
-          </a:lnRef>
-          <a:fillRef idx="3">
-            <a:schemeClr val="accent1"/>
-          </a:fillRef>
-          <a:effectRef idx="2">
-            <a:schemeClr val="accent1"/>
-          </a:effectRef>
-          <a:fontRef idx="minor">
-            <a:schemeClr val="lt1"/>
-          </a:fontRef>
-        </p:style>
-        <p:txBody>
-          <a:bodyPr wrap="square" rtlCol="0" anchor="ctr"/>
-          <a:lstStyle/>
-          <a:p>
-            <a:pPr algn="ctr">
-              <a:defRPr sz="1200" b="1">
-                <a:solidFill>
-                  <a:srgbClr val="FFFFFF"/>
-                </a:solidFill>
-              </a:defRPr>
-            </a:pPr>
-            <a:r>
-              <a:t>REPORT · RCA + Reference Sources</a:t>
-            </a:r>
-          </a:p>
-        </p:txBody>
-      </p:sp>
-      <p:cxnSp>
-        <p:nvCxnSpPr>
-          <p:cNvPr id="11" name="Connector 10"/>
-          <p:cNvCxnSpPr/>
-          <p:nvPr/>
-        </p:nvCxnSpPr>
-        <p:spPr>
-          <a:xfrm>
-            <a:off x="9098280" y="1517904"/>
-            <a:ext cx="137160" cy="0"/>
-          </a:xfrm>
-          <a:prstGeom prst="bentConnector3">
-            <a:avLst/>
-          </a:prstGeom>
-          <a:ln w="25400">
-            <a:solidFill>
-              <a:srgbClr val="5A6372"/>
-            </a:solidFill>
-            <a:tailEnd type="triangle"/>
-          </a:ln>
-        </p:spPr>
-        <p:style>
-          <a:lnRef idx="2">
-            <a:schemeClr val="accent1"/>
-          </a:lnRef>
-          <a:fillRef idx="0">
-            <a:schemeClr val="accent1"/>
-          </a:fillRef>
-          <a:effectRef idx="1">
-            <a:schemeClr val="accent1"/>
-          </a:effectRef>
-          <a:fontRef idx="minor">
-            <a:schemeClr val="tx1"/>
-          </a:fontRef>
-        </p:style>
-      </p:cxnSp>
-      <p:sp>
-        <p:nvSpPr>
-          <p:cNvPr id="12" name="Rounded Rectangle 11"/>
-          <p:cNvSpPr/>
-          <p:nvPr/>
-        </p:nvSpPr>
-        <p:spPr>
-          <a:xfrm>
-            <a:off x="457200" y="2286000"/>
-            <a:ext cx="2743200" cy="502920"/>
-          </a:xfrm>
-          <a:prstGeom prst="roundRect">
-            <a:avLst/>
-          </a:prstGeom>
-          <a:solidFill>
-            <a:srgbClr val="5A6372"/>
-          </a:solidFill>
-          <a:ln>
-            <a:solidFill>
-              <a:srgbClr val="FFFFFF"/>
-            </a:solidFill>
-          </a:ln>
-        </p:spPr>
-        <p:style>
-          <a:lnRef idx="1">
-            <a:schemeClr val="accent1"/>
-          </a:lnRef>
-          <a:fillRef idx="3">
-            <a:schemeClr val="accent1"/>
-          </a:fillRef>
-          <a:effectRef idx="2">
-            <a:schemeClr val="accent1"/>
-          </a:effectRef>
-          <a:fontRef idx="minor">
-            <a:schemeClr val="lt1"/>
-          </a:fontRef>
-        </p:style>
-        <p:txBody>
-          <a:bodyPr wrap="square" rtlCol="0" anchor="ctr"/>
-          <a:lstStyle/>
-          <a:p>
-            <a:pPr algn="ctr">
-              <a:defRPr sz="1100" b="1">
-                <a:solidFill>
-                  <a:srgbClr val="FFFFFF"/>
-                </a:solidFill>
-              </a:defRPr>
-            </a:pPr>
-            <a:r>
-              <a:t>Decoders: MCA / EWL / RC-Fatal / MCHECK / POST</a:t>
-            </a:r>
-          </a:p>
-        </p:txBody>
-      </p:sp>
-      <p:sp>
-        <p:nvSpPr>
-          <p:cNvPr id="13" name="Rounded Rectangle 12"/>
-          <p:cNvSpPr/>
-          <p:nvPr/>
-        </p:nvSpPr>
-        <p:spPr>
-          <a:xfrm>
-            <a:off x="3383280" y="2286000"/>
-            <a:ext cx="2743200" cy="502920"/>
-          </a:xfrm>
-          <a:prstGeom prst="roundRect">
-            <a:avLst/>
-          </a:prstGeom>
-          <a:solidFill>
-            <a:srgbClr val="5A6372"/>
-          </a:solidFill>
-          <a:ln>
-            <a:solidFill>
-              <a:srgbClr val="FFFFFF"/>
-            </a:solidFill>
-          </a:ln>
-        </p:spPr>
-        <p:style>
-          <a:lnRef idx="1">
-            <a:schemeClr val="accent1"/>
-          </a:lnRef>
-          <a:fillRef idx="3">
-            <a:schemeClr val="accent1"/>
-          </a:fillRef>
-          <a:effectRef idx="2">
-            <a:schemeClr val="accent1"/>
-          </a:effectRef>
-          <a:fontRef idx="minor">
-            <a:schemeClr val="lt1"/>
-          </a:fontRef>
-        </p:style>
-        <p:txBody>
-          <a:bodyPr wrap="square" rtlCol="0" anchor="ctr"/>
-          <a:lstStyle/>
-          <a:p>
-            <a:pPr algn="ctr">
-              <a:defRPr sz="1100" b="1">
-                <a:solidFill>
-                  <a:srgbClr val="FFFFFF"/>
-                </a:solidFill>
-              </a:defRPr>
-            </a:pPr>
-            <a:r>
-              <a:t>Wiki KB · Geni · Co-Design (always)</a:t>
-            </a:r>
-          </a:p>
-        </p:txBody>
-      </p:sp>
-      <p:sp>
-        <p:nvSpPr>
-          <p:cNvPr id="14" name="Rounded Rectangle 13"/>
-          <p:cNvSpPr/>
-          <p:nvPr/>
-        </p:nvSpPr>
-        <p:spPr>
-          <a:xfrm>
-            <a:off x="6309360" y="2286000"/>
-            <a:ext cx="2743200" cy="502920"/>
-          </a:xfrm>
-          <a:prstGeom prst="roundRect">
-            <a:avLst/>
-          </a:prstGeom>
-          <a:solidFill>
-            <a:srgbClr val="5A6372"/>
-          </a:solidFill>
-          <a:ln>
-            <a:solidFill>
-              <a:srgbClr val="FFFFFF"/>
-            </a:solidFill>
-          </a:ln>
-        </p:spPr>
-        <p:style>
-          <a:lnRef idx="1">
-            <a:schemeClr val="accent1"/>
-          </a:lnRef>
-          <a:fillRef idx="3">
-            <a:schemeClr val="accent1"/>
-          </a:fillRef>
-          <a:effectRef idx="2">
-            <a:schemeClr val="accent1"/>
-          </a:effectRef>
-          <a:fontRef idx="minor">
-            <a:schemeClr val="lt1"/>
-          </a:fontRef>
-        </p:style>
-        <p:txBody>
-          <a:bodyPr wrap="square" rtlCol="0" anchor="ctr"/>
-          <a:lstStyle/>
-          <a:p>
-            <a:pPr algn="ctr">
-              <a:defRPr sz="1100" b="1">
-                <a:solidFill>
-                  <a:srgbClr val="FFFFFF"/>
-                </a:solidFill>
-              </a:defRPr>
-            </a:pPr>
-            <a:r>
-              <a:t>BIOS/S3M · Kernel-crash · Redfish (need-based)</a:t>
-            </a:r>
-          </a:p>
-        </p:txBody>
-      </p:sp>
-      <p:sp>
-        <p:nvSpPr>
-          <p:cNvPr id="15" name="Rounded Rectangle 14"/>
-          <p:cNvSpPr/>
-          <p:nvPr/>
-        </p:nvSpPr>
-        <p:spPr>
-          <a:xfrm>
-            <a:off x="9235440" y="2286000"/>
-            <a:ext cx="2377440" cy="502920"/>
-          </a:xfrm>
-          <a:prstGeom prst="roundRect">
-            <a:avLst/>
-          </a:prstGeom>
-          <a:solidFill>
-            <a:srgbClr val="5A6372"/>
-          </a:solidFill>
-          <a:ln>
-            <a:solidFill>
-              <a:srgbClr val="FFFFFF"/>
-            </a:solidFill>
-          </a:ln>
-        </p:spPr>
-        <p:style>
-          <a:lnRef idx="1">
-            <a:schemeClr val="accent1"/>
-          </a:lnRef>
-          <a:fillRef idx="3">
-            <a:schemeClr val="accent1"/>
-          </a:fillRef>
-          <a:effectRef idx="2">
-            <a:schemeClr val="accent1"/>
-          </a:effectRef>
-          <a:fontRef idx="minor">
-            <a:schemeClr val="lt1"/>
-          </a:fontRef>
-        </p:style>
-        <p:txBody>
-          <a:bodyPr wrap="square" rtlCol="0" anchor="ctr"/>
-          <a:lstStyle/>
-          <a:p>
-            <a:pPr algn="ctr">
-              <a:defRPr sz="1100" b="1">
-                <a:solidFill>
-                  <a:srgbClr val="FFFFFF"/>
-                </a:solidFill>
-              </a:defRPr>
-            </a:pPr>
-            <a:r>
-              <a:t>Axon SVTools recordings</a:t>
-            </a:r>
-          </a:p>
-        </p:txBody>
-      </p:sp>
-      <p:sp>
-        <p:nvSpPr>
-          <p:cNvPr id="16" name="TextBox 15"/>
-          <p:cNvSpPr txBox="1"/>
-          <p:nvPr/>
-        </p:nvSpPr>
-        <p:spPr>
-          <a:xfrm>
-            <a:off x="457200" y="3291840"/>
-            <a:ext cx="11247120" cy="365760"/>
+            <a:off x="640080" y="1371600"/>
+            <a:ext cx="10972800" cy="4937760"/>
           </a:xfrm>
           <a:prstGeom prst="rect">
             <a:avLst/>
@@ -4230,406 +3624,92 @@
           <a:lstStyle/>
           <a:p>
             <a:pPr>
-              <a:defRPr sz="1500" b="1">
-                <a:solidFill>
-                  <a:srgbClr val="1B1B2F"/>
-                </a:solidFill>
-              </a:defRPr>
-            </a:pPr>
-            <a:r>
-              <a:t>PythonSV Live-Debug path (SUT hung / unreachable):</a:t>
-            </a:r>
-          </a:p>
-        </p:txBody>
-      </p:sp>
-      <p:sp>
-        <p:nvSpPr>
-          <p:cNvPr id="17" name="Rounded Rectangle 16"/>
-          <p:cNvSpPr/>
-          <p:nvPr/>
-        </p:nvSpPr>
-        <p:spPr>
-          <a:xfrm>
-            <a:off x="457200" y="3749039"/>
-            <a:ext cx="2651760" cy="640080"/>
-          </a:xfrm>
-          <a:prstGeom prst="roundRect">
-            <a:avLst/>
-          </a:prstGeom>
-          <a:solidFill>
-            <a:srgbClr val="0071C5"/>
-          </a:solidFill>
-          <a:ln>
-            <a:solidFill>
-              <a:srgbClr val="FFFFFF"/>
-            </a:solidFill>
-          </a:ln>
-        </p:spPr>
-        <p:style>
-          <a:lnRef idx="1">
-            <a:schemeClr val="accent1"/>
-          </a:lnRef>
-          <a:fillRef idx="3">
-            <a:schemeClr val="accent1"/>
-          </a:fillRef>
-          <a:effectRef idx="2">
-            <a:schemeClr val="accent1"/>
-          </a:effectRef>
-          <a:fontRef idx="minor">
-            <a:schemeClr val="lt1"/>
-          </a:fontRef>
-        </p:style>
-        <p:txBody>
-          <a:bodyPr wrap="square" rtlCol="0" anchor="ctr"/>
-          <a:lstStyle/>
-          <a:p>
-            <a:pPr algn="ctr">
-              <a:defRPr sz="1200" b="1">
-                <a:solidFill>
-                  <a:srgbClr val="FFFFFF"/>
-                </a:solidFill>
-              </a:defRPr>
-            </a:pPr>
-            <a:r>
-              <a:t>NEXUS server</a:t>
-            </a:r>
-          </a:p>
-        </p:txBody>
-      </p:sp>
-      <p:sp>
-        <p:nvSpPr>
-          <p:cNvPr id="18" name="Rounded Rectangle 17"/>
-          <p:cNvSpPr/>
-          <p:nvPr/>
-        </p:nvSpPr>
-        <p:spPr>
-          <a:xfrm>
-            <a:off x="3246120" y="3749039"/>
-            <a:ext cx="2651760" cy="640080"/>
-          </a:xfrm>
-          <a:prstGeom prst="roundRect">
-            <a:avLst/>
-          </a:prstGeom>
-          <a:solidFill>
-            <a:srgbClr val="B07400"/>
-          </a:solidFill>
-          <a:ln>
-            <a:solidFill>
-              <a:srgbClr val="FFFFFF"/>
-            </a:solidFill>
-          </a:ln>
-        </p:spPr>
-        <p:style>
-          <a:lnRef idx="1">
-            <a:schemeClr val="accent1"/>
-          </a:lnRef>
-          <a:fillRef idx="3">
-            <a:schemeClr val="accent1"/>
-          </a:fillRef>
-          <a:effectRef idx="2">
-            <a:schemeClr val="accent1"/>
-          </a:effectRef>
-          <a:fontRef idx="minor">
-            <a:schemeClr val="lt1"/>
-          </a:fontRef>
-        </p:style>
-        <p:txBody>
-          <a:bodyPr wrap="square" rtlCol="0" anchor="ctr"/>
-          <a:lstStyle/>
-          <a:p>
-            <a:pPr algn="ctr">
-              <a:defRPr sz="1200" b="1">
-                <a:solidFill>
-                  <a:srgbClr val="FFFFFF"/>
-                </a:solidFill>
-              </a:defRPr>
-            </a:pPr>
-            <a:r>
-              <a:t>SSH :22  (WinRM :5985 fallback)</a:t>
-            </a:r>
-          </a:p>
-        </p:txBody>
-      </p:sp>
-      <p:cxnSp>
-        <p:nvCxnSpPr>
-          <p:cNvPr id="19" name="Connector 18"/>
-          <p:cNvCxnSpPr/>
-          <p:nvPr/>
-        </p:nvCxnSpPr>
-        <p:spPr>
-          <a:xfrm>
-            <a:off x="3108960" y="4069079"/>
-            <a:ext cx="137160" cy="0"/>
-          </a:xfrm>
-          <a:prstGeom prst="bentConnector3">
-            <a:avLst/>
-          </a:prstGeom>
-          <a:ln w="25400">
-            <a:solidFill>
-              <a:srgbClr val="5A6372"/>
-            </a:solidFill>
-            <a:tailEnd type="triangle"/>
-          </a:ln>
-        </p:spPr>
-        <p:style>
-          <a:lnRef idx="2">
-            <a:schemeClr val="accent1"/>
-          </a:lnRef>
-          <a:fillRef idx="0">
-            <a:schemeClr val="accent1"/>
-          </a:fillRef>
-          <a:effectRef idx="1">
-            <a:schemeClr val="accent1"/>
-          </a:effectRef>
-          <a:fontRef idx="minor">
-            <a:schemeClr val="tx1"/>
-          </a:fontRef>
-        </p:style>
-      </p:cxnSp>
-      <p:sp>
-        <p:nvSpPr>
-          <p:cNvPr id="20" name="Rounded Rectangle 19"/>
-          <p:cNvSpPr/>
-          <p:nvPr/>
-        </p:nvSpPr>
-        <p:spPr>
-          <a:xfrm>
-            <a:off x="6035040" y="3749039"/>
-            <a:ext cx="2651760" cy="640080"/>
-          </a:xfrm>
-          <a:prstGeom prst="roundRect">
-            <a:avLst/>
-          </a:prstGeom>
-          <a:solidFill>
-            <a:srgbClr val="2E7D32"/>
-          </a:solidFill>
-          <a:ln>
-            <a:solidFill>
-              <a:srgbClr val="FFFFFF"/>
-            </a:solidFill>
-          </a:ln>
-        </p:spPr>
-        <p:style>
-          <a:lnRef idx="1">
-            <a:schemeClr val="accent1"/>
-          </a:lnRef>
-          <a:fillRef idx="3">
-            <a:schemeClr val="accent1"/>
-          </a:fillRef>
-          <a:effectRef idx="2">
-            <a:schemeClr val="accent1"/>
-          </a:effectRef>
-          <a:fontRef idx="minor">
-            <a:schemeClr val="lt1"/>
-          </a:fontRef>
-        </p:style>
-        <p:txBody>
-          <a:bodyPr wrap="square" rtlCol="0" anchor="ctr"/>
-          <a:lstStyle/>
-          <a:p>
-            <a:pPr algn="ctr">
-              <a:defRPr sz="1200" b="1">
-                <a:solidFill>
-                  <a:srgbClr val="FFFFFF"/>
-                </a:solidFill>
-              </a:defRPr>
-            </a:pPr>
-            <a:r>
-              <a:t>Lab NUC · Windows + PythonSV</a:t>
-            </a:r>
-          </a:p>
-        </p:txBody>
-      </p:sp>
-      <p:cxnSp>
-        <p:nvCxnSpPr>
-          <p:cNvPr id="21" name="Connector 20"/>
-          <p:cNvCxnSpPr/>
-          <p:nvPr/>
-        </p:nvCxnSpPr>
-        <p:spPr>
-          <a:xfrm>
-            <a:off x="5897880" y="4069079"/>
-            <a:ext cx="137160" cy="0"/>
-          </a:xfrm>
-          <a:prstGeom prst="bentConnector3">
-            <a:avLst/>
-          </a:prstGeom>
-          <a:ln w="25400">
-            <a:solidFill>
-              <a:srgbClr val="5A6372"/>
-            </a:solidFill>
-            <a:tailEnd type="triangle"/>
-          </a:ln>
-        </p:spPr>
-        <p:style>
-          <a:lnRef idx="2">
-            <a:schemeClr val="accent1"/>
-          </a:lnRef>
-          <a:fillRef idx="0">
-            <a:schemeClr val="accent1"/>
-          </a:fillRef>
-          <a:effectRef idx="1">
-            <a:schemeClr val="accent1"/>
-          </a:effectRef>
-          <a:fontRef idx="minor">
-            <a:schemeClr val="tx1"/>
-          </a:fontRef>
-        </p:style>
-      </p:cxnSp>
-      <p:sp>
-        <p:nvSpPr>
-          <p:cNvPr id="22" name="Rounded Rectangle 21"/>
-          <p:cNvSpPr/>
-          <p:nvPr/>
-        </p:nvSpPr>
-        <p:spPr>
-          <a:xfrm>
-            <a:off x="8823960" y="3749039"/>
-            <a:ext cx="2651760" cy="640080"/>
-          </a:xfrm>
-          <a:prstGeom prst="roundRect">
-            <a:avLst/>
-          </a:prstGeom>
-          <a:solidFill>
-            <a:srgbClr val="1B1B2F"/>
-          </a:solidFill>
-          <a:ln>
-            <a:solidFill>
-              <a:srgbClr val="FFFFFF"/>
-            </a:solidFill>
-          </a:ln>
-        </p:spPr>
-        <p:style>
-          <a:lnRef idx="1">
-            <a:schemeClr val="accent1"/>
-          </a:lnRef>
-          <a:fillRef idx="3">
-            <a:schemeClr val="accent1"/>
-          </a:fillRef>
-          <a:effectRef idx="2">
-            <a:schemeClr val="accent1"/>
-          </a:effectRef>
-          <a:fontRef idx="minor">
-            <a:schemeClr val="lt1"/>
-          </a:fontRef>
-        </p:style>
-        <p:txBody>
-          <a:bodyPr wrap="square" rtlCol="0" anchor="ctr"/>
-          <a:lstStyle/>
-          <a:p>
-            <a:pPr algn="ctr">
-              <a:defRPr sz="1200" b="1">
-                <a:solidFill>
-                  <a:srgbClr val="FFFFFF"/>
-                </a:solidFill>
-              </a:defRPr>
-            </a:pPr>
-            <a:r>
-              <a:t>ITP / sideband -&gt; hung SUT</a:t>
-            </a:r>
-          </a:p>
-        </p:txBody>
-      </p:sp>
-      <p:cxnSp>
-        <p:nvCxnSpPr>
-          <p:cNvPr id="23" name="Connector 22"/>
-          <p:cNvCxnSpPr/>
-          <p:nvPr/>
-        </p:nvCxnSpPr>
-        <p:spPr>
-          <a:xfrm>
-            <a:off x="8686800" y="4069079"/>
-            <a:ext cx="137160" cy="0"/>
-          </a:xfrm>
-          <a:prstGeom prst="bentConnector3">
-            <a:avLst/>
-          </a:prstGeom>
-          <a:ln w="25400">
-            <a:solidFill>
-              <a:srgbClr val="5A6372"/>
-            </a:solidFill>
-            <a:tailEnd type="triangle"/>
-          </a:ln>
-        </p:spPr>
-        <p:style>
-          <a:lnRef idx="2">
-            <a:schemeClr val="accent1"/>
-          </a:lnRef>
-          <a:fillRef idx="0">
-            <a:schemeClr val="accent1"/>
-          </a:fillRef>
-          <a:effectRef idx="1">
-            <a:schemeClr val="accent1"/>
-          </a:effectRef>
-          <a:fontRef idx="minor">
-            <a:schemeClr val="tx1"/>
-          </a:fontRef>
-        </p:style>
-      </p:cxnSp>
-      <p:sp>
-        <p:nvSpPr>
-          <p:cNvPr id="24" name="TextBox 23"/>
-          <p:cNvSpPr txBox="1"/>
-          <p:nvPr/>
-        </p:nvSpPr>
-        <p:spPr>
-          <a:xfrm>
-            <a:off x="457200" y="4663440"/>
-            <a:ext cx="11247120" cy="1920240"/>
-          </a:xfrm>
-          <a:prstGeom prst="rect">
-            <a:avLst/>
-          </a:prstGeom>
-          <a:noFill/>
-        </p:spPr>
-        <p:txBody>
-          <a:bodyPr wrap="square">
-            <a:spAutoFit/>
-          </a:bodyPr>
-          <a:lstStyle/>
-          <a:p>
-            <a:pPr>
               <a:spcAft>
-                <a:spcPts val="600"/>
+                <a:spcPts val="700"/>
               </a:spcAft>
               <a:defRPr sz="1500">
                 <a:solidFill>
-                  <a:srgbClr val="1B1B2F"/>
-                </a:solidFill>
-              </a:defRPr>
-            </a:pPr>
-            <a:r>
-              <a:t>One persistent PythonSV session — imports &amp; IPC state persist across lines.</a:t>
+                  <a:srgbClr val="1B2A4A"/>
+                </a:solidFill>
+              </a:defRPr>
+            </a:pPr>
+            <a:r>
+              <a:t>HSD write-back — posts an executive RCA summary straight into the ticket comment thread (root cause · owner · confidence · evidence · next action); full report saved as HTML/MD. Dry-run + preview first.</a:t>
             </a:r>
           </a:p>
           <a:p>
             <a:pPr>
               <a:spcAft>
-                <a:spcPts val="600"/>
+                <a:spcPts val="700"/>
               </a:spcAft>
               <a:defRPr sz="1500">
                 <a:solidFill>
-                  <a:srgbClr val="1B1B2F"/>
-                </a:solidFill>
-              </a:defRPr>
-            </a:pPr>
-            <a:r>
-              <a:t>Auto-init preamble (ipc.unlock() + sv.refresh()) runs first; output is cleaned; state is auto-interpreted into plain-English notes.</a:t>
+                  <a:srgbClr val="1B2A4A"/>
+                </a:solidFill>
+              </a:defRPr>
+            </a:pPr>
+            <a:r>
+              <a:t>Validation Gate — blocks auto-posting weak conclusions: WORKING HYPOTHESIS, confidence &lt; 70%, unproven owner, OR an unresolved contradiction → draft-only (explicit --force override).</a:t>
             </a:r>
           </a:p>
           <a:p>
             <a:pPr>
               <a:spcAft>
-                <a:spcPts val="600"/>
+                <a:spcPts val="700"/>
               </a:spcAft>
               <a:defRPr sz="1500">
                 <a:solidFill>
-                  <a:srgbClr val="1B1B2F"/>
-                </a:solidFill>
-              </a:defRPr>
-            </a:pPr>
-            <a:r>
-              <a:t>Password entered in UI only — masked, never stored or logged.</a:t>
+                  <a:srgbClr val="1B2A4A"/>
+                </a:solidFill>
+              </a:defRPr>
+            </a:pPr>
+            <a:r>
+              <a:t>Ownership Evidence Ladder — Level 1 direct (first-error / TOR owner) → Level 4 weak (KB similarity), so confidence is explained, not a black box.</a:t>
+            </a:r>
+          </a:p>
+          <a:p>
+            <a:pPr>
+              <a:spcAft>
+                <a:spcPts val="700"/>
+              </a:spcAft>
+              <a:defRPr sz="1500">
+                <a:solidFill>
+                  <a:srgbClr val="1B2A4A"/>
+                </a:solidFill>
+              </a:defRPr>
+            </a:pPr>
+            <a:r>
+              <a:t>Owner → Team routing (suggestion only) — CHA→Uncore, UPI→Fabric, PCIe→PV.Domain.IO, IMC→RAS/Memory, DCU→Core; never auto-reassigns.</a:t>
+            </a:r>
+          </a:p>
+          <a:p>
+            <a:pPr>
+              <a:spcAft>
+                <a:spcPts val="700"/>
+              </a:spcAft>
+              <a:defRPr sz="1500">
+                <a:solidFill>
+                  <a:srgbClr val="1B2A4A"/>
+                </a:solidFill>
+              </a:defRPr>
+            </a:pPr>
+            <a:r>
+              <a:t>Phase 2 AutoHSD triage — parse node from the title → SSH → collect failure-type evidence profiles → run RCA → gate → update; node-down handled gracefully.</a:t>
+            </a:r>
+          </a:p>
+          <a:p>
+            <a:pPr>
+              <a:spcAft>
+                <a:spcPts val="700"/>
+              </a:spcAft>
+              <a:defRPr sz="1500">
+                <a:solidFill>
+                  <a:srgbClr val="1B2A4A"/>
+                </a:solidFill>
+              </a:defRPr>
+            </a:pPr>
+            <a:r>
+              <a:t>RCA Regression Framework — golden_cases/ corpus + tools/rca_benchmark.py scoring owning-IP accuracy, precision/recall, overconfidence, false-attribution, contradiction-miss.</a:t>
             </a:r>
           </a:p>
         </p:txBody>
@@ -4642,8 +3722,8 @@
 </p:sld>
 </file>
 
-<file path=ppt/slides/slide4.xml><?xml version="1.0" encoding="utf-8"?>
-<p:sld xmlns:a="http://schemas.openxmlformats.org/drawingml/2006/main" xmlns:r="http://schemas.openxmlformats.org/officeDocument/2006/relationships" xmlns:p="http://schemas.openxmlformats.org/presentationml/2006/main">
+<file path=ppt/slides/slide13.xml><?xml version="1.0" encoding="utf-8"?>
+<p:sld xmlns:a="http://schemas.openxmlformats.org/drawingml/2006/main" xmlns:p="http://schemas.openxmlformats.org/presentationml/2006/main" xmlns:r="http://schemas.openxmlformats.org/officeDocument/2006/relationships">
   <p:cSld>
     <p:spTree>
       <p:nvGrpSpPr>
@@ -4651,14 +3731,7 @@
         <p:cNvGrpSpPr/>
         <p:nvPr/>
       </p:nvGrpSpPr>
-      <p:grpSpPr>
-        <a:xfrm>
-          <a:off x="0" y="0"/>
-          <a:ext cx="0" cy="0"/>
-          <a:chOff x="0" y="0"/>
-          <a:chExt cx="0" cy="0"/>
-        </a:xfrm>
-      </p:grpSpPr>
+      <p:grpSpPr/>
       <p:sp>
         <p:nvSpPr>
           <p:cNvPr id="2" name="Rectangle 1"/>
@@ -4668,13 +3741,13 @@
         <p:spPr>
           <a:xfrm>
             <a:off x="0" y="0"/>
-            <a:ext cx="12191695" cy="960120"/>
+            <a:ext cx="12191695" cy="1051560"/>
           </a:xfrm>
           <a:prstGeom prst="rect">
             <a:avLst/>
           </a:prstGeom>
           <a:solidFill>
-            <a:srgbClr val="0071C5"/>
+            <a:srgbClr val="1B2A4A"/>
           </a:solidFill>
           <a:ln>
             <a:noFill/>
@@ -4695,7 +3768,7 @@
           </a:fontRef>
         </p:style>
         <p:txBody>
-          <a:bodyPr wrap="square" lIns="365760" rtlCol="0" anchor="ctr"/>
+          <a:bodyPr rtlCol="0" anchor="ctr" lIns="457200" wrap="square"/>
           <a:lstStyle/>
           <a:p>
             <a:pPr algn="ctr">
@@ -4706,1012 +3779,272 @@
               </a:defRPr>
             </a:pPr>
             <a:r>
-              <a:t>New in HSDES NEXUS vs. original BugScout</a:t>
-            </a:r>
-          </a:p>
-        </p:txBody>
-      </p:sp>
-      <p:graphicFrame>
-        <p:nvGraphicFramePr>
-          <p:cNvPr id="3" name="Table 2"/>
-          <p:cNvGraphicFramePr>
-            <a:graphicFrameLocks noGrp="1"/>
-          </p:cNvGraphicFramePr>
+              <a:t>Phase 2 — AutoHSD Triage Engine</a:t>
+            </a:r>
+          </a:p>
+          <a:p>
+            <a:pPr>
+              <a:defRPr sz="1300">
+                <a:solidFill>
+                  <a:srgbClr val="C9D6EA"/>
+                </a:solidFill>
+              </a:defRPr>
+            </a:pPr>
+            <a:r>
+              <a:t>Current focus: one-liner HSD → live node triage</a:t>
+            </a:r>
+          </a:p>
+        </p:txBody>
+      </p:sp>
+      <p:sp>
+        <p:nvSpPr>
+          <p:cNvPr id="3" name="Rounded Rectangle 2"/>
+          <p:cNvSpPr/>
           <p:nvPr/>
-        </p:nvGraphicFramePr>
-        <p:xfrm>
-          <a:off x="365760" y="1143000"/>
-          <a:ext cx="11430000" cy="5394960"/>
-        </p:xfrm>
-        <a:graphic>
-          <a:graphicData uri="http://schemas.openxmlformats.org/drawingml/2006/table">
-            <a:tbl>
-              <a:tblPr firstRow="1" bandRow="1">
-                <a:tableStyleId>{5C22544A-7EE6-4342-B048-85BDC9FD1C3A}</a:tableStyleId>
-              </a:tblPr>
-              <a:tblGrid>
-                <a:gridCol w="1920240">
-                  <a:extLst>
-                    <a:ext uri="{9D8B030D-6E8A-4147-A177-3AD203B41FA5}">
-                      <a16:colId xmlns:a16="http://schemas.microsoft.com/office/drawing/2014/main" val="20000"/>
-                    </a:ext>
-                  </a:extLst>
-                </a:gridCol>
-                <a:gridCol w="3383280">
-                  <a:extLst>
-                    <a:ext uri="{9D8B030D-6E8A-4147-A177-3AD203B41FA5}">
-                      <a16:colId xmlns:a16="http://schemas.microsoft.com/office/drawing/2014/main" val="20001"/>
-                    </a:ext>
-                  </a:extLst>
-                </a:gridCol>
-                <a:gridCol w="6126480">
-                  <a:extLst>
-                    <a:ext uri="{9D8B030D-6E8A-4147-A177-3AD203B41FA5}">
-                      <a16:colId xmlns:a16="http://schemas.microsoft.com/office/drawing/2014/main" val="20002"/>
-                    </a:ext>
-                  </a:extLst>
-                </a:gridCol>
-              </a:tblGrid>
-              <a:tr h="449580">
-                <a:tc>
-                  <a:txBody>
-                    <a:bodyPr/>
-                    <a:lstStyle/>
-                    <a:p>
-                      <a:pPr>
-                        <a:defRPr sz="1300" b="1">
-                          <a:solidFill>
-                            <a:srgbClr val="FFFFFF"/>
-                          </a:solidFill>
-                        </a:defRPr>
-                      </a:pPr>
-                      <a:r>
-                        <a:t>Area</a:t>
-                      </a:r>
-                    </a:p>
-                  </a:txBody>
-                  <a:tcPr>
-                    <a:solidFill>
-                      <a:srgbClr val="0071C5"/>
-                    </a:solidFill>
-                  </a:tcPr>
-                </a:tc>
-                <a:tc>
-                  <a:txBody>
-                    <a:bodyPr/>
-                    <a:lstStyle/>
-                    <a:p>
-                      <a:pPr>
-                        <a:defRPr sz="1300" b="1">
-                          <a:solidFill>
-                            <a:srgbClr val="FFFFFF"/>
-                          </a:solidFill>
-                        </a:defRPr>
-                      </a:pPr>
-                      <a:r>
-                        <a:t>Original BugScout</a:t>
-                      </a:r>
-                    </a:p>
-                  </a:txBody>
-                  <a:tcPr>
-                    <a:solidFill>
-                      <a:srgbClr val="0071C5"/>
-                    </a:solidFill>
-                  </a:tcPr>
-                </a:tc>
-                <a:tc>
-                  <a:txBody>
-                    <a:bodyPr/>
-                    <a:lstStyle/>
-                    <a:p>
-                      <a:pPr>
-                        <a:defRPr sz="1300" b="1">
-                          <a:solidFill>
-                            <a:srgbClr val="FFFFFF"/>
-                          </a:solidFill>
-                        </a:defRPr>
-                      </a:pPr>
-                      <a:r>
-                        <a:t>New in HSDES NEXUS</a:t>
-                      </a:r>
-                    </a:p>
-                  </a:txBody>
-                  <a:tcPr>
-                    <a:solidFill>
-                      <a:srgbClr val="0071C5"/>
-                    </a:solidFill>
-                  </a:tcPr>
-                </a:tc>
-                <a:extLst>
-                  <a:ext uri="{0D108BD9-81ED-4DB2-BD59-A6C34878D82A}">
-                    <a16:rowId xmlns:a16="http://schemas.microsoft.com/office/drawing/2014/main" val="10000"/>
-                  </a:ext>
-                </a:extLst>
-              </a:tr>
-              <a:tr h="449580">
-                <a:tc>
-                  <a:txBody>
-                    <a:bodyPr/>
-                    <a:lstStyle/>
-                    <a:p>
-                      <a:pPr>
-                        <a:defRPr sz="1200" b="0">
-                          <a:solidFill>
-                            <a:srgbClr val="1B1B2F"/>
-                          </a:solidFill>
-                        </a:defRPr>
-                      </a:pPr>
-                      <a:r>
-                        <a:t>Packaging</a:t>
-                      </a:r>
-                    </a:p>
-                  </a:txBody>
-                  <a:tcPr>
-                    <a:solidFill>
-                      <a:srgbClr val="F2F6FB"/>
-                    </a:solidFill>
-                  </a:tcPr>
-                </a:tc>
-                <a:tc>
-                  <a:txBody>
-                    <a:bodyPr/>
-                    <a:lstStyle/>
-                    <a:p>
-                      <a:pPr>
-                        <a:defRPr sz="1200" b="0">
-                          <a:solidFill>
-                            <a:srgbClr val="1B1B2F"/>
-                          </a:solidFill>
-                        </a:defRPr>
-                      </a:pPr>
-                      <a:r>
-                        <a:t>Copilot CLI skills</a:t>
-                      </a:r>
-                    </a:p>
-                  </a:txBody>
-                  <a:tcPr>
-                    <a:solidFill>
-                      <a:srgbClr val="F2F6FB"/>
-                    </a:solidFill>
-                  </a:tcPr>
-                </a:tc>
-                <a:tc>
-                  <a:txBody>
-                    <a:bodyPr/>
-                    <a:lstStyle/>
-                    <a:p>
-                      <a:pPr>
-                        <a:defRPr sz="1200" b="0">
-                          <a:solidFill>
-                            <a:srgbClr val="1B1B2F"/>
-                          </a:solidFill>
-                        </a:defRPr>
-                      </a:pPr>
-                      <a:r>
-                        <a:t>Single FastAPI web app + unified CLI (skills retained)</a:t>
-                      </a:r>
-                    </a:p>
-                  </a:txBody>
-                  <a:tcPr>
-                    <a:solidFill>
-                      <a:srgbClr val="F2F6FB"/>
-                    </a:solidFill>
-                  </a:tcPr>
-                </a:tc>
-                <a:extLst>
-                  <a:ext uri="{0D108BD9-81ED-4DB2-BD59-A6C34878D82A}">
-                    <a16:rowId xmlns:a16="http://schemas.microsoft.com/office/drawing/2014/main" val="10001"/>
-                  </a:ext>
-                </a:extLst>
-              </a:tr>
-              <a:tr h="449580">
-                <a:tc>
-                  <a:txBody>
-                    <a:bodyPr/>
-                    <a:lstStyle/>
-                    <a:p>
-                      <a:pPr>
-                        <a:defRPr sz="1200" b="0">
-                          <a:solidFill>
-                            <a:srgbClr val="1B1B2F"/>
-                          </a:solidFill>
-                        </a:defRPr>
-                      </a:pPr>
-                      <a:r>
-                        <a:t>Log decode</a:t>
-                      </a:r>
-                    </a:p>
-                  </a:txBody>
-                  <a:tcPr>
-                    <a:solidFill>
-                      <a:srgbClr val="FFFFFF"/>
-                    </a:solidFill>
-                  </a:tcPr>
-                </a:tc>
-                <a:tc>
-                  <a:txBody>
-                    <a:bodyPr/>
-                    <a:lstStyle/>
-                    <a:p>
-                      <a:pPr>
-                        <a:defRPr sz="1200" b="0">
-                          <a:solidFill>
-                            <a:srgbClr val="1B1B2F"/>
-                          </a:solidFill>
-                        </a:defRPr>
-                      </a:pPr>
-                      <a:r>
-                        <a:t>crash-parser</a:t>
-                      </a:r>
-                    </a:p>
-                  </a:txBody>
-                  <a:tcPr>
-                    <a:solidFill>
-                      <a:srgbClr val="FFFFFF"/>
-                    </a:solidFill>
-                  </a:tcPr>
-                </a:tc>
-                <a:tc>
-                  <a:txBody>
-                    <a:bodyPr/>
-                    <a:lstStyle/>
-                    <a:p>
-                      <a:pPr>
-                        <a:defRPr sz="1200" b="0">
-                          <a:solidFill>
-                            <a:srgbClr val="1B1B2F"/>
-                          </a:solidFill>
-                        </a:defRPr>
-                      </a:pPr>
-                      <a:r>
-                        <a:rPr dirty="0"/>
-                        <a:t>MCA / EWL / RC-Fatal / MCHECK / POST decoder DBs</a:t>
-                      </a:r>
-                    </a:p>
-                  </a:txBody>
-                  <a:tcPr>
-                    <a:solidFill>
-                      <a:srgbClr val="FFFFFF"/>
-                    </a:solidFill>
-                  </a:tcPr>
-                </a:tc>
-                <a:extLst>
-                  <a:ext uri="{0D108BD9-81ED-4DB2-BD59-A6C34878D82A}">
-                    <a16:rowId xmlns:a16="http://schemas.microsoft.com/office/drawing/2014/main" val="10002"/>
-                  </a:ext>
-                </a:extLst>
-              </a:tr>
-              <a:tr h="449580">
-                <a:tc>
-                  <a:txBody>
-                    <a:bodyPr/>
-                    <a:lstStyle/>
-                    <a:p>
-                      <a:pPr>
-                        <a:defRPr sz="1200" b="0">
-                          <a:solidFill>
-                            <a:srgbClr val="1B1B2F"/>
-                          </a:solidFill>
-                        </a:defRPr>
-                      </a:pPr>
-                      <a:r>
-                        <a:t>Sources</a:t>
-                      </a:r>
-                    </a:p>
-                  </a:txBody>
-                  <a:tcPr>
-                    <a:solidFill>
-                      <a:srgbClr val="F2F6FB"/>
-                    </a:solidFill>
-                  </a:tcPr>
-                </a:tc>
-                <a:tc>
-                  <a:txBody>
-                    <a:bodyPr/>
-                    <a:lstStyle/>
-                    <a:p>
-                      <a:pPr>
-                        <a:defRPr sz="1200" b="0">
-                          <a:solidFill>
-                            <a:srgbClr val="1B1B2F"/>
-                          </a:solidFill>
-                        </a:defRPr>
-                      </a:pPr>
-                      <a:r>
-                        <a:t>—</a:t>
-                      </a:r>
-                    </a:p>
-                  </a:txBody>
-                  <a:tcPr>
-                    <a:solidFill>
-                      <a:srgbClr val="F2F6FB"/>
-                    </a:solidFill>
-                  </a:tcPr>
-                </a:tc>
-                <a:tc>
-                  <a:txBody>
-                    <a:bodyPr/>
-                    <a:lstStyle/>
-                    <a:p>
-                      <a:pPr>
-                        <a:defRPr sz="1200" b="0">
-                          <a:solidFill>
-                            <a:srgbClr val="1B1B2F"/>
-                          </a:solidFill>
-                        </a:defRPr>
-                      </a:pPr>
-                      <a:r>
-                        <a:t>Reference Sources table — cites every source used</a:t>
-                      </a:r>
-                    </a:p>
-                  </a:txBody>
-                  <a:tcPr>
-                    <a:solidFill>
-                      <a:srgbClr val="F2F6FB"/>
-                    </a:solidFill>
-                  </a:tcPr>
-                </a:tc>
-                <a:extLst>
-                  <a:ext uri="{0D108BD9-81ED-4DB2-BD59-A6C34878D82A}">
-                    <a16:rowId xmlns:a16="http://schemas.microsoft.com/office/drawing/2014/main" val="10003"/>
-                  </a:ext>
-                </a:extLst>
-              </a:tr>
-              <a:tr h="449580">
-                <a:tc>
-                  <a:txBody>
-                    <a:bodyPr/>
-                    <a:lstStyle/>
-                    <a:p>
-                      <a:pPr>
-                        <a:defRPr sz="1200" b="0">
-                          <a:solidFill>
-                            <a:srgbClr val="1B1B2F"/>
-                          </a:solidFill>
-                        </a:defRPr>
-                      </a:pPr>
-                      <a:r>
-                        <a:t>Marketplace</a:t>
-                      </a:r>
-                    </a:p>
-                  </a:txBody>
-                  <a:tcPr>
-                    <a:solidFill>
-                      <a:srgbClr val="FFFFFF"/>
-                    </a:solidFill>
-                  </a:tcPr>
-                </a:tc>
-                <a:tc>
-                  <a:txBody>
-                    <a:bodyPr/>
-                    <a:lstStyle/>
-                    <a:p>
-                      <a:pPr>
-                        <a:defRPr sz="1200" b="0">
-                          <a:solidFill>
-                            <a:srgbClr val="1B1B2F"/>
-                          </a:solidFill>
-                        </a:defRPr>
-                      </a:pPr>
-                      <a:r>
-                        <a:t>—</a:t>
-                      </a:r>
-                    </a:p>
-                  </a:txBody>
-                  <a:tcPr>
-                    <a:solidFill>
-                      <a:srgbClr val="FFFFFF"/>
-                    </a:solidFill>
-                  </a:tcPr>
-                </a:tc>
-                <a:tc>
-                  <a:txBody>
-                    <a:bodyPr/>
-                    <a:lstStyle/>
-                    <a:p>
-                      <a:pPr>
-                        <a:defRPr sz="1200" b="0">
-                          <a:solidFill>
-                            <a:srgbClr val="1B1B2F"/>
-                          </a:solidFill>
-                        </a:defRPr>
-                      </a:pPr>
-                      <a:r>
-                        <a:rPr dirty="0"/>
-                        <a:t>Wiki KB (always) + BIOS/S3M, Kernel-crash, Redfish (need-based)</a:t>
-                      </a:r>
-                    </a:p>
-                  </a:txBody>
-                  <a:tcPr>
-                    <a:solidFill>
-                      <a:srgbClr val="FFFFFF"/>
-                    </a:solidFill>
-                  </a:tcPr>
-                </a:tc>
-                <a:extLst>
-                  <a:ext uri="{0D108BD9-81ED-4DB2-BD59-A6C34878D82A}">
-                    <a16:rowId xmlns:a16="http://schemas.microsoft.com/office/drawing/2014/main" val="10004"/>
-                  </a:ext>
-                </a:extLst>
-              </a:tr>
-              <a:tr h="449580">
-                <a:tc>
-                  <a:txBody>
-                    <a:bodyPr/>
-                    <a:lstStyle/>
-                    <a:p>
-                      <a:pPr>
-                        <a:defRPr sz="1200" b="0">
-                          <a:solidFill>
-                            <a:srgbClr val="1B1B2F"/>
-                          </a:solidFill>
-                        </a:defRPr>
-                      </a:pPr>
-                      <a:r>
-                        <a:t>Live debug</a:t>
-                      </a:r>
-                    </a:p>
-                  </a:txBody>
-                  <a:tcPr>
-                    <a:solidFill>
-                      <a:srgbClr val="F2F6FB"/>
-                    </a:solidFill>
-                  </a:tcPr>
-                </a:tc>
-                <a:tc>
-                  <a:txBody>
-                    <a:bodyPr/>
-                    <a:lstStyle/>
-                    <a:p>
-                      <a:pPr>
-                        <a:defRPr sz="1200" b="0">
-                          <a:solidFill>
-                            <a:srgbClr val="1B1B2F"/>
-                          </a:solidFill>
-                        </a:defRPr>
-                      </a:pPr>
-                      <a:r>
-                        <a:t>SSH to SUT only</a:t>
-                      </a:r>
-                    </a:p>
-                  </a:txBody>
-                  <a:tcPr>
-                    <a:solidFill>
-                      <a:srgbClr val="F2F6FB"/>
-                    </a:solidFill>
-                  </a:tcPr>
-                </a:tc>
-                <a:tc>
-                  <a:txBody>
-                    <a:bodyPr/>
-                    <a:lstStyle/>
-                    <a:p>
-                      <a:pPr>
-                        <a:defRPr sz="1200" b="0">
-                          <a:solidFill>
-                            <a:srgbClr val="1B1B2F"/>
-                          </a:solidFill>
-                        </a:defRPr>
-                      </a:pPr>
-                      <a:r>
-                        <a:rPr dirty="0"/>
-                        <a:t>NUC </a:t>
-                      </a:r>
-                      <a:r>
-                        <a:rPr dirty="0" err="1"/>
-                        <a:t>PythonSV</a:t>
-                      </a:r>
-                      <a:r>
-                        <a:rPr dirty="0"/>
-                        <a:t> bridge — out-of-band when SUT is hung</a:t>
-                      </a:r>
-                    </a:p>
-                  </a:txBody>
-                  <a:tcPr>
-                    <a:solidFill>
-                      <a:srgbClr val="F2F6FB"/>
-                    </a:solidFill>
-                  </a:tcPr>
-                </a:tc>
-                <a:extLst>
-                  <a:ext uri="{0D108BD9-81ED-4DB2-BD59-A6C34878D82A}">
-                    <a16:rowId xmlns:a16="http://schemas.microsoft.com/office/drawing/2014/main" val="10005"/>
-                  </a:ext>
-                </a:extLst>
-              </a:tr>
-              <a:tr h="449580">
-                <a:tc>
-                  <a:txBody>
-                    <a:bodyPr/>
-                    <a:lstStyle/>
-                    <a:p>
-                      <a:pPr>
-                        <a:defRPr sz="1200" b="0">
-                          <a:solidFill>
-                            <a:srgbClr val="1B1B2F"/>
-                          </a:solidFill>
-                        </a:defRPr>
-                      </a:pPr>
-                      <a:r>
-                        <a:t>Transport</a:t>
-                      </a:r>
-                    </a:p>
-                  </a:txBody>
-                  <a:tcPr>
-                    <a:solidFill>
-                      <a:srgbClr val="FFFFFF"/>
-                    </a:solidFill>
-                  </a:tcPr>
-                </a:tc>
-                <a:tc>
-                  <a:txBody>
-                    <a:bodyPr/>
-                    <a:lstStyle/>
-                    <a:p>
-                      <a:pPr>
-                        <a:defRPr sz="1200" b="0">
-                          <a:solidFill>
-                            <a:srgbClr val="1B1B2F"/>
-                          </a:solidFill>
-                        </a:defRPr>
-                      </a:pPr>
-                      <a:r>
-                        <a:t>SSH</a:t>
-                      </a:r>
-                    </a:p>
-                  </a:txBody>
-                  <a:tcPr>
-                    <a:solidFill>
-                      <a:srgbClr val="FFFFFF"/>
-                    </a:solidFill>
-                  </a:tcPr>
-                </a:tc>
-                <a:tc>
-                  <a:txBody>
-                    <a:bodyPr/>
-                    <a:lstStyle/>
-                    <a:p>
-                      <a:pPr>
-                        <a:defRPr sz="1200" b="0">
-                          <a:solidFill>
-                            <a:srgbClr val="1B1B2F"/>
-                          </a:solidFill>
-                        </a:defRPr>
-                      </a:pPr>
-                      <a:r>
-                        <a:rPr dirty="0"/>
-                        <a:t>SSH-first + </a:t>
-                      </a:r>
-                      <a:r>
-                        <a:rPr dirty="0" err="1"/>
-                        <a:t>WinRM</a:t>
-                      </a:r>
-                      <a:r>
-                        <a:rPr dirty="0"/>
-                        <a:t> fallback + setup popup</a:t>
-                      </a:r>
-                    </a:p>
-                  </a:txBody>
-                  <a:tcPr>
-                    <a:solidFill>
-                      <a:srgbClr val="FFFFFF"/>
-                    </a:solidFill>
-                  </a:tcPr>
-                </a:tc>
-                <a:extLst>
-                  <a:ext uri="{0D108BD9-81ED-4DB2-BD59-A6C34878D82A}">
-                    <a16:rowId xmlns:a16="http://schemas.microsoft.com/office/drawing/2014/main" val="10006"/>
-                  </a:ext>
-                </a:extLst>
-              </a:tr>
-              <a:tr h="449580">
-                <a:tc>
-                  <a:txBody>
-                    <a:bodyPr/>
-                    <a:lstStyle/>
-                    <a:p>
-                      <a:pPr>
-                        <a:defRPr sz="1200" b="0">
-                          <a:solidFill>
-                            <a:srgbClr val="1B1B2F"/>
-                          </a:solidFill>
-                        </a:defRPr>
-                      </a:pPr>
-                      <a:r>
-                        <a:t>Secrets</a:t>
-                      </a:r>
-                    </a:p>
-                  </a:txBody>
-                  <a:tcPr>
-                    <a:solidFill>
-                      <a:srgbClr val="F2F6FB"/>
-                    </a:solidFill>
-                  </a:tcPr>
-                </a:tc>
-                <a:tc>
-                  <a:txBody>
-                    <a:bodyPr/>
-                    <a:lstStyle/>
-                    <a:p>
-                      <a:pPr>
-                        <a:defRPr sz="1200" b="0">
-                          <a:solidFill>
-                            <a:srgbClr val="1B1B2F"/>
-                          </a:solidFill>
-                        </a:defRPr>
-                      </a:pPr>
-                      <a:r>
-                        <a:rPr dirty="0"/>
-                        <a:t>SSH keys</a:t>
-                      </a:r>
-                    </a:p>
-                  </a:txBody>
-                  <a:tcPr>
-                    <a:solidFill>
-                      <a:srgbClr val="F2F6FB"/>
-                    </a:solidFill>
-                  </a:tcPr>
-                </a:tc>
-                <a:tc>
-                  <a:txBody>
-                    <a:bodyPr/>
-                    <a:lstStyle/>
-                    <a:p>
-                      <a:pPr>
-                        <a:defRPr sz="1200" b="0">
-                          <a:solidFill>
-                            <a:srgbClr val="1B1B2F"/>
-                          </a:solidFill>
-                        </a:defRPr>
-                      </a:pPr>
-                      <a:r>
-                        <a:rPr dirty="0"/>
-                        <a:t>UI password, masked, never stored; user auto-normalized</a:t>
-                      </a:r>
-                    </a:p>
-                  </a:txBody>
-                  <a:tcPr>
-                    <a:solidFill>
-                      <a:srgbClr val="F2F6FB"/>
-                    </a:solidFill>
-                  </a:tcPr>
-                </a:tc>
-                <a:extLst>
-                  <a:ext uri="{0D108BD9-81ED-4DB2-BD59-A6C34878D82A}">
-                    <a16:rowId xmlns:a16="http://schemas.microsoft.com/office/drawing/2014/main" val="10007"/>
-                  </a:ext>
-                </a:extLst>
-              </a:tr>
-              <a:tr h="449580">
-                <a:tc>
-                  <a:txBody>
-                    <a:bodyPr/>
-                    <a:lstStyle/>
-                    <a:p>
-                      <a:pPr>
-                        <a:defRPr sz="1200" b="0">
-                          <a:solidFill>
-                            <a:srgbClr val="1B1B2F"/>
-                          </a:solidFill>
-                        </a:defRPr>
-                      </a:pPr>
-                      <a:r>
-                        <a:t>Session</a:t>
-                      </a:r>
-                    </a:p>
-                  </a:txBody>
-                  <a:tcPr>
-                    <a:solidFill>
-                      <a:srgbClr val="FFFFFF"/>
-                    </a:solidFill>
-                  </a:tcPr>
-                </a:tc>
-                <a:tc>
-                  <a:txBody>
-                    <a:bodyPr/>
-                    <a:lstStyle/>
-                    <a:p>
-                      <a:pPr>
-                        <a:defRPr sz="1200" b="0">
-                          <a:solidFill>
-                            <a:srgbClr val="1B1B2F"/>
-                          </a:solidFill>
-                        </a:defRPr>
-                      </a:pPr>
-                      <a:r>
-                        <a:rPr dirty="0"/>
-                        <a:t>one command</a:t>
-                      </a:r>
-                    </a:p>
-                  </a:txBody>
-                  <a:tcPr>
-                    <a:solidFill>
-                      <a:srgbClr val="FFFFFF"/>
-                    </a:solidFill>
-                  </a:tcPr>
-                </a:tc>
-                <a:tc>
-                  <a:txBody>
-                    <a:bodyPr/>
-                    <a:lstStyle/>
-                    <a:p>
-                      <a:pPr>
-                        <a:defRPr sz="1200" b="0">
-                          <a:solidFill>
-                            <a:srgbClr val="1B1B2F"/>
-                          </a:solidFill>
-                        </a:defRPr>
-                      </a:pPr>
-                      <a:r>
-                        <a:rPr dirty="0"/>
-                        <a:t>Persistent </a:t>
-                      </a:r>
-                      <a:r>
-                        <a:rPr dirty="0" err="1"/>
-                        <a:t>PythonSV</a:t>
-                      </a:r>
-                      <a:r>
-                        <a:rPr dirty="0"/>
-                        <a:t> session (imports/IPC persist)</a:t>
-                      </a:r>
-                    </a:p>
-                  </a:txBody>
-                  <a:tcPr>
-                    <a:solidFill>
-                      <a:srgbClr val="FFFFFF"/>
-                    </a:solidFill>
-                  </a:tcPr>
-                </a:tc>
-                <a:extLst>
-                  <a:ext uri="{0D108BD9-81ED-4DB2-BD59-A6C34878D82A}">
-                    <a16:rowId xmlns:a16="http://schemas.microsoft.com/office/drawing/2014/main" val="10008"/>
-                  </a:ext>
-                </a:extLst>
-              </a:tr>
-              <a:tr h="449580">
-                <a:tc>
-                  <a:txBody>
-                    <a:bodyPr/>
-                    <a:lstStyle/>
-                    <a:p>
-                      <a:pPr>
-                        <a:defRPr sz="1200" b="0">
-                          <a:solidFill>
-                            <a:srgbClr val="1B1B2F"/>
-                          </a:solidFill>
-                        </a:defRPr>
-                      </a:pPr>
-                      <a:r>
-                        <a:t>Auto-fix</a:t>
-                      </a:r>
-                    </a:p>
-                  </a:txBody>
-                  <a:tcPr>
-                    <a:solidFill>
-                      <a:srgbClr val="F2F6FB"/>
-                    </a:solidFill>
-                  </a:tcPr>
-                </a:tc>
-                <a:tc>
-                  <a:txBody>
-                    <a:bodyPr/>
-                    <a:lstStyle/>
-                    <a:p>
-                      <a:pPr>
-                        <a:defRPr sz="1200" b="0">
-                          <a:solidFill>
-                            <a:srgbClr val="1B1B2F"/>
-                          </a:solidFill>
-                        </a:defRPr>
-                      </a:pPr>
-                      <a:r>
-                        <a:t>—</a:t>
-                      </a:r>
-                    </a:p>
-                  </a:txBody>
-                  <a:tcPr>
-                    <a:solidFill>
-                      <a:srgbClr val="F2F6FB"/>
-                    </a:solidFill>
-                  </a:tcPr>
-                </a:tc>
-                <a:tc>
-                  <a:txBody>
-                    <a:bodyPr/>
-                    <a:lstStyle/>
-                    <a:p>
-                      <a:pPr>
-                        <a:defRPr sz="1200" b="0">
-                          <a:solidFill>
-                            <a:srgbClr val="1B1B2F"/>
-                          </a:solidFill>
-                        </a:defRPr>
-                      </a:pPr>
-                      <a:r>
-                        <a:rPr dirty="0"/>
-                        <a:t>Auto-</a:t>
-                      </a:r>
-                      <a:r>
-                        <a:rPr dirty="0" err="1"/>
-                        <a:t>init</a:t>
-                      </a:r>
-                      <a:r>
-                        <a:rPr dirty="0"/>
-                        <a:t> unlock + refresh; skippable</a:t>
-                      </a:r>
-                    </a:p>
-                  </a:txBody>
-                  <a:tcPr>
-                    <a:solidFill>
-                      <a:srgbClr val="F2F6FB"/>
-                    </a:solidFill>
-                  </a:tcPr>
-                </a:tc>
-                <a:extLst>
-                  <a:ext uri="{0D108BD9-81ED-4DB2-BD59-A6C34878D82A}">
-                    <a16:rowId xmlns:a16="http://schemas.microsoft.com/office/drawing/2014/main" val="10009"/>
-                  </a:ext>
-                </a:extLst>
-              </a:tr>
-              <a:tr h="449580">
-                <a:tc>
-                  <a:txBody>
-                    <a:bodyPr/>
-                    <a:lstStyle/>
-                    <a:p>
-                      <a:pPr>
-                        <a:defRPr sz="1200" b="0">
-                          <a:solidFill>
-                            <a:srgbClr val="1B1B2F"/>
-                          </a:solidFill>
-                        </a:defRPr>
-                      </a:pPr>
-                      <a:r>
-                        <a:t>Readability</a:t>
-                      </a:r>
-                    </a:p>
-                  </a:txBody>
-                  <a:tcPr>
-                    <a:solidFill>
-                      <a:srgbClr val="FFFFFF"/>
-                    </a:solidFill>
-                  </a:tcPr>
-                </a:tc>
-                <a:tc>
-                  <a:txBody>
-                    <a:bodyPr/>
-                    <a:lstStyle/>
-                    <a:p>
-                      <a:pPr>
-                        <a:defRPr sz="1200" b="0">
-                          <a:solidFill>
-                            <a:srgbClr val="1B1B2F"/>
-                          </a:solidFill>
-                        </a:defRPr>
-                      </a:pPr>
-                      <a:r>
-                        <a:rPr dirty="0"/>
-                        <a:t>raw dump</a:t>
-                      </a:r>
-                    </a:p>
-                  </a:txBody>
-                  <a:tcPr>
-                    <a:solidFill>
-                      <a:srgbClr val="FFFFFF"/>
-                    </a:solidFill>
-                  </a:tcPr>
-                </a:tc>
-                <a:tc>
-                  <a:txBody>
-                    <a:bodyPr/>
-                    <a:lstStyle/>
-                    <a:p>
-                      <a:pPr>
-                        <a:defRPr sz="1200" b="0">
-                          <a:solidFill>
-                            <a:srgbClr val="1B1B2F"/>
-                          </a:solidFill>
-                        </a:defRPr>
-                      </a:pPr>
-                      <a:r>
-                        <a:rPr dirty="0"/>
-                        <a:t>Output cleaner + state interpreter notes</a:t>
-                      </a:r>
-                    </a:p>
-                  </a:txBody>
-                  <a:tcPr>
-                    <a:solidFill>
-                      <a:srgbClr val="FFFFFF"/>
-                    </a:solidFill>
-                  </a:tcPr>
-                </a:tc>
-                <a:extLst>
-                  <a:ext uri="{0D108BD9-81ED-4DB2-BD59-A6C34878D82A}">
-                    <a16:rowId xmlns:a16="http://schemas.microsoft.com/office/drawing/2014/main" val="10010"/>
-                  </a:ext>
-                </a:extLst>
-              </a:tr>
-              <a:tr h="449580">
-                <a:tc>
-                  <a:txBody>
-                    <a:bodyPr/>
-                    <a:lstStyle/>
-                    <a:p>
-                      <a:pPr>
-                        <a:defRPr sz="1200" b="0">
-                          <a:solidFill>
-                            <a:srgbClr val="1B1B2F"/>
-                          </a:solidFill>
-                        </a:defRPr>
-                      </a:pPr>
-                      <a:r>
-                        <a:t>Validation</a:t>
-                      </a:r>
-                    </a:p>
-                  </a:txBody>
-                  <a:tcPr>
-                    <a:solidFill>
-                      <a:srgbClr val="F2F6FB"/>
-                    </a:solidFill>
-                  </a:tcPr>
-                </a:tc>
-                <a:tc>
-                  <a:txBody>
-                    <a:bodyPr/>
-                    <a:lstStyle/>
-                    <a:p>
-                      <a:pPr>
-                        <a:defRPr sz="1200" b="0">
-                          <a:solidFill>
-                            <a:srgbClr val="1B1B2F"/>
-                          </a:solidFill>
-                        </a:defRPr>
-                      </a:pPr>
-                      <a:r>
-                        <a:t>—</a:t>
-                      </a:r>
-                    </a:p>
-                  </a:txBody>
-                  <a:tcPr>
-                    <a:solidFill>
-                      <a:srgbClr val="F2F6FB"/>
-                    </a:solidFill>
-                  </a:tcPr>
-                </a:tc>
-                <a:tc>
-                  <a:txBody>
-                    <a:bodyPr/>
-                    <a:lstStyle/>
-                    <a:p>
-                      <a:pPr>
-                        <a:defRPr sz="1200" b="0">
-                          <a:solidFill>
-                            <a:srgbClr val="1B1B2F"/>
-                          </a:solidFill>
-                        </a:defRPr>
-                      </a:pPr>
-                      <a:r>
-                        <a:rPr dirty="0"/>
-                        <a:t>Unified smoke test (15 checks)</a:t>
-                      </a:r>
-                    </a:p>
-                  </a:txBody>
-                  <a:tcPr>
-                    <a:solidFill>
-                      <a:srgbClr val="F2F6FB"/>
-                    </a:solidFill>
-                  </a:tcPr>
-                </a:tc>
-                <a:extLst>
-                  <a:ext uri="{0D108BD9-81ED-4DB2-BD59-A6C34878D82A}">
-                    <a16:rowId xmlns:a16="http://schemas.microsoft.com/office/drawing/2014/main" val="10011"/>
-                  </a:ext>
-                </a:extLst>
-              </a:tr>
-            </a:tbl>
-          </a:graphicData>
-        </a:graphic>
-      </p:graphicFrame>
+        </p:nvSpPr>
+        <p:spPr>
+          <a:xfrm>
+            <a:off x="502920" y="1554480"/>
+            <a:ext cx="5394960" cy="4297680"/>
+          </a:xfrm>
+          <a:prstGeom prst="roundRect">
+            <a:avLst/>
+          </a:prstGeom>
+          <a:solidFill>
+            <a:srgbClr val="F2F6FB"/>
+          </a:solidFill>
+          <a:ln w="19050">
+            <a:solidFill>
+              <a:srgbClr val="0068B5"/>
+            </a:solidFill>
+          </a:ln>
+        </p:spPr>
+        <p:style>
+          <a:lnRef idx="1">
+            <a:schemeClr val="accent1"/>
+          </a:lnRef>
+          <a:fillRef idx="3">
+            <a:schemeClr val="accent1"/>
+          </a:fillRef>
+          <a:effectRef idx="2">
+            <a:schemeClr val="accent1"/>
+          </a:effectRef>
+          <a:fontRef idx="minor">
+            <a:schemeClr val="lt1"/>
+          </a:fontRef>
+        </p:style>
+        <p:txBody>
+          <a:bodyPr rtlCol="0" anchor="ctr" wrap="square" lIns="256032" rIns="201168" tIns="201168"/>
+          <a:lstStyle/>
+          <a:p>
+            <a:pPr algn="ctr">
+              <a:spcAft>
+                <a:spcPts val="600"/>
+              </a:spcAft>
+              <a:defRPr sz="1800" b="1">
+                <a:solidFill>
+                  <a:srgbClr val="0068B5"/>
+                </a:solidFill>
+              </a:defRPr>
+            </a:pPr>
+            <a:r>
+              <a:t>Flow</a:t>
+            </a:r>
+          </a:p>
+          <a:p>
+            <a:pPr>
+              <a:spcBef>
+                <a:spcPts val="700"/>
+              </a:spcBef>
+              <a:defRPr sz="1450">
+                <a:solidFill>
+                  <a:srgbClr val="445566"/>
+                </a:solidFill>
+              </a:defRPr>
+            </a:pPr>
+            <a:r>
+              <a:t>•  New HSD created → parse title → classify failure type.</a:t>
+            </a:r>
+          </a:p>
+          <a:p>
+            <a:pPr>
+              <a:spcBef>
+                <a:spcPts val="700"/>
+              </a:spcBef>
+              <a:defRPr sz="1450">
+                <a:solidFill>
+                  <a:srgbClr val="445566"/>
+                </a:solidFill>
+              </a:defRPr>
+            </a:pPr>
+            <a:r>
+              <a:t>•  Kernel Panic · PCIe/CXL · TOR Timeout · Memory Poison · Hardware Error.</a:t>
+            </a:r>
+          </a:p>
+          <a:p>
+            <a:pPr>
+              <a:spcBef>
+                <a:spcPts val="700"/>
+              </a:spcBef>
+              <a:defRPr sz="1450">
+                <a:solidFill>
+                  <a:srgbClr val="445566"/>
+                </a:solidFill>
+              </a:defRPr>
+            </a:pPr>
+            <a:r>
+              <a:t>•  Node reachability check (SSH) — up or down.</a:t>
+            </a:r>
+          </a:p>
+          <a:p>
+            <a:pPr>
+              <a:spcBef>
+                <a:spcPts val="700"/>
+              </a:spcBef>
+              <a:defRPr sz="1450">
+                <a:solidFill>
+                  <a:srgbClr val="445566"/>
+                </a:solidFill>
+              </a:defRPr>
+            </a:pPr>
+            <a:r>
+              <a:t>•  Node up → collect profile logs → run NEXUS RCA → validation gate.</a:t>
+            </a:r>
+          </a:p>
+          <a:p>
+            <a:pPr>
+              <a:spcBef>
+                <a:spcPts val="700"/>
+              </a:spcBef>
+              <a:defRPr sz="1450">
+                <a:solidFill>
+                  <a:srgbClr val="445566"/>
+                </a:solidFill>
+              </a:defRPr>
+            </a:pPr>
+            <a:r>
+              <a:t>•  Gate PASS → auto-update HSD · DRAFT → store RCA for review.</a:t>
+            </a:r>
+          </a:p>
+        </p:txBody>
+      </p:sp>
+      <p:sp>
+        <p:nvSpPr>
+          <p:cNvPr id="4" name="Rounded Rectangle 3"/>
+          <p:cNvSpPr/>
+          <p:nvPr/>
+        </p:nvSpPr>
+        <p:spPr>
+          <a:xfrm>
+            <a:off x="6309360" y="1554480"/>
+            <a:ext cx="5394960" cy="4297680"/>
+          </a:xfrm>
+          <a:prstGeom prst="roundRect">
+            <a:avLst/>
+          </a:prstGeom>
+          <a:solidFill>
+            <a:srgbClr val="F2F6FB"/>
+          </a:solidFill>
+          <a:ln w="19050">
+            <a:solidFill>
+              <a:srgbClr val="00857D"/>
+            </a:solidFill>
+          </a:ln>
+        </p:spPr>
+        <p:style>
+          <a:lnRef idx="1">
+            <a:schemeClr val="accent1"/>
+          </a:lnRef>
+          <a:fillRef idx="3">
+            <a:schemeClr val="accent1"/>
+          </a:fillRef>
+          <a:effectRef idx="2">
+            <a:schemeClr val="accent1"/>
+          </a:effectRef>
+          <a:fontRef idx="minor">
+            <a:schemeClr val="lt1"/>
+          </a:fontRef>
+        </p:style>
+        <p:txBody>
+          <a:bodyPr rtlCol="0" anchor="ctr" wrap="square" lIns="256032" rIns="201168" tIns="201168"/>
+          <a:lstStyle/>
+          <a:p>
+            <a:pPr algn="ctr">
+              <a:spcAft>
+                <a:spcPts val="600"/>
+              </a:spcAft>
+              <a:defRPr sz="1800" b="1">
+                <a:solidFill>
+                  <a:srgbClr val="00857D"/>
+                </a:solidFill>
+              </a:defRPr>
+            </a:pPr>
+            <a:r>
+              <a:t>Safety &amp; efficiency</a:t>
+            </a:r>
+          </a:p>
+          <a:p>
+            <a:pPr>
+              <a:spcBef>
+                <a:spcPts val="700"/>
+              </a:spcBef>
+              <a:defRPr sz="1450">
+                <a:solidFill>
+                  <a:srgbClr val="445566"/>
+                </a:solidFill>
+              </a:defRPr>
+            </a:pPr>
+            <a:r>
+              <a:t>•  Node down → post 'Node unreachable, analysis not possible' (no empty report).</a:t>
+            </a:r>
+          </a:p>
+          <a:p>
+            <a:pPr>
+              <a:spcBef>
+                <a:spcPts val="700"/>
+              </a:spcBef>
+              <a:defRPr sz="1450">
+                <a:solidFill>
+                  <a:srgbClr val="445566"/>
+                </a:solidFill>
+              </a:defRPr>
+            </a:pPr>
+            <a:r>
+              <a:t>•  Evidence profiles collect only artifacts relevant to the failure type.</a:t>
+            </a:r>
+          </a:p>
+          <a:p>
+            <a:pPr>
+              <a:spcBef>
+                <a:spcPts val="700"/>
+              </a:spcBef>
+              <a:defRPr sz="1450">
+                <a:solidFill>
+                  <a:srgbClr val="445566"/>
+                </a:solidFill>
+              </a:defRPr>
+            </a:pPr>
+            <a:r>
+              <a:t>•  Secrets (SSH) read from environment only — never logged or committed.</a:t>
+            </a:r>
+          </a:p>
+          <a:p>
+            <a:pPr>
+              <a:spcBef>
+                <a:spcPts val="700"/>
+              </a:spcBef>
+              <a:defRPr sz="1450">
+                <a:solidFill>
+                  <a:srgbClr val="445566"/>
+                </a:solidFill>
+              </a:defRPr>
+            </a:pPr>
+            <a:r>
+              <a:t>•  Weak / contradicted RCA never auto-posts — stays a draft.</a:t>
+            </a:r>
+          </a:p>
+        </p:txBody>
+      </p:sp>
     </p:spTree>
   </p:cSld>
   <p:clrMapOvr>
@@ -5720,8 +4053,8 @@
 </p:sld>
 </file>
 
-<file path=ppt/slides/slide5.xml><?xml version="1.0" encoding="utf-8"?>
-<p:sld xmlns:a="http://schemas.openxmlformats.org/drawingml/2006/main" xmlns:r="http://schemas.openxmlformats.org/officeDocument/2006/relationships" xmlns:p="http://schemas.openxmlformats.org/presentationml/2006/main">
+<file path=ppt/slides/slide14.xml><?xml version="1.0" encoding="utf-8"?>
+<p:sld xmlns:a="http://schemas.openxmlformats.org/drawingml/2006/main" xmlns:p="http://schemas.openxmlformats.org/presentationml/2006/main" xmlns:r="http://schemas.openxmlformats.org/officeDocument/2006/relationships">
   <p:cSld>
     <p:spTree>
       <p:nvGrpSpPr>
@@ -5729,14 +4062,7 @@
         <p:cNvGrpSpPr/>
         <p:nvPr/>
       </p:nvGrpSpPr>
-      <p:grpSpPr>
-        <a:xfrm>
-          <a:off x="0" y="0"/>
-          <a:ext cx="0" cy="0"/>
-          <a:chOff x="0" y="0"/>
-          <a:chExt cx="0" cy="0"/>
-        </a:xfrm>
-      </p:grpSpPr>
+      <p:grpSpPr/>
       <p:sp>
         <p:nvSpPr>
           <p:cNvPr id="2" name="Rectangle 1"/>
@@ -5746,13 +4072,13 @@
         <p:spPr>
           <a:xfrm>
             <a:off x="0" y="0"/>
-            <a:ext cx="12191695" cy="960120"/>
+            <a:ext cx="12191695" cy="1051560"/>
           </a:xfrm>
           <a:prstGeom prst="rect">
             <a:avLst/>
           </a:prstGeom>
           <a:solidFill>
-            <a:srgbClr val="0071C5"/>
+            <a:srgbClr val="1B2A4A"/>
           </a:solidFill>
           <a:ln>
             <a:noFill/>
@@ -5773,7 +4099,7 @@
           </a:fontRef>
         </p:style>
         <p:txBody>
-          <a:bodyPr wrap="square" lIns="365760" rtlCol="0" anchor="ctr"/>
+          <a:bodyPr rtlCol="0" anchor="ctr" lIns="457200" wrap="square"/>
           <a:lstStyle/>
           <a:p>
             <a:pPr algn="ctr">
@@ -5784,19 +4110,19 @@
               </a:defRPr>
             </a:pPr>
             <a:r>
-              <a:t>Feature spotlight — PythonSV Live Debug via NUC</a:t>
-            </a:r>
-          </a:p>
-          <a:p>
-            <a:pPr>
-              <a:defRPr sz="1400">
-                <a:solidFill>
-                  <a:srgbClr val="DCEBFA"/>
-                </a:solidFill>
-              </a:defRPr>
-            </a:pPr>
-            <a:r>
-              <a:t>Debug a hung node when SSH to the SUT is impossible</a:t>
+              <a:t>Anticipated Questions (1 of 2)</a:t>
+            </a:r>
+          </a:p>
+          <a:p>
+            <a:pPr>
+              <a:defRPr sz="1300">
+                <a:solidFill>
+                  <a:srgbClr val="C9D6EA"/>
+                </a:solidFill>
+              </a:defRPr>
+            </a:pPr>
+            <a:r>
+              <a:t>Prepared answers for the demo</a:t>
             </a:r>
           </a:p>
         </p:txBody>
@@ -5809,8 +4135,8 @@
         </p:nvSpPr>
         <p:spPr>
           <a:xfrm>
-            <a:off x="548640" y="1280160"/>
-            <a:ext cx="11064240" cy="5212080"/>
+            <a:off x="640080" y="1325880"/>
+            <a:ext cx="10972800" cy="5120640"/>
           </a:xfrm>
           <a:prstGeom prst="rect">
             <a:avLst/>
@@ -5824,107 +4150,53 @@
           <a:lstStyle/>
           <a:p>
             <a:pPr>
+              <a:spcBef>
+                <a:spcPts val="600"/>
+              </a:spcBef>
               <a:spcAft>
-                <a:spcPts val="600"/>
+                <a:spcPts val="200"/>
               </a:spcAft>
-              <a:defRPr sz="1600">
-                <a:solidFill>
-                  <a:srgbClr val="1B1B2F"/>
-                </a:solidFill>
-              </a:defRPr>
-            </a:pPr>
-            <a:r>
-              <a:t>Problem: when the SUT is hung/failed, you cannot SSH in to run live debug.</a:t>
-            </a:r>
-          </a:p>
-          <a:p>
-            <a:pPr>
-              <a:spcAft>
-                <a:spcPts val="600"/>
-              </a:spcAft>
-              <a:defRPr sz="1600">
-                <a:solidFill>
-                  <a:srgbClr val="1B1B2F"/>
-                </a:solidFill>
-              </a:defRPr>
-            </a:pPr>
-            <a:r>
-              <a:t>Solution: connect to the bench NUC (Windows + PythonSV) that keeps ITP/sideband access to the SUT.</a:t>
-            </a:r>
-          </a:p>
-          <a:p>
-            <a:pPr>
-              <a:spcAft>
-                <a:spcPts val="600"/>
-              </a:spcAft>
-              <a:defRPr sz="1600">
-                <a:solidFill>
-                  <a:srgbClr val="1B1B2F"/>
-                </a:solidFill>
-              </a:defRPr>
-            </a:pPr>
-            <a:r>
-              <a:t>Dual transport: tries SSH first, falls back to WinRM; if neither is ready, a popup shows the one-time WinRM setup.</a:t>
-            </a:r>
-          </a:p>
-          <a:p>
-            <a:pPr>
-              <a:spcAft>
-                <a:spcPts val="600"/>
-              </a:spcAft>
-              <a:defRPr sz="1600">
-                <a:solidFill>
-                  <a:srgbClr val="1B1B2F"/>
-                </a:solidFill>
-              </a:defRPr>
-            </a:pPr>
-            <a:r>
-              <a:t>Dedicated PythonSV tab: enter NUC host/user/password (masked), Connect / Probe verifies host + C:\pythonsv.</a:t>
-            </a:r>
-          </a:p>
-          <a:p>
-            <a:pPr>
-              <a:spcAft>
-                <a:spcPts val="600"/>
-              </a:spcAft>
-              <a:defRPr sz="1600">
-                <a:solidFill>
-                  <a:srgbClr val="1B1B2F"/>
-                </a:solidFill>
-              </a:defRPr>
-            </a:pPr>
-            <a:r>
-              <a:t>Runs your commands in ONE persistent session so `sv`, `ipc`, and imports stay alive across lines.</a:t>
-            </a:r>
-          </a:p>
-          <a:p>
-            <a:pPr>
-              <a:spcAft>
-                <a:spcPts val="600"/>
-              </a:spcAft>
-              <a:defRPr sz="1600">
-                <a:solidFill>
-                  <a:srgbClr val="1B1B2F"/>
-                </a:solidFill>
-              </a:defRPr>
-            </a:pPr>
-            <a:r>
-              <a:t>Auto-detects &amp; explains PythonSV states:</a:t>
-            </a:r>
-          </a:p>
-          <a:p>
-            <a:pPr lvl="1">
+              <a:defRPr sz="1500" b="1">
+                <a:solidFill>
+                  <a:srgbClr val="0068B5"/>
+                </a:solidFill>
+              </a:defRPr>
+            </a:pPr>
+            <a:r>
+              <a:t>Q:  Does any Intel data leave the network / go to an external AI?</a:t>
+            </a:r>
+          </a:p>
+          <a:p>
+            <a:pPr>
               <a:spcAft>
                 <a:spcPts val="600"/>
               </a:spcAft>
               <a:defRPr sz="1400">
                 <a:solidFill>
-                  <a:srgbClr val="1B1B2F"/>
-                </a:solidFill>
-              </a:defRPr>
-            </a:pPr>
-            <a:r>
-              <a:t>part LOCKED -&gt; auto ipc.unlock(); NOT out of reset; pcode bring-up not started; undefined helper; missing module; SUT no-ping.</a:t>
+                  <a:srgbClr val="445566"/>
+                </a:solidFill>
+              </a:defRPr>
+            </a:pPr>
+            <a:r>
+              <a:t>A:  No. It runs locally on your Intel-domain machine and talks only to HSDES. LLM reasoning is optional and off by default — the demo runs in deterministic OFFLINE mode.</a:t>
+            </a:r>
+          </a:p>
+          <a:p>
+            <a:pPr>
+              <a:spcBef>
+                <a:spcPts val="600"/>
+              </a:spcBef>
+              <a:spcAft>
+                <a:spcPts val="200"/>
+              </a:spcAft>
+              <a:defRPr sz="1500" b="1">
+                <a:solidFill>
+                  <a:srgbClr val="0068B5"/>
+                </a:solidFill>
+              </a:defRPr>
+            </a:pPr>
+            <a:r>
+              <a:t>Q:  How secure is authentication?</a:t>
             </a:r>
           </a:p>
           <a:p>
@@ -5932,14 +4204,80 @@
               <a:spcAft>
                 <a:spcPts val="600"/>
               </a:spcAft>
-              <a:defRPr sz="1600">
-                <a:solidFill>
-                  <a:srgbClr val="1B1B2F"/>
-                </a:solidFill>
-              </a:defRPr>
-            </a:pPr>
-            <a:r>
-              <a:t>Output is cleaned (EOL banner, version table, per-IP init noise removed) and annotated with readable Notes.</a:t>
+              <a:defRPr sz="1400">
+                <a:solidFill>
+                  <a:srgbClr val="445566"/>
+                </a:solidFill>
+              </a:defRPr>
+            </a:pPr>
+            <a:r>
+              <a:t>A:  Kerberos SSO — it authenticates as you, with no password and no stored token. Any teammate on the Intel domain can run it as themselves.</a:t>
+            </a:r>
+          </a:p>
+          <a:p>
+            <a:pPr>
+              <a:spcBef>
+                <a:spcPts val="600"/>
+              </a:spcBef>
+              <a:spcAft>
+                <a:spcPts val="200"/>
+              </a:spcAft>
+              <a:defRPr sz="1500" b="1">
+                <a:solidFill>
+                  <a:srgbClr val="0068B5"/>
+                </a:solidFill>
+              </a:defRPr>
+            </a:pPr>
+            <a:r>
+              <a:t>Q:  Can we trust the root cause it reports?</a:t>
+            </a:r>
+          </a:p>
+          <a:p>
+            <a:pPr>
+              <a:spcAft>
+                <a:spcPts val="600"/>
+              </a:spcAft>
+              <a:defRPr sz="1400">
+                <a:solidFill>
+                  <a:srgbClr val="445566"/>
+                </a:solidFill>
+              </a:defRPr>
+            </a:pPr>
+            <a:r>
+              <a:t>A:  Yes — it doesn't guess. It repeats the root cause the engineers actually wrote in the ticket, cites who said it, and labels how proven it is (e.g. 'unvalidated hypothesis' vs 'confirmed'). If no cause is stated, it says so instead of inventing one.</a:t>
+            </a:r>
+          </a:p>
+          <a:p>
+            <a:pPr>
+              <a:spcBef>
+                <a:spcPts val="600"/>
+              </a:spcBef>
+              <a:spcAft>
+                <a:spcPts val="200"/>
+              </a:spcAft>
+              <a:defRPr sz="1500" b="1">
+                <a:solidFill>
+                  <a:srgbClr val="0068B5"/>
+                </a:solidFill>
+              </a:defRPr>
+            </a:pPr>
+            <a:r>
+              <a:t>Q:  Does it modify or close the HSD ticket?</a:t>
+            </a:r>
+          </a:p>
+          <a:p>
+            <a:pPr>
+              <a:spcAft>
+                <a:spcPts val="600"/>
+              </a:spcAft>
+              <a:defRPr sz="1400">
+                <a:solidFill>
+                  <a:srgbClr val="445566"/>
+                </a:solidFill>
+              </a:defRPr>
+            </a:pPr>
+            <a:r>
+              <a:t>A:  It posts an executive RCA summary as a ticket comment (opt-in) — it never closes or overwrites fields. A validation gate blocks weak/contradicted conclusions, which stay drafts until reviewed.</a:t>
             </a:r>
           </a:p>
         </p:txBody>
@@ -5952,8 +4290,8 @@
 </p:sld>
 </file>
 
-<file path=ppt/slides/slide6.xml><?xml version="1.0" encoding="utf-8"?>
-<p:sld xmlns:a="http://schemas.openxmlformats.org/drawingml/2006/main" xmlns:r="http://schemas.openxmlformats.org/officeDocument/2006/relationships" xmlns:p="http://schemas.openxmlformats.org/presentationml/2006/main">
+<file path=ppt/slides/slide15.xml><?xml version="1.0" encoding="utf-8"?>
+<p:sld xmlns:a="http://schemas.openxmlformats.org/drawingml/2006/main" xmlns:p="http://schemas.openxmlformats.org/presentationml/2006/main" xmlns:r="http://schemas.openxmlformats.org/officeDocument/2006/relationships">
   <p:cSld>
     <p:spTree>
       <p:nvGrpSpPr>
@@ -5961,14 +4299,7 @@
         <p:cNvGrpSpPr/>
         <p:nvPr/>
       </p:nvGrpSpPr>
-      <p:grpSpPr>
-        <a:xfrm>
-          <a:off x="0" y="0"/>
-          <a:ext cx="0" cy="0"/>
-          <a:chOff x="0" y="0"/>
-          <a:chExt cx="0" cy="0"/>
-        </a:xfrm>
-      </p:grpSpPr>
+      <p:grpSpPr/>
       <p:sp>
         <p:nvSpPr>
           <p:cNvPr id="2" name="Rectangle 1"/>
@@ -5978,13 +4309,13 @@
         <p:spPr>
           <a:xfrm>
             <a:off x="0" y="0"/>
-            <a:ext cx="12191695" cy="960120"/>
+            <a:ext cx="12191695" cy="1051560"/>
           </a:xfrm>
           <a:prstGeom prst="rect">
             <a:avLst/>
           </a:prstGeom>
           <a:solidFill>
-            <a:srgbClr val="0071C5"/>
+            <a:srgbClr val="1B2A4A"/>
           </a:solidFill>
           <a:ln>
             <a:noFill/>
@@ -6005,7 +4336,7 @@
           </a:fontRef>
         </p:style>
         <p:txBody>
-          <a:bodyPr wrap="square" lIns="365760" rtlCol="0" anchor="ctr"/>
+          <a:bodyPr rtlCol="0" anchor="ctr" lIns="457200" wrap="square"/>
           <a:lstStyle/>
           <a:p>
             <a:pPr algn="ctr">
@@ -6016,7 +4347,19 @@
               </a:defRPr>
             </a:pPr>
             <a:r>
-              <a:t>Security, and current status</a:t>
+              <a:t>Anticipated Questions (2 of 2)</a:t>
+            </a:r>
+          </a:p>
+          <a:p>
+            <a:pPr>
+              <a:defRPr sz="1300">
+                <a:solidFill>
+                  <a:srgbClr val="C9D6EA"/>
+                </a:solidFill>
+              </a:defRPr>
+            </a:pPr>
+            <a:r>
+              <a:t>Prepared answers for the demo</a:t>
             </a:r>
           </a:p>
         </p:txBody>
@@ -6029,8 +4372,8 @@
         </p:nvSpPr>
         <p:spPr>
           <a:xfrm>
-            <a:off x="548640" y="1280160"/>
-            <a:ext cx="11064240" cy="5120640"/>
+            <a:off x="640080" y="1325880"/>
+            <a:ext cx="10972800" cy="5120640"/>
           </a:xfrm>
           <a:prstGeom prst="rect">
             <a:avLst/>
@@ -6044,18 +4387,53 @@
           <a:lstStyle/>
           <a:p>
             <a:pPr>
+              <a:spcBef>
+                <a:spcPts val="600"/>
+              </a:spcBef>
+              <a:spcAft>
+                <a:spcPts val="200"/>
+              </a:spcAft>
+              <a:defRPr sz="1400" b="1">
+                <a:solidFill>
+                  <a:srgbClr val="0068B5"/>
+                </a:solidFill>
+              </a:defRPr>
+            </a:pPr>
+            <a:r>
+              <a:t>Q:  How does it separate the real failure from log noise?</a:t>
+            </a:r>
+          </a:p>
+          <a:p>
+            <a:pPr>
               <a:spcAft>
                 <a:spcPts val="600"/>
               </a:spcAft>
-              <a:defRPr sz="1800">
-                <a:solidFill>
-                  <a:srgbClr val="1B1B2F"/>
-                </a:solidFill>
-              </a:defRPr>
-            </a:pPr>
-            <a:r>
-              <a:rPr dirty="0"/>
-              <a:t>Secrets: NUC password used only for the connection — masked in all output, never written to disk or logs.</a:t>
+              <a:defRPr sz="1300">
+                <a:solidFill>
+                  <a:srgbClr val="445566"/>
+                </a:solidFill>
+              </a:defRPr>
+            </a:pPr>
+            <a:r>
+              <a:t>A:  When the comment thread has converged on a cause, broad signatures (WHEA / MCA / PCIe) are explicitly flagged as incidental background telemetry, so the real failure leads.</a:t>
+            </a:r>
+          </a:p>
+          <a:p>
+            <a:pPr>
+              <a:spcBef>
+                <a:spcPts val="600"/>
+              </a:spcBef>
+              <a:spcAft>
+                <a:spcPts val="200"/>
+              </a:spcAft>
+              <a:defRPr sz="1400" b="1">
+                <a:solidFill>
+                  <a:srgbClr val="0068B5"/>
+                </a:solidFill>
+              </a:defRPr>
+            </a:pPr>
+            <a:r>
+              <a:t>Q:  What if the comments are thin or missing?</a:t>
             </a:r>
           </a:p>
           <a:p>
@@ -6063,15 +4441,32 @@
               <a:spcAft>
                 <a:spcPts val="600"/>
               </a:spcAft>
-              <a:defRPr sz="1800">
-                <a:solidFill>
-                  <a:srgbClr val="1B1B2F"/>
-                </a:solidFill>
-              </a:defRPr>
-            </a:pPr>
-            <a:r>
-              <a:rPr dirty="0"/>
-              <a:t>Enrichment sources are OFF unless configured; failures are skipped and never block core analysis.</a:t>
+              <a:defRPr sz="1300">
+                <a:solidFill>
+                  <a:srgbClr val="445566"/>
+                </a:solidFill>
+              </a:defRPr>
+            </a:pPr>
+            <a:r>
+              <a:t>A:  It falls back to decoded log evidence, boot/stage progress, MCA/BIOS/POST decode, and Knowledge-Base recall of similar past HSDs — you still get a structured triage.</a:t>
+            </a:r>
+          </a:p>
+          <a:p>
+            <a:pPr>
+              <a:spcBef>
+                <a:spcPts val="600"/>
+              </a:spcBef>
+              <a:spcAft>
+                <a:spcPts val="200"/>
+              </a:spcAft>
+              <a:defRPr sz="1400" b="1">
+                <a:solidFill>
+                  <a:srgbClr val="0068B5"/>
+                </a:solidFill>
+              </a:defRPr>
+            </a:pPr>
+            <a:r>
+              <a:t>Q:  How long does a ticket take, and what does it cost?</a:t>
             </a:r>
           </a:p>
           <a:p>
@@ -6079,15 +4474,32 @@
               <a:spcAft>
                 <a:spcPts val="600"/>
               </a:spcAft>
-              <a:defRPr sz="1800">
-                <a:solidFill>
-                  <a:srgbClr val="1B1B2F"/>
-                </a:solidFill>
-              </a:defRPr>
-            </a:pPr>
-            <a:r>
-              <a:rPr dirty="0"/>
-              <a:t>Kerberos SSO to HSDES (no token/password) for on-domain users.</a:t>
+              <a:defRPr sz="1300">
+                <a:solidFill>
+                  <a:srgbClr val="445566"/>
+                </a:solidFill>
+              </a:defRPr>
+            </a:pPr>
+            <a:r>
+              <a:t>A:  Seconds to a couple of minutes per ticket versus hours by hand. It uses only open-source Python libraries and runs on your existing machine — no new licensing.</a:t>
+            </a:r>
+          </a:p>
+          <a:p>
+            <a:pPr>
+              <a:spcBef>
+                <a:spcPts val="600"/>
+              </a:spcBef>
+              <a:spcAft>
+                <a:spcPts val="200"/>
+              </a:spcAft>
+              <a:defRPr sz="1400" b="1">
+                <a:solidFill>
+                  <a:srgbClr val="0068B5"/>
+                </a:solidFill>
+              </a:defRPr>
+            </a:pPr>
+            <a:r>
+              <a:t>Q:  Which platforms and domains are covered?</a:t>
             </a:r>
           </a:p>
           <a:p>
@@ -6095,15 +4507,32 @@
               <a:spcAft>
                 <a:spcPts val="600"/>
               </a:spcAft>
-              <a:defRPr sz="1800">
-                <a:solidFill>
-                  <a:srgbClr val="1B1B2F"/>
-                </a:solidFill>
-              </a:defRPr>
-            </a:pPr>
-            <a:r>
-              <a:rPr dirty="0"/>
-              <a:t>Validated live: SSH connect + persistent session confirmed against a real 2S GNR NUC; part unlocked, 37 IPs enumerated.</a:t>
+              <a:defRPr sz="1300">
+                <a:solidFill>
+                  <a:srgbClr val="445566"/>
+                </a:solidFill>
+              </a:defRPr>
+            </a:pPr>
+            <a:r>
+              <a:t>A:  Server platforms today (GNR / SRF / CWF) across RAS/MCA, UPI, memory, PCIe/CXL, power, BIOS/IFWI/BMC, OS/driver; DMR / COR are ready to add.</a:t>
+            </a:r>
+          </a:p>
+          <a:p>
+            <a:pPr>
+              <a:spcBef>
+                <a:spcPts val="600"/>
+              </a:spcBef>
+              <a:spcAft>
+                <a:spcPts val="200"/>
+              </a:spcAft>
+              <a:defRPr sz="1400" b="1">
+                <a:solidFill>
+                  <a:srgbClr val="0068B5"/>
+                </a:solidFill>
+              </a:defRPr>
+            </a:pPr>
+            <a:r>
+              <a:t>Q:  How does the 'learning' work?</a:t>
             </a:r>
           </a:p>
           <a:p>
@@ -6111,53 +4540,89 @@
               <a:spcAft>
                 <a:spcPts val="600"/>
               </a:spcAft>
-              <a:defRPr sz="1800">
-                <a:solidFill>
-                  <a:srgbClr val="1B1B2F"/>
-                </a:solidFill>
-              </a:defRPr>
-            </a:pPr>
-            <a:r>
-              <a:rPr dirty="0"/>
-              <a:t>Unified smoke test: 15 / 15 passing.</a:t>
-            </a:r>
-          </a:p>
-          <a:p>
-            <a:pPr>
-              <a:spcAft>
-                <a:spcPts val="600"/>
-              </a:spcAft>
-              <a:defRPr sz="1800">
-                <a:solidFill>
-                  <a:srgbClr val="1B1B2F"/>
-                </a:solidFill>
-              </a:defRPr>
-            </a:pPr>
-            <a:r>
-              <a:rPr dirty="0"/>
-              <a:t>Published to intel-sandbox/</a:t>
-            </a:r>
-            <a:r>
-              <a:rPr dirty="0" err="1"/>
-              <a:t>BugScout</a:t>
-            </a:r>
-            <a:r>
-              <a:rPr dirty="0"/>
-              <a:t> (PR) and mirrored to the personal repo.</a:t>
-            </a:r>
-          </a:p>
-        </p:txBody>
-      </p:sp>
-      <p:sp>
-        <p:nvSpPr>
-          <p:cNvPr id="4" name="TextBox 3"/>
+              <a:defRPr sz="1300">
+                <a:solidFill>
+                  <a:srgbClr val="445566"/>
+                </a:solidFill>
+              </a:defRPr>
+            </a:pPr>
+            <a:r>
+              <a:t>A:  Every analysed ticket is written into a local self-learning Knowledge Base, so recall of similar issues and their fixes improves over time.</a:t>
+            </a:r>
+          </a:p>
+        </p:txBody>
+      </p:sp>
+    </p:spTree>
+  </p:cSld>
+  <p:clrMapOvr>
+    <a:masterClrMapping/>
+  </p:clrMapOvr>
+</p:sld>
+</file>
+
+<file path=ppt/slides/slide16.xml><?xml version="1.0" encoding="utf-8"?>
+<p:sld xmlns:a="http://schemas.openxmlformats.org/drawingml/2006/main" xmlns:p="http://schemas.openxmlformats.org/presentationml/2006/main" xmlns:r="http://schemas.openxmlformats.org/officeDocument/2006/relationships">
+  <p:cSld>
+    <p:spTree>
+      <p:nvGrpSpPr>
+        <p:cNvPr id="1" name=""/>
+        <p:cNvGrpSpPr/>
+        <p:nvPr/>
+      </p:nvGrpSpPr>
+      <p:grpSpPr/>
+      <p:sp>
+        <p:nvSpPr>
+          <p:cNvPr id="2" name="Rectangle 1"/>
+          <p:cNvSpPr/>
+          <p:nvPr/>
+        </p:nvSpPr>
+        <p:spPr>
+          <a:xfrm>
+            <a:off x="0" y="0"/>
+            <a:ext cx="12191695" cy="6858000"/>
+          </a:xfrm>
+          <a:prstGeom prst="rect">
+            <a:avLst/>
+          </a:prstGeom>
+          <a:solidFill>
+            <a:srgbClr val="1B2A4A"/>
+          </a:solidFill>
+          <a:ln>
+            <a:noFill/>
+          </a:ln>
+        </p:spPr>
+        <p:style>
+          <a:lnRef idx="1">
+            <a:schemeClr val="accent1"/>
+          </a:lnRef>
+          <a:fillRef idx="3">
+            <a:schemeClr val="accent1"/>
+          </a:fillRef>
+          <a:effectRef idx="2">
+            <a:schemeClr val="accent1"/>
+          </a:effectRef>
+          <a:fontRef idx="minor">
+            <a:schemeClr val="lt1"/>
+          </a:fontRef>
+        </p:style>
+        <p:txBody>
+          <a:bodyPr rtlCol="0" anchor="ctr"/>
+          <a:lstStyle/>
+          <a:p>
+            <a:pPr algn="ctr"/>
+          </a:p>
+        </p:txBody>
+      </p:sp>
+      <p:sp>
+        <p:nvSpPr>
+          <p:cNvPr id="3" name="TextBox 2"/>
           <p:cNvSpPr txBox="1"/>
           <p:nvPr/>
         </p:nvSpPr>
         <p:spPr>
           <a:xfrm>
-            <a:off x="548640" y="5852160"/>
-            <a:ext cx="10972800" cy="640080"/>
+            <a:off x="731520" y="2743200"/>
+            <a:ext cx="10698480" cy="1463040"/>
           </a:xfrm>
           <a:prstGeom prst="rect">
             <a:avLst/>
@@ -6165,20 +4630,1588 @@
           <a:noFill/>
         </p:spPr>
         <p:txBody>
+          <a:bodyPr wrap="none">
+            <a:spAutoFit/>
+          </a:bodyPr>
+          <a:lstStyle/>
+          <a:p>
+            <a:pPr>
+              <a:defRPr sz="4400" b="1">
+                <a:solidFill>
+                  <a:srgbClr val="FFFFFF"/>
+                </a:solidFill>
+              </a:defRPr>
+            </a:pPr>
+            <a:r>
+              <a:t>Thank you</a:t>
+            </a:r>
+          </a:p>
+          <a:p>
+            <a:pPr>
+              <a:defRPr sz="2000">
+                <a:solidFill>
+                  <a:srgbClr val="9FC3E8"/>
+                </a:solidFill>
+              </a:defRPr>
+            </a:pPr>
+            <a:r>
+              <a:t>Questions &amp; discussion</a:t>
+            </a:r>
+          </a:p>
+        </p:txBody>
+      </p:sp>
+    </p:spTree>
+  </p:cSld>
+  <p:clrMapOvr>
+    <a:masterClrMapping/>
+  </p:clrMapOvr>
+</p:sld>
+</file>
+
+<file path=ppt/slides/slide2.xml><?xml version="1.0" encoding="utf-8"?>
+<p:sld xmlns:a="http://schemas.openxmlformats.org/drawingml/2006/main" xmlns:p="http://schemas.openxmlformats.org/presentationml/2006/main" xmlns:r="http://schemas.openxmlformats.org/officeDocument/2006/relationships">
+  <p:cSld>
+    <p:spTree>
+      <p:nvGrpSpPr>
+        <p:cNvPr id="1" name=""/>
+        <p:cNvGrpSpPr/>
+        <p:nvPr/>
+      </p:nvGrpSpPr>
+      <p:grpSpPr/>
+      <p:sp>
+        <p:nvSpPr>
+          <p:cNvPr id="2" name="Rectangle 1"/>
+          <p:cNvSpPr/>
+          <p:nvPr/>
+        </p:nvSpPr>
+        <p:spPr>
+          <a:xfrm>
+            <a:off x="0" y="0"/>
+            <a:ext cx="12191695" cy="1051560"/>
+          </a:xfrm>
+          <a:prstGeom prst="rect">
+            <a:avLst/>
+          </a:prstGeom>
+          <a:solidFill>
+            <a:srgbClr val="1B2A4A"/>
+          </a:solidFill>
+          <a:ln>
+            <a:noFill/>
+          </a:ln>
+        </p:spPr>
+        <p:style>
+          <a:lnRef idx="1">
+            <a:schemeClr val="accent1"/>
+          </a:lnRef>
+          <a:fillRef idx="3">
+            <a:schemeClr val="accent1"/>
+          </a:fillRef>
+          <a:effectRef idx="2">
+            <a:schemeClr val="accent1"/>
+          </a:effectRef>
+          <a:fontRef idx="minor">
+            <a:schemeClr val="lt1"/>
+          </a:fontRef>
+        </p:style>
+        <p:txBody>
+          <a:bodyPr rtlCol="0" anchor="ctr" lIns="457200" wrap="square"/>
+          <a:lstStyle/>
+          <a:p>
+            <a:pPr algn="ctr">
+              <a:defRPr sz="3000" b="1">
+                <a:solidFill>
+                  <a:srgbClr val="FFFFFF"/>
+                </a:solidFill>
+              </a:defRPr>
+            </a:pPr>
+            <a:r>
+              <a:t>The Problem</a:t>
+            </a:r>
+          </a:p>
+          <a:p>
+            <a:pPr>
+              <a:defRPr sz="1300">
+                <a:solidFill>
+                  <a:srgbClr val="C9D6EA"/>
+                </a:solidFill>
+              </a:defRPr>
+            </a:pPr>
+            <a:r>
+              <a:t>HSD triage is slow, manual and inconsistent</a:t>
+            </a:r>
+          </a:p>
+        </p:txBody>
+      </p:sp>
+      <p:sp>
+        <p:nvSpPr>
+          <p:cNvPr id="3" name="TextBox 2"/>
+          <p:cNvSpPr txBox="1"/>
+          <p:nvPr/>
+        </p:nvSpPr>
+        <p:spPr>
+          <a:xfrm>
+            <a:off x="640080" y="1371600"/>
+            <a:ext cx="10972800" cy="4937760"/>
+          </a:xfrm>
+          <a:prstGeom prst="rect">
+            <a:avLst/>
+          </a:prstGeom>
+          <a:noFill/>
+        </p:spPr>
+        <p:txBody>
           <a:bodyPr wrap="square">
             <a:spAutoFit/>
           </a:bodyPr>
           <a:lstStyle/>
           <a:p>
             <a:pPr>
-              <a:defRPr sz="2000" b="1">
-                <a:solidFill>
-                  <a:srgbClr val="2E7D32"/>
-                </a:solidFill>
-              </a:defRPr>
-            </a:pPr>
-            <a:r>
-              <a:t>Status: demo-ready</a:t>
+              <a:spcAft>
+                <a:spcPts val="700"/>
+              </a:spcAft>
+              <a:defRPr sz="1900">
+                <a:solidFill>
+                  <a:srgbClr val="1B2A4A"/>
+                </a:solidFill>
+              </a:defRPr>
+            </a:pPr>
+            <a:r>
+              <a:t>Every HSD means reading the whole comment thread, opening SOL / PythonSV / POST logs, and decoding raw error codes by hand.</a:t>
+            </a:r>
+          </a:p>
+          <a:p>
+            <a:pPr>
+              <a:spcAft>
+                <a:spcPts val="700"/>
+              </a:spcAft>
+              <a:defRPr sz="1900">
+                <a:solidFill>
+                  <a:srgbClr val="1B2A4A"/>
+                </a:solidFill>
+              </a:defRPr>
+            </a:pPr>
+            <a:r>
+              <a:t>Decisive evidence is buried — register values, repro steps, experiment matrices, the converged root cause.</a:t>
+            </a:r>
+          </a:p>
+          <a:p>
+            <a:pPr>
+              <a:spcAft>
+                <a:spcPts val="700"/>
+              </a:spcAft>
+              <a:defRPr sz="1900">
+                <a:solidFill>
+                  <a:srgbClr val="1B2A4A"/>
+                </a:solidFill>
+              </a:defRPr>
+            </a:pPr>
+            <a:r>
+              <a:t>Verbose serial logs are full of incidental noise (WHEA / MCA / PCIe) that hides the real failure.</a:t>
+            </a:r>
+          </a:p>
+          <a:p>
+            <a:pPr>
+              <a:spcAft>
+                <a:spcPts val="700"/>
+              </a:spcAft>
+              <a:defRPr sz="1900">
+                <a:solidFill>
+                  <a:srgbClr val="1B2A4A"/>
+                </a:solidFill>
+              </a:defRPr>
+            </a:pPr>
+            <a:r>
+              <a:t>Past-ticket knowledge lives in people's heads, not in a searchable, reusable form.</a:t>
+            </a:r>
+          </a:p>
+          <a:p>
+            <a:pPr>
+              <a:spcAft>
+                <a:spcPts val="700"/>
+              </a:spcAft>
+              <a:defRPr sz="1900">
+                <a:solidFill>
+                  <a:srgbClr val="1B2A4A"/>
+                </a:solidFill>
+              </a:defRPr>
+            </a:pPr>
+            <a:r>
+              <a:t>Net: hours per ticket, uneven quality, and re-investigation of already-solved issues.</a:t>
+            </a:r>
+          </a:p>
+        </p:txBody>
+      </p:sp>
+    </p:spTree>
+  </p:cSld>
+  <p:clrMapOvr>
+    <a:masterClrMapping/>
+  </p:clrMapOvr>
+</p:sld>
+</file>
+
+<file path=ppt/slides/slide3.xml><?xml version="1.0" encoding="utf-8"?>
+<p:sld xmlns:a="http://schemas.openxmlformats.org/drawingml/2006/main" xmlns:p="http://schemas.openxmlformats.org/presentationml/2006/main" xmlns:r="http://schemas.openxmlformats.org/officeDocument/2006/relationships">
+  <p:cSld>
+    <p:spTree>
+      <p:nvGrpSpPr>
+        <p:cNvPr id="1" name=""/>
+        <p:cNvGrpSpPr/>
+        <p:nvPr/>
+      </p:nvGrpSpPr>
+      <p:grpSpPr/>
+      <p:sp>
+        <p:nvSpPr>
+          <p:cNvPr id="2" name="Rectangle 1"/>
+          <p:cNvSpPr/>
+          <p:nvPr/>
+        </p:nvSpPr>
+        <p:spPr>
+          <a:xfrm>
+            <a:off x="0" y="0"/>
+            <a:ext cx="12191695" cy="1051560"/>
+          </a:xfrm>
+          <a:prstGeom prst="rect">
+            <a:avLst/>
+          </a:prstGeom>
+          <a:solidFill>
+            <a:srgbClr val="1B2A4A"/>
+          </a:solidFill>
+          <a:ln>
+            <a:noFill/>
+          </a:ln>
+        </p:spPr>
+        <p:style>
+          <a:lnRef idx="1">
+            <a:schemeClr val="accent1"/>
+          </a:lnRef>
+          <a:fillRef idx="3">
+            <a:schemeClr val="accent1"/>
+          </a:fillRef>
+          <a:effectRef idx="2">
+            <a:schemeClr val="accent1"/>
+          </a:effectRef>
+          <a:fontRef idx="minor">
+            <a:schemeClr val="lt1"/>
+          </a:fontRef>
+        </p:style>
+        <p:txBody>
+          <a:bodyPr rtlCol="0" anchor="ctr" lIns="457200" wrap="square"/>
+          <a:lstStyle/>
+          <a:p>
+            <a:pPr algn="ctr">
+              <a:defRPr sz="3000" b="1">
+                <a:solidFill>
+                  <a:srgbClr val="FFFFFF"/>
+                </a:solidFill>
+              </a:defRPr>
+            </a:pPr>
+            <a:r>
+              <a:t>What It Does</a:t>
+            </a:r>
+          </a:p>
+          <a:p>
+            <a:pPr>
+              <a:defRPr sz="1300">
+                <a:solidFill>
+                  <a:srgbClr val="C9D6EA"/>
+                </a:solidFill>
+              </a:defRPr>
+            </a:pPr>
+            <a:r>
+              <a:t>One HSD ID in → a structured root-cause triage out</a:t>
+            </a:r>
+          </a:p>
+        </p:txBody>
+      </p:sp>
+      <p:sp>
+        <p:nvSpPr>
+          <p:cNvPr id="3" name="TextBox 2"/>
+          <p:cNvSpPr txBox="1"/>
+          <p:nvPr/>
+        </p:nvSpPr>
+        <p:spPr>
+          <a:xfrm>
+            <a:off x="640080" y="1371600"/>
+            <a:ext cx="10972800" cy="4937760"/>
+          </a:xfrm>
+          <a:prstGeom prst="rect">
+            <a:avLst/>
+          </a:prstGeom>
+          <a:noFill/>
+        </p:spPr>
+        <p:txBody>
+          <a:bodyPr wrap="square">
+            <a:spAutoFit/>
+          </a:bodyPr>
+          <a:lstStyle/>
+          <a:p>
+            <a:pPr>
+              <a:spcAft>
+                <a:spcPts val="700"/>
+              </a:spcAft>
+              <a:defRPr sz="1900">
+                <a:solidFill>
+                  <a:srgbClr val="1B2A4A"/>
+                </a:solidFill>
+              </a:defRPr>
+            </a:pPr>
+            <a:r>
+              <a:t>READ — pulls the full ticket over Kerberos SSO: title, description, entire comment thread, attachments.</a:t>
+            </a:r>
+          </a:p>
+          <a:p>
+            <a:pPr>
+              <a:spcAft>
+                <a:spcPts val="700"/>
+              </a:spcAft>
+              <a:defRPr sz="1900">
+                <a:solidFill>
+                  <a:srgbClr val="1B2A4A"/>
+                </a:solidFill>
+              </a:defRPr>
+            </a:pPr>
+            <a:r>
+              <a:t>DECODE — scans SOL / PythonSV / POST logs; decodes MCE/MCA (MCACOD · MSCOD), EWL, RC-Fatal, MCHECK, POST; pulls Axon SVTools signatures.</a:t>
+            </a:r>
+          </a:p>
+          <a:p>
+            <a:pPr>
+              <a:spcAft>
+                <a:spcPts val="700"/>
+              </a:spcAft>
+              <a:defRPr sz="1900">
+                <a:solidFill>
+                  <a:srgbClr val="1B2A4A"/>
+                </a:solidFill>
+              </a:defRPr>
+            </a:pPr>
+            <a:r>
+              <a:t>CORRELATE — reconstructs the investigation, converges on the root cause, separates the real failure from log noise.</a:t>
+            </a:r>
+          </a:p>
+          <a:p>
+            <a:pPr>
+              <a:spcAft>
+                <a:spcPts val="700"/>
+              </a:spcAft>
+              <a:defRPr sz="1900">
+                <a:solidFill>
+                  <a:srgbClr val="1B2A4A"/>
+                </a:solidFill>
+              </a:defRPr>
+            </a:pPr>
+            <a:r>
+              <a:t>REPORT — clean Markdown + HTML triage: debug summary, timeline, findings, root cause, next actions.</a:t>
+            </a:r>
+          </a:p>
+          <a:p>
+            <a:pPr>
+              <a:spcAft>
+                <a:spcPts val="700"/>
+              </a:spcAft>
+              <a:defRPr sz="1900">
+                <a:solidFill>
+                  <a:srgbClr val="1B2A4A"/>
+                </a:solidFill>
+              </a:defRPr>
+            </a:pPr>
+            <a:r>
+              <a:t>LEARN — writes every ticket into a self-learning Knowledge Base; recall improves over time.</a:t>
+            </a:r>
+          </a:p>
+        </p:txBody>
+      </p:sp>
+    </p:spTree>
+  </p:cSld>
+  <p:clrMapOvr>
+    <a:masterClrMapping/>
+  </p:clrMapOvr>
+</p:sld>
+</file>
+
+<file path=ppt/slides/slide4.xml><?xml version="1.0" encoding="utf-8"?>
+<p:sld xmlns:a="http://schemas.openxmlformats.org/drawingml/2006/main" xmlns:p="http://schemas.openxmlformats.org/presentationml/2006/main" xmlns:r="http://schemas.openxmlformats.org/officeDocument/2006/relationships">
+  <p:cSld>
+    <p:spTree>
+      <p:nvGrpSpPr>
+        <p:cNvPr id="1" name=""/>
+        <p:cNvGrpSpPr/>
+        <p:nvPr/>
+      </p:nvGrpSpPr>
+      <p:grpSpPr/>
+      <p:sp>
+        <p:nvSpPr>
+          <p:cNvPr id="2" name="Rectangle 1"/>
+          <p:cNvSpPr/>
+          <p:nvPr/>
+        </p:nvSpPr>
+        <p:spPr>
+          <a:xfrm>
+            <a:off x="0" y="0"/>
+            <a:ext cx="12191695" cy="1051560"/>
+          </a:xfrm>
+          <a:prstGeom prst="rect">
+            <a:avLst/>
+          </a:prstGeom>
+          <a:solidFill>
+            <a:srgbClr val="1B2A4A"/>
+          </a:solidFill>
+          <a:ln>
+            <a:noFill/>
+          </a:ln>
+        </p:spPr>
+        <p:style>
+          <a:lnRef idx="1">
+            <a:schemeClr val="accent1"/>
+          </a:lnRef>
+          <a:fillRef idx="3">
+            <a:schemeClr val="accent1"/>
+          </a:fillRef>
+          <a:effectRef idx="2">
+            <a:schemeClr val="accent1"/>
+          </a:effectRef>
+          <a:fontRef idx="minor">
+            <a:schemeClr val="lt1"/>
+          </a:fontRef>
+        </p:style>
+        <p:txBody>
+          <a:bodyPr rtlCol="0" anchor="ctr" lIns="457200" wrap="square"/>
+          <a:lstStyle/>
+          <a:p>
+            <a:pPr algn="ctr">
+              <a:defRPr sz="3000" b="1">
+                <a:solidFill>
+                  <a:srgbClr val="FFFFFF"/>
+                </a:solidFill>
+              </a:defRPr>
+            </a:pPr>
+            <a:r>
+              <a:t>How It Works</a:t>
+            </a:r>
+          </a:p>
+          <a:p>
+            <a:pPr>
+              <a:defRPr sz="1300">
+                <a:solidFill>
+                  <a:srgbClr val="C9D6EA"/>
+                </a:solidFill>
+              </a:defRPr>
+            </a:pPr>
+            <a:r>
+              <a:t>End-to-end data flow</a:t>
+            </a:r>
+          </a:p>
+        </p:txBody>
+      </p:sp>
+      <p:pic>
+        <p:nvPicPr>
+          <p:cNvPr id="3" name="Picture 2" descr="auto_hsd_analyser_flow.png"/>
+          <p:cNvPicPr>
+            <a:picLocks noChangeAspect="1"/>
+          </p:cNvPicPr>
+          <p:nvPr/>
+        </p:nvPicPr>
+        <p:blipFill>
+          <a:blip r:embed="rId2"/>
+          <a:stretch>
+            <a:fillRect/>
+          </a:stretch>
+        </p:blipFill>
+        <p:spPr>
+          <a:xfrm>
+            <a:off x="320040" y="1234440"/>
+            <a:ext cx="11521440" cy="6516624"/>
+          </a:xfrm>
+          <a:prstGeom prst="rect">
+            <a:avLst/>
+          </a:prstGeom>
+        </p:spPr>
+      </p:pic>
+    </p:spTree>
+  </p:cSld>
+  <p:clrMapOvr>
+    <a:masterClrMapping/>
+  </p:clrMapOvr>
+</p:sld>
+</file>
+
+<file path=ppt/slides/slide5.xml><?xml version="1.0" encoding="utf-8"?>
+<p:sld xmlns:a="http://schemas.openxmlformats.org/drawingml/2006/main" xmlns:p="http://schemas.openxmlformats.org/presentationml/2006/main" xmlns:r="http://schemas.openxmlformats.org/officeDocument/2006/relationships">
+  <p:cSld>
+    <p:spTree>
+      <p:nvGrpSpPr>
+        <p:cNvPr id="1" name=""/>
+        <p:cNvGrpSpPr/>
+        <p:nvPr/>
+      </p:nvGrpSpPr>
+      <p:grpSpPr/>
+      <p:sp>
+        <p:nvSpPr>
+          <p:cNvPr id="2" name="Rectangle 1"/>
+          <p:cNvSpPr/>
+          <p:nvPr/>
+        </p:nvSpPr>
+        <p:spPr>
+          <a:xfrm>
+            <a:off x="0" y="0"/>
+            <a:ext cx="12191695" cy="1051560"/>
+          </a:xfrm>
+          <a:prstGeom prst="rect">
+            <a:avLst/>
+          </a:prstGeom>
+          <a:solidFill>
+            <a:srgbClr val="1B2A4A"/>
+          </a:solidFill>
+          <a:ln>
+            <a:noFill/>
+          </a:ln>
+        </p:spPr>
+        <p:style>
+          <a:lnRef idx="1">
+            <a:schemeClr val="accent1"/>
+          </a:lnRef>
+          <a:fillRef idx="3">
+            <a:schemeClr val="accent1"/>
+          </a:fillRef>
+          <a:effectRef idx="2">
+            <a:schemeClr val="accent1"/>
+          </a:effectRef>
+          <a:fontRef idx="minor">
+            <a:schemeClr val="lt1"/>
+          </a:fontRef>
+        </p:style>
+        <p:txBody>
+          <a:bodyPr rtlCol="0" anchor="ctr" lIns="457200" wrap="square"/>
+          <a:lstStyle/>
+          <a:p>
+            <a:pPr algn="ctr">
+              <a:defRPr sz="3000" b="1">
+                <a:solidFill>
+                  <a:srgbClr val="FFFFFF"/>
+                </a:solidFill>
+              </a:defRPr>
+            </a:pPr>
+            <a:r>
+              <a:t>How It Finds the Root Cause</a:t>
+            </a:r>
+          </a:p>
+          <a:p>
+            <a:pPr>
+              <a:defRPr sz="1300">
+                <a:solidFill>
+                  <a:srgbClr val="C9D6EA"/>
+                </a:solidFill>
+              </a:defRPr>
+            </a:pPr>
+            <a:r>
+              <a:t>Two paths — it always returns an answer</a:t>
+            </a:r>
+          </a:p>
+        </p:txBody>
+      </p:sp>
+      <p:sp>
+        <p:nvSpPr>
+          <p:cNvPr id="3" name="Rounded Rectangle 2"/>
+          <p:cNvSpPr/>
+          <p:nvPr/>
+        </p:nvSpPr>
+        <p:spPr>
+          <a:xfrm>
+            <a:off x="502920" y="1554480"/>
+            <a:ext cx="5394960" cy="4297680"/>
+          </a:xfrm>
+          <a:prstGeom prst="roundRect">
+            <a:avLst/>
+          </a:prstGeom>
+          <a:solidFill>
+            <a:srgbClr val="F2F6FB"/>
+          </a:solidFill>
+          <a:ln w="19050">
+            <a:solidFill>
+              <a:srgbClr val="0068B5"/>
+            </a:solidFill>
+          </a:ln>
+        </p:spPr>
+        <p:style>
+          <a:lnRef idx="1">
+            <a:schemeClr val="accent1"/>
+          </a:lnRef>
+          <a:fillRef idx="3">
+            <a:schemeClr val="accent1"/>
+          </a:fillRef>
+          <a:effectRef idx="2">
+            <a:schemeClr val="accent1"/>
+          </a:effectRef>
+          <a:fontRef idx="minor">
+            <a:schemeClr val="lt1"/>
+          </a:fontRef>
+        </p:style>
+        <p:txBody>
+          <a:bodyPr rtlCol="0" anchor="ctr" wrap="square" lIns="256032" rIns="201168" tIns="201168"/>
+          <a:lstStyle/>
+          <a:p>
+            <a:pPr algn="ctr">
+              <a:spcAft>
+                <a:spcPts val="600"/>
+              </a:spcAft>
+              <a:defRPr sz="1800" b="1">
+                <a:solidFill>
+                  <a:srgbClr val="0068B5"/>
+                </a:solidFill>
+              </a:defRPr>
+            </a:pPr>
+            <a:r>
+              <a:t>A · When engineers have investigated</a:t>
+            </a:r>
+          </a:p>
+          <a:p>
+            <a:pPr>
+              <a:spcBef>
+                <a:spcPts val="700"/>
+              </a:spcBef>
+              <a:defRPr sz="1450">
+                <a:solidFill>
+                  <a:srgbClr val="445566"/>
+                </a:solidFill>
+              </a:defRPr>
+            </a:pPr>
+            <a:r>
+              <a:t>•  Reconstructs the comment thread in order.</a:t>
+            </a:r>
+          </a:p>
+          <a:p>
+            <a:pPr>
+              <a:spcBef>
+                <a:spcPts val="700"/>
+              </a:spcBef>
+              <a:defRPr sz="1450">
+                <a:solidFill>
+                  <a:srgbClr val="445566"/>
+                </a:solidFill>
+              </a:defRPr>
+            </a:pPr>
+            <a:r>
+              <a:t>•  Reports the team's converged root cause, verbatim.</a:t>
+            </a:r>
+          </a:p>
+          <a:p>
+            <a:pPr>
+              <a:spcBef>
+                <a:spcPts val="700"/>
+              </a:spcBef>
+              <a:defRPr sz="1450">
+                <a:solidFill>
+                  <a:srgbClr val="445566"/>
+                </a:solidFill>
+              </a:defRPr>
+            </a:pPr>
+            <a:r>
+              <a:t>•  Cites who said it + how proven (hypothesis vs confirmed).</a:t>
+            </a:r>
+          </a:p>
+          <a:p>
+            <a:pPr>
+              <a:spcBef>
+                <a:spcPts val="700"/>
+              </a:spcBef>
+              <a:defRPr sz="1450">
+                <a:solidFill>
+                  <a:srgbClr val="445566"/>
+                </a:solidFill>
+              </a:defRPr>
+            </a:pPr>
+            <a:r>
+              <a:t>•  Surfaces the decisive register / experiment evidence.</a:t>
+            </a:r>
+          </a:p>
+        </p:txBody>
+      </p:sp>
+      <p:sp>
+        <p:nvSpPr>
+          <p:cNvPr id="4" name="Rounded Rectangle 3"/>
+          <p:cNvSpPr/>
+          <p:nvPr/>
+        </p:nvSpPr>
+        <p:spPr>
+          <a:xfrm>
+            <a:off x="6309360" y="1554480"/>
+            <a:ext cx="5394960" cy="4297680"/>
+          </a:xfrm>
+          <a:prstGeom prst="roundRect">
+            <a:avLst/>
+          </a:prstGeom>
+          <a:solidFill>
+            <a:srgbClr val="F2F6FB"/>
+          </a:solidFill>
+          <a:ln w="19050">
+            <a:solidFill>
+              <a:srgbClr val="00857D"/>
+            </a:solidFill>
+          </a:ln>
+        </p:spPr>
+        <p:style>
+          <a:lnRef idx="1">
+            <a:schemeClr val="accent1"/>
+          </a:lnRef>
+          <a:fillRef idx="3">
+            <a:schemeClr val="accent1"/>
+          </a:fillRef>
+          <a:effectRef idx="2">
+            <a:schemeClr val="accent1"/>
+          </a:effectRef>
+          <a:fontRef idx="minor">
+            <a:schemeClr val="lt1"/>
+          </a:fontRef>
+        </p:style>
+        <p:txBody>
+          <a:bodyPr rtlCol="0" anchor="ctr" wrap="square" lIns="256032" rIns="201168" tIns="201168"/>
+          <a:lstStyle/>
+          <a:p>
+            <a:pPr algn="ctr">
+              <a:spcAft>
+                <a:spcPts val="600"/>
+              </a:spcAft>
+              <a:defRPr sz="1800" b="1">
+                <a:solidFill>
+                  <a:srgbClr val="00857D"/>
+                </a:solidFill>
+              </a:defRPr>
+            </a:pPr>
+            <a:r>
+              <a:t>B · When there are no comments</a:t>
+            </a:r>
+          </a:p>
+          <a:p>
+            <a:pPr>
+              <a:spcBef>
+                <a:spcPts val="700"/>
+              </a:spcBef>
+              <a:defRPr sz="1450">
+                <a:solidFill>
+                  <a:srgbClr val="445566"/>
+                </a:solidFill>
+              </a:defRPr>
+            </a:pPr>
+            <a:r>
+              <a:t>•  Analyses the attached logs end-to-end.</a:t>
+            </a:r>
+          </a:p>
+          <a:p>
+            <a:pPr>
+              <a:spcBef>
+                <a:spcPts val="700"/>
+              </a:spcBef>
+              <a:defRPr sz="1450">
+                <a:solidFill>
+                  <a:srgbClr val="445566"/>
+                </a:solidFill>
+              </a:defRPr>
+            </a:pPr>
+            <a:r>
+              <a:t>•  Decodes MCE / MCA codes → bank, IP, error class.</a:t>
+            </a:r>
+          </a:p>
+          <a:p>
+            <a:pPr>
+              <a:spcBef>
+                <a:spcPts val="700"/>
+              </a:spcBef>
+              <a:defRPr sz="1450">
+                <a:solidFill>
+                  <a:srgbClr val="445566"/>
+                </a:solidFill>
+              </a:defRPr>
+            </a:pPr>
+            <a:r>
+              <a:t>•  Folds in Axon SVTools failure signatures.</a:t>
+            </a:r>
+          </a:p>
+          <a:p>
+            <a:pPr>
+              <a:spcBef>
+                <a:spcPts val="700"/>
+              </a:spcBef>
+              <a:defRPr sz="1450">
+                <a:solidFill>
+                  <a:srgbClr val="445566"/>
+                </a:solidFill>
+              </a:defRPr>
+            </a:pPr>
+            <a:r>
+              <a:t>•  Proposes an evidence-based hypothesis + data to confirm.</a:t>
+            </a:r>
+          </a:p>
+        </p:txBody>
+      </p:sp>
+    </p:spTree>
+  </p:cSld>
+  <p:clrMapOvr>
+    <a:masterClrMapping/>
+  </p:clrMapOvr>
+</p:sld>
+</file>
+
+<file path=ppt/slides/slide6.xml><?xml version="1.0" encoding="utf-8"?>
+<p:sld xmlns:a="http://schemas.openxmlformats.org/drawingml/2006/main" xmlns:p="http://schemas.openxmlformats.org/presentationml/2006/main" xmlns:r="http://schemas.openxmlformats.org/officeDocument/2006/relationships">
+  <p:cSld>
+    <p:spTree>
+      <p:nvGrpSpPr>
+        <p:cNvPr id="1" name=""/>
+        <p:cNvGrpSpPr/>
+        <p:nvPr/>
+      </p:nvGrpSpPr>
+      <p:grpSpPr/>
+      <p:sp>
+        <p:nvSpPr>
+          <p:cNvPr id="2" name="Rectangle 1"/>
+          <p:cNvSpPr/>
+          <p:nvPr/>
+        </p:nvSpPr>
+        <p:spPr>
+          <a:xfrm>
+            <a:off x="0" y="0"/>
+            <a:ext cx="12191695" cy="1051560"/>
+          </a:xfrm>
+          <a:prstGeom prst="rect">
+            <a:avLst/>
+          </a:prstGeom>
+          <a:solidFill>
+            <a:srgbClr val="1B2A4A"/>
+          </a:solidFill>
+          <a:ln>
+            <a:noFill/>
+          </a:ln>
+        </p:spPr>
+        <p:style>
+          <a:lnRef idx="1">
+            <a:schemeClr val="accent1"/>
+          </a:lnRef>
+          <a:fillRef idx="3">
+            <a:schemeClr val="accent1"/>
+          </a:fillRef>
+          <a:effectRef idx="2">
+            <a:schemeClr val="accent1"/>
+          </a:effectRef>
+          <a:fontRef idx="minor">
+            <a:schemeClr val="lt1"/>
+          </a:fontRef>
+        </p:style>
+        <p:txBody>
+          <a:bodyPr rtlCol="0" anchor="ctr" lIns="457200" wrap="square"/>
+          <a:lstStyle/>
+          <a:p>
+            <a:pPr algn="ctr">
+              <a:defRPr sz="3000" b="1">
+                <a:solidFill>
+                  <a:srgbClr val="FFFFFF"/>
+                </a:solidFill>
+              </a:defRPr>
+            </a:pPr>
+            <a:r>
+              <a:t>Key Capabilities</a:t>
+            </a:r>
+          </a:p>
+          <a:p>
+            <a:pPr>
+              <a:defRPr sz="1300">
+                <a:solidFill>
+                  <a:srgbClr val="C9D6EA"/>
+                </a:solidFill>
+              </a:defRPr>
+            </a:pPr>
+            <a:r>
+              <a:t>Reads like a human debug engineer</a:t>
+            </a:r>
+          </a:p>
+        </p:txBody>
+      </p:sp>
+      <p:sp>
+        <p:nvSpPr>
+          <p:cNvPr id="3" name="TextBox 2"/>
+          <p:cNvSpPr txBox="1"/>
+          <p:nvPr/>
+        </p:nvSpPr>
+        <p:spPr>
+          <a:xfrm>
+            <a:off x="640080" y="1371600"/>
+            <a:ext cx="10972800" cy="4937760"/>
+          </a:xfrm>
+          <a:prstGeom prst="rect">
+            <a:avLst/>
+          </a:prstGeom>
+          <a:noFill/>
+        </p:spPr>
+        <p:txBody>
+          <a:bodyPr wrap="square">
+            <a:spAutoFit/>
+          </a:bodyPr>
+          <a:lstStyle/>
+          <a:p>
+            <a:pPr>
+              <a:spcAft>
+                <a:spcPts val="700"/>
+              </a:spcAft>
+              <a:defRPr sz="1700">
+                <a:solidFill>
+                  <a:srgbClr val="1B2A4A"/>
+                </a:solidFill>
+              </a:defRPr>
+            </a:pPr>
+            <a:r>
+              <a:t>Comment-thread analyzer — rebuilds who observed / tried / concluded what, converges on the cause + disposition.</a:t>
+            </a:r>
+          </a:p>
+          <a:p>
+            <a:pPr>
+              <a:spcAft>
+                <a:spcPts val="700"/>
+              </a:spcAft>
+              <a:defRPr sz="1700">
+                <a:solidFill>
+                  <a:srgbClr val="1B2A4A"/>
+                </a:solidFill>
+              </a:defRPr>
+            </a:pPr>
+            <a:r>
+              <a:t>Deep log decode — MCE/MCA (MCACOD · MSCOD → bank / IP / class), EWL, RC-Fatal, MCHECK, POST checkpoints, boot/stage progress.</a:t>
+            </a:r>
+          </a:p>
+          <a:p>
+            <a:pPr>
+              <a:spcAft>
+                <a:spcPts val="700"/>
+              </a:spcAft>
+              <a:defRPr sz="1700">
+                <a:solidFill>
+                  <a:srgbClr val="1B2A4A"/>
+                </a:solidFill>
+              </a:defRPr>
+            </a:pPr>
+            <a:r>
+              <a:t>Axon integration — pulls linked recordings and their SVTools failure signatures as precise corroborating evidence.</a:t>
+            </a:r>
+          </a:p>
+          <a:p>
+            <a:pPr>
+              <a:spcAft>
+                <a:spcPts val="700"/>
+              </a:spcAft>
+              <a:defRPr sz="1700">
+                <a:solidFill>
+                  <a:srgbClr val="1B2A4A"/>
+                </a:solidFill>
+              </a:defRPr>
+            </a:pPr>
+            <a:r>
+              <a:t>Signal-vs-noise ranking — flags incidental WHEA / MCA / PCIe telemetry so the real failure leads.</a:t>
+            </a:r>
+          </a:p>
+          <a:p>
+            <a:pPr>
+              <a:spcAft>
+                <a:spcPts val="700"/>
+              </a:spcAft>
+              <a:defRPr sz="1700">
+                <a:solidFill>
+                  <a:srgbClr val="1B2A4A"/>
+                </a:solidFill>
+              </a:defRPr>
+            </a:pPr>
+            <a:r>
+              <a:t>Deterministic OFFLINE mode — full report with zero LLM dependency; optional LLM adds prose.</a:t>
+            </a:r>
+          </a:p>
+          <a:p>
+            <a:pPr>
+              <a:spcAft>
+                <a:spcPts val="700"/>
+              </a:spcAft>
+              <a:defRPr sz="1700">
+                <a:solidFill>
+                  <a:srgbClr val="1B2A4A"/>
+                </a:solidFill>
+              </a:defRPr>
+            </a:pPr>
+            <a:r>
+              <a:t>Self-learning KB — recalls similar past HSDs with their root cause and fix.</a:t>
+            </a:r>
+          </a:p>
+        </p:txBody>
+      </p:sp>
+    </p:spTree>
+  </p:cSld>
+  <p:clrMapOvr>
+    <a:masterClrMapping/>
+  </p:clrMapOvr>
+</p:sld>
+</file>
+
+<file path=ppt/slides/slide7.xml><?xml version="1.0" encoding="utf-8"?>
+<p:sld xmlns:a="http://schemas.openxmlformats.org/drawingml/2006/main" xmlns:p="http://schemas.openxmlformats.org/presentationml/2006/main" xmlns:r="http://schemas.openxmlformats.org/officeDocument/2006/relationships">
+  <p:cSld>
+    <p:spTree>
+      <p:nvGrpSpPr>
+        <p:cNvPr id="1" name=""/>
+        <p:cNvGrpSpPr/>
+        <p:nvPr/>
+      </p:nvGrpSpPr>
+      <p:grpSpPr/>
+      <p:sp>
+        <p:nvSpPr>
+          <p:cNvPr id="2" name="Rectangle 1"/>
+          <p:cNvSpPr/>
+          <p:nvPr/>
+        </p:nvSpPr>
+        <p:spPr>
+          <a:xfrm>
+            <a:off x="0" y="0"/>
+            <a:ext cx="12191695" cy="1051560"/>
+          </a:xfrm>
+          <a:prstGeom prst="rect">
+            <a:avLst/>
+          </a:prstGeom>
+          <a:solidFill>
+            <a:srgbClr val="1B2A4A"/>
+          </a:solidFill>
+          <a:ln>
+            <a:noFill/>
+          </a:ln>
+        </p:spPr>
+        <p:style>
+          <a:lnRef idx="1">
+            <a:schemeClr val="accent1"/>
+          </a:lnRef>
+          <a:fillRef idx="3">
+            <a:schemeClr val="accent1"/>
+          </a:fillRef>
+          <a:effectRef idx="2">
+            <a:schemeClr val="accent1"/>
+          </a:effectRef>
+          <a:fontRef idx="minor">
+            <a:schemeClr val="lt1"/>
+          </a:fontRef>
+        </p:style>
+        <p:txBody>
+          <a:bodyPr rtlCol="0" anchor="ctr" lIns="457200" wrap="square"/>
+          <a:lstStyle/>
+          <a:p>
+            <a:pPr algn="ctr">
+              <a:defRPr sz="3000" b="1">
+                <a:solidFill>
+                  <a:srgbClr val="FFFFFF"/>
+                </a:solidFill>
+              </a:defRPr>
+            </a:pPr>
+            <a:r>
+              <a:t>Anatomy of a Report</a:t>
+            </a:r>
+          </a:p>
+          <a:p>
+            <a:pPr>
+              <a:defRPr sz="1300">
+                <a:solidFill>
+                  <a:srgbClr val="C9D6EA"/>
+                </a:solidFill>
+              </a:defRPr>
+            </a:pPr>
+            <a:r>
+              <a:t>What your manager will see</a:t>
+            </a:r>
+          </a:p>
+        </p:txBody>
+      </p:sp>
+      <p:sp>
+        <p:nvSpPr>
+          <p:cNvPr id="3" name="TextBox 2"/>
+          <p:cNvSpPr txBox="1"/>
+          <p:nvPr/>
+        </p:nvSpPr>
+        <p:spPr>
+          <a:xfrm>
+            <a:off x="640080" y="1371600"/>
+            <a:ext cx="10972800" cy="4937760"/>
+          </a:xfrm>
+          <a:prstGeom prst="rect">
+            <a:avLst/>
+          </a:prstGeom>
+          <a:noFill/>
+        </p:spPr>
+        <p:txBody>
+          <a:bodyPr wrap="square">
+            <a:spAutoFit/>
+          </a:bodyPr>
+          <a:lstStyle/>
+          <a:p>
+            <a:pPr>
+              <a:spcAft>
+                <a:spcPts val="700"/>
+              </a:spcAft>
+              <a:defRPr sz="1800">
+                <a:solidFill>
+                  <a:srgbClr val="1B2A4A"/>
+                </a:solidFill>
+              </a:defRPr>
+            </a:pPr>
+            <a:r>
+              <a:t>Debug Summary — RESULT, boot/stage progress, metrics, hypothesis, conclusion, next actions.</a:t>
+            </a:r>
+          </a:p>
+          <a:p>
+            <a:pPr>
+              <a:spcAft>
+                <a:spcPts val="700"/>
+              </a:spcAft>
+              <a:defRPr sz="1800">
+                <a:solidFill>
+                  <a:srgbClr val="1B2A4A"/>
+                </a:solidFill>
+              </a:defRPr>
+            </a:pPr>
+            <a:r>
+              <a:t>Investigation Summary — compact timeline, key evidence, converged root cause, disposition.</a:t>
+            </a:r>
+          </a:p>
+          <a:p>
+            <a:pPr>
+              <a:spcAft>
+                <a:spcPts val="700"/>
+              </a:spcAft>
+              <a:defRPr sz="1800">
+                <a:solidFill>
+                  <a:srgbClr val="1B2A4A"/>
+                </a:solidFill>
+              </a:defRPr>
+            </a:pPr>
+            <a:r>
+              <a:t>Findings — failure signatures (noise flagged), decoded MCA / BIOS / POST, confidence score.</a:t>
+            </a:r>
+          </a:p>
+          <a:p>
+            <a:pPr>
+              <a:spcAft>
+                <a:spcPts val="700"/>
+              </a:spcAft>
+              <a:defRPr sz="1800">
+                <a:solidFill>
+                  <a:srgbClr val="1B2A4A"/>
+                </a:solidFill>
+              </a:defRPr>
+            </a:pPr>
+            <a:r>
+              <a:t>Root Cause + Validation — verdict, provenance, and what's needed to confirm it.</a:t>
+            </a:r>
+          </a:p>
+          <a:p>
+            <a:pPr>
+              <a:spcAft>
+                <a:spcPts val="700"/>
+              </a:spcAft>
+              <a:defRPr sz="1800">
+                <a:solidFill>
+                  <a:srgbClr val="1B2A4A"/>
+                </a:solidFill>
+              </a:defRPr>
+            </a:pPr>
+            <a:r>
+              <a:t>Next Actions — targeted checks + PythonSV / rdmsr commands to close it out.</a:t>
+            </a:r>
+          </a:p>
+          <a:p>
+            <a:pPr>
+              <a:spcAft>
+                <a:spcPts val="700"/>
+              </a:spcAft>
+              <a:defRPr sz="1800">
+                <a:solidFill>
+                  <a:srgbClr val="1B2A4A"/>
+                </a:solidFill>
+              </a:defRPr>
+            </a:pPr>
+            <a:r>
+              <a:t>Appendix — full narrative, decoded log evidence, KB matches, similar HSDs.</a:t>
+            </a:r>
+          </a:p>
+        </p:txBody>
+      </p:sp>
+    </p:spTree>
+  </p:cSld>
+  <p:clrMapOvr>
+    <a:masterClrMapping/>
+  </p:clrMapOvr>
+</p:sld>
+</file>
+
+<file path=ppt/slides/slide8.xml><?xml version="1.0" encoding="utf-8"?>
+<p:sld xmlns:a="http://schemas.openxmlformats.org/drawingml/2006/main" xmlns:p="http://schemas.openxmlformats.org/presentationml/2006/main" xmlns:r="http://schemas.openxmlformats.org/officeDocument/2006/relationships">
+  <p:cSld>
+    <p:spTree>
+      <p:nvGrpSpPr>
+        <p:cNvPr id="1" name=""/>
+        <p:cNvGrpSpPr/>
+        <p:nvPr/>
+      </p:nvGrpSpPr>
+      <p:grpSpPr/>
+      <p:sp>
+        <p:nvSpPr>
+          <p:cNvPr id="2" name="Rectangle 1"/>
+          <p:cNvSpPr/>
+          <p:nvPr/>
+        </p:nvSpPr>
+        <p:spPr>
+          <a:xfrm>
+            <a:off x="0" y="0"/>
+            <a:ext cx="12191695" cy="1051560"/>
+          </a:xfrm>
+          <a:prstGeom prst="rect">
+            <a:avLst/>
+          </a:prstGeom>
+          <a:solidFill>
+            <a:srgbClr val="1B2A4A"/>
+          </a:solidFill>
+          <a:ln>
+            <a:noFill/>
+          </a:ln>
+        </p:spPr>
+        <p:style>
+          <a:lnRef idx="1">
+            <a:schemeClr val="accent1"/>
+          </a:lnRef>
+          <a:fillRef idx="3">
+            <a:schemeClr val="accent1"/>
+          </a:fillRef>
+          <a:effectRef idx="2">
+            <a:schemeClr val="accent1"/>
+          </a:effectRef>
+          <a:fontRef idx="minor">
+            <a:schemeClr val="lt1"/>
+          </a:fontRef>
+        </p:style>
+        <p:txBody>
+          <a:bodyPr rtlCol="0" anchor="ctr" lIns="457200" wrap="square"/>
+          <a:lstStyle/>
+          <a:p>
+            <a:pPr algn="ctr">
+              <a:defRPr sz="3000" b="1">
+                <a:solidFill>
+                  <a:srgbClr val="FFFFFF"/>
+                </a:solidFill>
+              </a:defRPr>
+            </a:pPr>
+            <a:r>
+              <a:t>Live Demo</a:t>
+            </a:r>
+          </a:p>
+          <a:p>
+            <a:pPr>
+              <a:defRPr sz="1300">
+                <a:solidFill>
+                  <a:srgbClr val="C9D6EA"/>
+                </a:solidFill>
+              </a:defRPr>
+            </a:pPr>
+            <a:r>
+              <a:t>Sample: HSD 16031066261 — Warm Reset / GBLRST_CAUSE1</a:t>
+            </a:r>
+          </a:p>
+        </p:txBody>
+      </p:sp>
+      <p:sp>
+        <p:nvSpPr>
+          <p:cNvPr id="3" name="TextBox 2"/>
+          <p:cNvSpPr txBox="1"/>
+          <p:nvPr/>
+        </p:nvSpPr>
+        <p:spPr>
+          <a:xfrm>
+            <a:off x="502920" y="1371600"/>
+            <a:ext cx="4937760" cy="4937760"/>
+          </a:xfrm>
+          <a:prstGeom prst="rect">
+            <a:avLst/>
+          </a:prstGeom>
+          <a:noFill/>
+        </p:spPr>
+        <p:txBody>
+          <a:bodyPr wrap="square">
+            <a:spAutoFit/>
+          </a:bodyPr>
+          <a:lstStyle/>
+          <a:p>
+            <a:pPr>
+              <a:spcAft>
+                <a:spcPts val="700"/>
+              </a:spcAft>
+              <a:defRPr sz="1500">
+                <a:solidFill>
+                  <a:srgbClr val="1B2A4A"/>
+                </a:solidFill>
+              </a:defRPr>
+            </a:pPr>
+            <a:r>
+              <a:t>Root cause: S3M version mismatch (Base/Fit-loaded UP vs OSPL UP).</a:t>
+            </a:r>
+          </a:p>
+          <a:p>
+            <a:pPr>
+              <a:spcAft>
+                <a:spcPts val="700"/>
+              </a:spcAft>
+              <a:defRPr sz="1500">
+                <a:solidFill>
+                  <a:srgbClr val="1B2A4A"/>
+                </a:solidFill>
+              </a:defRPr>
+            </a:pPr>
+            <a:r>
+              <a:t>Evidence: GBLRST_CAUSE1 = 0x4 (pass) vs 0x0 (fail) + 6-row experiment matrix.</a:t>
+            </a:r>
+          </a:p>
+          <a:p>
+            <a:pPr>
+              <a:spcAft>
+                <a:spcPts val="700"/>
+              </a:spcAft>
+              <a:defRPr sz="1500">
+                <a:solidFill>
+                  <a:srgbClr val="1B2A4A"/>
+                </a:solidFill>
+              </a:defRPr>
+            </a:pPr>
+            <a:r>
+              <a:t>Noise flag: WHEA / MCA / PCIe marked incidental.</a:t>
+            </a:r>
+          </a:p>
+          <a:p>
+            <a:pPr>
+              <a:spcAft>
+                <a:spcPts val="700"/>
+              </a:spcAft>
+              <a:defRPr sz="1500">
+                <a:solidFill>
+                  <a:srgbClr val="1B2A4A"/>
+                </a:solidFill>
+              </a:defRPr>
+            </a:pPr>
+            <a:r>
+              <a:t>Disposition: root-caused; handed to S3M team; ticket open.</a:t>
+            </a:r>
+          </a:p>
+        </p:txBody>
+      </p:sp>
+      <p:pic>
+        <p:nvPicPr>
+          <p:cNvPr id="4" name="Picture 3" descr="report_screenshot.png"/>
+          <p:cNvPicPr>
+            <a:picLocks noChangeAspect="1"/>
+          </p:cNvPicPr>
+          <p:nvPr/>
+        </p:nvPicPr>
+        <p:blipFill>
+          <a:blip r:embed="rId2"/>
+          <a:stretch>
+            <a:fillRect/>
+          </a:stretch>
+        </p:blipFill>
+        <p:spPr>
+          <a:xfrm>
+            <a:off x="5623560" y="1325880"/>
+            <a:ext cx="6126480" cy="4884626"/>
+          </a:xfrm>
+          <a:prstGeom prst="rect">
+            <a:avLst/>
+          </a:prstGeom>
+        </p:spPr>
+      </p:pic>
+    </p:spTree>
+  </p:cSld>
+  <p:clrMapOvr>
+    <a:masterClrMapping/>
+  </p:clrMapOvr>
+</p:sld>
+</file>
+
+<file path=ppt/slides/slide9.xml><?xml version="1.0" encoding="utf-8"?>
+<p:sld xmlns:a="http://schemas.openxmlformats.org/drawingml/2006/main" xmlns:p="http://schemas.openxmlformats.org/presentationml/2006/main" xmlns:r="http://schemas.openxmlformats.org/officeDocument/2006/relationships">
+  <p:cSld>
+    <p:spTree>
+      <p:nvGrpSpPr>
+        <p:cNvPr id="1" name=""/>
+        <p:cNvGrpSpPr/>
+        <p:nvPr/>
+      </p:nvGrpSpPr>
+      <p:grpSpPr/>
+      <p:sp>
+        <p:nvSpPr>
+          <p:cNvPr id="2" name="Rectangle 1"/>
+          <p:cNvSpPr/>
+          <p:nvPr/>
+        </p:nvSpPr>
+        <p:spPr>
+          <a:xfrm>
+            <a:off x="0" y="0"/>
+            <a:ext cx="12191695" cy="1051560"/>
+          </a:xfrm>
+          <a:prstGeom prst="rect">
+            <a:avLst/>
+          </a:prstGeom>
+          <a:solidFill>
+            <a:srgbClr val="1B2A4A"/>
+          </a:solidFill>
+          <a:ln>
+            <a:noFill/>
+          </a:ln>
+        </p:spPr>
+        <p:style>
+          <a:lnRef idx="1">
+            <a:schemeClr val="accent1"/>
+          </a:lnRef>
+          <a:fillRef idx="3">
+            <a:schemeClr val="accent1"/>
+          </a:fillRef>
+          <a:effectRef idx="2">
+            <a:schemeClr val="accent1"/>
+          </a:effectRef>
+          <a:fontRef idx="minor">
+            <a:schemeClr val="lt1"/>
+          </a:fontRef>
+        </p:style>
+        <p:txBody>
+          <a:bodyPr rtlCol="0" anchor="ctr" lIns="457200" wrap="square"/>
+          <a:lstStyle/>
+          <a:p>
+            <a:pPr algn="ctr">
+              <a:defRPr sz="3000" b="1">
+                <a:solidFill>
+                  <a:srgbClr val="FFFFFF"/>
+                </a:solidFill>
+              </a:defRPr>
+            </a:pPr>
+            <a:r>
+              <a:t>Benefits &amp; Impact</a:t>
+            </a:r>
+          </a:p>
+          <a:p>
+            <a:pPr>
+              <a:defRPr sz="1300">
+                <a:solidFill>
+                  <a:srgbClr val="C9D6EA"/>
+                </a:solidFill>
+              </a:defRPr>
+            </a:pPr>
+            <a:r>
+              <a:t>≈ 2 min per ticket vs 2–4 hrs manual (illustrative estimate — tune to your data)</a:t>
+            </a:r>
+          </a:p>
+        </p:txBody>
+      </p:sp>
+      <p:sp>
+        <p:nvSpPr>
+          <p:cNvPr id="3" name="TextBox 2"/>
+          <p:cNvSpPr txBox="1"/>
+          <p:nvPr/>
+        </p:nvSpPr>
+        <p:spPr>
+          <a:xfrm>
+            <a:off x="640080" y="1371600"/>
+            <a:ext cx="10972800" cy="4937760"/>
+          </a:xfrm>
+          <a:prstGeom prst="rect">
+            <a:avLst/>
+          </a:prstGeom>
+          <a:noFill/>
+        </p:spPr>
+        <p:txBody>
+          <a:bodyPr wrap="square">
+            <a:spAutoFit/>
+          </a:bodyPr>
+          <a:lstStyle/>
+          <a:p>
+            <a:pPr>
+              <a:spcAft>
+                <a:spcPts val="700"/>
+              </a:spcAft>
+              <a:defRPr sz="1700">
+                <a:solidFill>
+                  <a:srgbClr val="1B2A4A"/>
+                </a:solidFill>
+              </a:defRPr>
+            </a:pPr>
+            <a:r>
+              <a:t>Faster — minutes vs hours per ticket; reading, decoding and correlation are automated.</a:t>
+            </a:r>
+          </a:p>
+          <a:p>
+            <a:pPr>
+              <a:spcAft>
+                <a:spcPts val="700"/>
+              </a:spcAft>
+              <a:defRPr sz="1700">
+                <a:solidFill>
+                  <a:srgbClr val="1B2A4A"/>
+                </a:solidFill>
+              </a:defRPr>
+            </a:pPr>
+            <a:r>
+              <a:t>Consistent — engineer-grade output every time, independent of who runs it.</a:t>
+            </a:r>
+          </a:p>
+          <a:p>
+            <a:pPr>
+              <a:spcAft>
+                <a:spcPts val="700"/>
+              </a:spcAft>
+              <a:defRPr sz="1700">
+                <a:solidFill>
+                  <a:srgbClr val="1B2A4A"/>
+                </a:solidFill>
+              </a:defRPr>
+            </a:pPr>
+            <a:r>
+              <a:t>Complete — decisive register / MCA / experiment evidence surfaced automatically, nothing missed.</a:t>
+            </a:r>
+          </a:p>
+          <a:p>
+            <a:pPr>
+              <a:spcAft>
+                <a:spcPts val="700"/>
+              </a:spcAft>
+              <a:defRPr sz="1700">
+                <a:solidFill>
+                  <a:srgbClr val="1B2A4A"/>
+                </a:solidFill>
+              </a:defRPr>
+            </a:pPr>
+            <a:r>
+              <a:t>Always answers — cites the team's cause, or proposes one from logs + MCE/MCA + Axon.</a:t>
+            </a:r>
+          </a:p>
+          <a:p>
+            <a:pPr>
+              <a:spcAft>
+                <a:spcPts val="700"/>
+              </a:spcAft>
+              <a:defRPr sz="1700">
+                <a:solidFill>
+                  <a:srgbClr val="1B2A4A"/>
+                </a:solidFill>
+              </a:defRPr>
+            </a:pPr>
+            <a:r>
+              <a:t>Secure — Kerberos SSO, runs locally on any Intel-domain Windows machine.</a:t>
+            </a:r>
+          </a:p>
+          <a:p>
+            <a:pPr>
+              <a:spcAft>
+                <a:spcPts val="700"/>
+              </a:spcAft>
+              <a:defRPr sz="1700">
+                <a:solidFill>
+                  <a:srgbClr val="1B2A4A"/>
+                </a:solidFill>
+              </a:defRPr>
+            </a:pPr>
+            <a:r>
+              <a:t>Compounding — the Knowledge Base makes every future triage faster and smarter.</a:t>
             </a:r>
           </a:p>
         </p:txBody>

--- a/presentation/HSDES_NEXUS_Presentation.pptx
+++ b/presentation/HSDES_NEXUS_Presentation.pptx
@@ -3490,7 +3490,7 @@
               </a:defRPr>
             </a:pPr>
             <a:r>
-              <a:t>Phase 0 → Phase 5 · where we are and where we're going</a:t>
+              <a:t>Phase 0 → Phase 5 · current state and release gates</a:t>
             </a:r>
           </a:p>
         </p:txBody>
@@ -3584,7 +3584,7 @@
               </a:defRPr>
             </a:pPr>
             <a:r>
-              <a:t>What's New — Automation, Validation &amp; Phase 2</a:t>
+              <a:t>What's New — Operational Loop &amp; Qualification</a:t>
             </a:r>
           </a:p>
           <a:p>
@@ -3596,7 +3596,7 @@
               </a:defRPr>
             </a:pPr>
             <a:r>
-              <a:t>Shipped since the engineer-grade RCA engine</a:t>
+              <a:t>Current release baseline and remaining production gates</a:t>
             </a:r>
           </a:p>
         </p:txBody>
@@ -3694,7 +3694,7 @@
               </a:defRPr>
             </a:pPr>
             <a:r>
-              <a:t>Phase 2 AutoHSD triage — parse node from the title → SSH → collect failure-type evidence profiles → run RCA → gate → update; node-down handled gracefully.</a:t>
+              <a:t>AutoHSD closed loop — retrieve HSD → collect missing evidence with guarded SSH/BMC requirements → re-analyze → compare before/after → gate → draft/post result; 10 focused integration tests pass.</a:t>
             </a:r>
           </a:p>
           <a:p>
@@ -3709,7 +3709,22 @@
               </a:defRPr>
             </a:pPr>
             <a:r>
-              <a:t>RCA Regression Framework — golden_cases/ corpus + tools/rca_benchmark.py scoring owning-IP accuracy, precision/recall, overconfidence, false-attribution, contradiction-miss.</a:t>
+              <a:t>Release baseline — 75 tests pass, provenance covers 18/18 resources with 0 UNKNOWN, and 47 strict Golden Cases are loaded.</a:t>
+            </a:r>
+          </a:p>
+          <a:p>
+            <a:pPr>
+              <a:spcAft>
+                <a:spcPts val="700"/>
+              </a:spcAft>
+              <a:defRPr sz="1500">
+                <a:solidFill>
+                  <a:srgbClr val="1B2A4A"/>
+                </a:solidFill>
+              </a:defRPr>
+            </a:pPr>
+            <a:r>
+              <a:t>Qualification blocker — the bounded offline benchmark completes but produces 0/47 actionable predictions; live RCA measurement remains separate from fixture-only validation.</a:t>
             </a:r>
           </a:p>
         </p:txBody>
@@ -3779,7 +3794,7 @@
               </a:defRPr>
             </a:pPr>
             <a:r>
-              <a:t>Phase 2 — AutoHSD Triage Engine</a:t>
+              <a:t>Phase 2 — AutoHSD Closed-Loop Tool</a:t>
             </a:r>
           </a:p>
           <a:p>
@@ -3791,7 +3806,7 @@
               </a:defRPr>
             </a:pPr>
             <a:r>
-              <a:t>Current focus: one-liner HSD → live node triage</a:t>
+              <a:t>Implemented and fixture-tested; SSH collection remains opt-in</a:t>
             </a:r>
           </a:p>
         </p:txBody>
@@ -3923,7 +3938,7 @@
               </a:defRPr>
             </a:pPr>
             <a:r>
-              <a:t>•  Gate PASS → auto-update HSD · DRAFT → store RCA for review.</a:t>
+              <a:t>•  Gate PASS → draft HSD update; POST remains opt-in via HSDES_WRITE_ENABLED.</a:t>
             </a:r>
           </a:p>
         </p:txBody>
